--- a/документация/Кондратьев БД И СУБД презентация.pptx
+++ b/документация/Кондратьев БД И СУБД презентация.pptx
@@ -5,7 +5,7 @@
     <p:sldMasterId id="2147483648" r:id="rId1"/>
   </p:sldMasterIdLst>
   <p:notesMasterIdLst>
-    <p:notesMasterId r:id="rId14"/>
+    <p:notesMasterId r:id="rId24"/>
   </p:notesMasterIdLst>
   <p:sldIdLst>
     <p:sldId id="256" r:id="rId2"/>
@@ -14,12 +14,22 @@
     <p:sldId id="276" r:id="rId5"/>
     <p:sldId id="286" r:id="rId6"/>
     <p:sldId id="277" r:id="rId7"/>
-    <p:sldId id="278" r:id="rId8"/>
-    <p:sldId id="288" r:id="rId9"/>
-    <p:sldId id="289" r:id="rId10"/>
-    <p:sldId id="280" r:id="rId11"/>
-    <p:sldId id="282" r:id="rId12"/>
-    <p:sldId id="272" r:id="rId13"/>
+    <p:sldId id="290" r:id="rId8"/>
+    <p:sldId id="278" r:id="rId9"/>
+    <p:sldId id="288" r:id="rId10"/>
+    <p:sldId id="289" r:id="rId11"/>
+    <p:sldId id="280" r:id="rId12"/>
+    <p:sldId id="291" r:id="rId13"/>
+    <p:sldId id="293" r:id="rId14"/>
+    <p:sldId id="294" r:id="rId15"/>
+    <p:sldId id="295" r:id="rId16"/>
+    <p:sldId id="292" r:id="rId17"/>
+    <p:sldId id="296" r:id="rId18"/>
+    <p:sldId id="297" r:id="rId19"/>
+    <p:sldId id="298" r:id="rId20"/>
+    <p:sldId id="299" r:id="rId21"/>
+    <p:sldId id="282" r:id="rId22"/>
+    <p:sldId id="272" r:id="rId23"/>
   </p:sldIdLst>
   <p:sldSz cx="12192000" cy="6858000"/>
   <p:notesSz cx="6858000" cy="9144000"/>
@@ -3402,13 +3412,286 @@
           </a:bodyPr>
           <a:lstStyle/>
           <a:p>
+            <a:pPr marL="0" marR="0" lvl="0" indent="0" algn="ctr" defTabSz="914400" rtl="0" eaLnBrk="1" fontAlgn="auto" latinLnBrk="0" hangingPunct="1">
+              <a:lnSpc>
+                <a:spcPct val="100000"/>
+              </a:lnSpc>
+              <a:spcBef>
+                <a:spcPts val="0"/>
+              </a:spcBef>
+              <a:spcAft>
+                <a:spcPts val="0"/>
+              </a:spcAft>
+              <a:buClrTx/>
+              <a:buSzTx/>
+              <a:buFontTx/>
+              <a:buNone/>
+              <a:tabLst/>
+              <a:defRPr/>
+            </a:pPr>
+            <a:r>
+              <a:rPr kumimoji="0" lang="ru-RU" sz="1800" i="0" u="none" strike="noStrike" kern="1200" cap="none" spc="-1" normalizeH="0" baseline="0" noProof="0" dirty="0">
+                <a:ln>
+                  <a:noFill/>
+                </a:ln>
+                <a:solidFill>
+                  <a:srgbClr val="FFFFFF"/>
+                </a:solidFill>
+                <a:effectLst/>
+                <a:uLnTx/>
+                <a:uFillTx/>
+                <a:latin typeface="Calibri" panose="020F0502020204030204" pitchFamily="34" charset="0"/>
+                <a:ea typeface="DejaVu Sans"/>
+                <a:cs typeface="Calibri" panose="020F0502020204030204" pitchFamily="34" charset="0"/>
+              </a:rPr>
+              <a:t>Логическая модель</a:t>
+            </a:r>
+            <a:endParaRPr kumimoji="0" lang="ru-RU" sz="1800" i="0" u="none" strike="noStrike" kern="1200" cap="none" spc="-1" normalizeH="0" baseline="0" noProof="0" dirty="0">
+              <a:ln>
+                <a:noFill/>
+              </a:ln>
+              <a:solidFill>
+                <a:prstClr val="black"/>
+              </a:solidFill>
+              <a:effectLst/>
+              <a:uLnTx/>
+              <a:uFillTx/>
+              <a:latin typeface="Calibri" panose="020F0502020204030204" pitchFamily="34" charset="0"/>
+              <a:ea typeface="DejaVu Sans"/>
+              <a:cs typeface="Calibri" panose="020F0502020204030204" pitchFamily="34" charset="0"/>
+            </a:endParaRPr>
+          </a:p>
+        </p:txBody>
+      </p:sp>
+      <p:sp>
+        <p:nvSpPr>
+          <p:cNvPr id="55" name="CustomShape 2"/>
+          <p:cNvSpPr/>
+          <p:nvPr/>
+        </p:nvSpPr>
+        <p:spPr>
+          <a:xfrm>
+            <a:off x="11109960" y="6324480"/>
+            <a:ext cx="468720" cy="364680"/>
+          </a:xfrm>
+          <a:prstGeom prst="rect">
+            <a:avLst/>
+          </a:prstGeom>
+          <a:noFill/>
+          <a:ln>
+            <a:noFill/>
+          </a:ln>
+        </p:spPr>
+        <p:style>
+          <a:lnRef idx="0">
+            <a:scrgbClr r="0" g="0" b="0"/>
+          </a:lnRef>
+          <a:fillRef idx="0">
+            <a:scrgbClr r="0" g="0" b="0"/>
+          </a:fillRef>
+          <a:effectRef idx="0">
+            <a:scrgbClr r="0" g="0" b="0"/>
+          </a:effectRef>
+          <a:fontRef idx="minor"/>
+        </p:style>
+        <p:txBody>
+          <a:bodyPr lIns="90000" tIns="45000" rIns="90000" bIns="45000">
+            <a:spAutoFit/>
+          </a:bodyPr>
+          <a:lstStyle/>
+          <a:p>
+            <a:pPr marL="0" marR="0" lvl="0" indent="0" algn="ctr" defTabSz="914400" rtl="0" eaLnBrk="1" fontAlgn="auto" latinLnBrk="0" hangingPunct="1">
+              <a:lnSpc>
+                <a:spcPct val="100000"/>
+              </a:lnSpc>
+              <a:spcBef>
+                <a:spcPts val="0"/>
+              </a:spcBef>
+              <a:spcAft>
+                <a:spcPts val="0"/>
+              </a:spcAft>
+              <a:buClrTx/>
+              <a:buSzTx/>
+              <a:buFontTx/>
+              <a:buNone/>
+              <a:tabLst/>
+              <a:defRPr/>
+            </a:pPr>
+            <a:fld id="{89F79450-C151-457E-9813-B313ED05920E}" type="slidenum">
+              <a:rPr kumimoji="0" lang="ru-RU" sz="1800" b="0" i="0" u="none" strike="noStrike" kern="1200" cap="none" spc="-1" normalizeH="0" baseline="0" noProof="0">
+                <a:ln>
+                  <a:noFill/>
+                </a:ln>
+                <a:solidFill>
+                  <a:srgbClr val="FFFFFF"/>
+                </a:solidFill>
+                <a:effectLst/>
+                <a:uLnTx/>
+                <a:uFillTx/>
+                <a:latin typeface="Elektra Medium Pro"/>
+                <a:ea typeface="DejaVu Sans"/>
+                <a:cs typeface="DejaVu Sans"/>
+              </a:rPr>
+              <a:pPr marL="0" marR="0" lvl="0" indent="0" algn="ctr" defTabSz="914400" rtl="0" eaLnBrk="1" fontAlgn="auto" latinLnBrk="0" hangingPunct="1">
+                <a:lnSpc>
+                  <a:spcPct val="100000"/>
+                </a:lnSpc>
+                <a:spcBef>
+                  <a:spcPts val="0"/>
+                </a:spcBef>
+                <a:spcAft>
+                  <a:spcPts val="0"/>
+                </a:spcAft>
+                <a:buClrTx/>
+                <a:buSzTx/>
+                <a:buFontTx/>
+                <a:buNone/>
+                <a:tabLst/>
+                <a:defRPr/>
+              </a:pPr>
+              <a:t>10</a:t>
+            </a:fld>
+            <a:endParaRPr kumimoji="0" lang="ru-RU" sz="1800" b="0" i="0" u="none" strike="noStrike" kern="1200" cap="none" spc="-1" normalizeH="0" baseline="0" noProof="0">
+              <a:ln>
+                <a:noFill/>
+              </a:ln>
+              <a:solidFill>
+                <a:prstClr val="black"/>
+              </a:solidFill>
+              <a:effectLst/>
+              <a:uLnTx/>
+              <a:uFillTx/>
+              <a:latin typeface="Arial"/>
+              <a:ea typeface="DejaVu Sans"/>
+              <a:cs typeface="DejaVu Sans"/>
+            </a:endParaRPr>
+          </a:p>
+        </p:txBody>
+      </p:sp>
+      <p:pic>
+        <p:nvPicPr>
+          <p:cNvPr id="10" name="Рисунок 9">
+            <a:extLst>
+              <a:ext uri="{FF2B5EF4-FFF2-40B4-BE49-F238E27FC236}">
+                <a16:creationId xmlns:a16="http://schemas.microsoft.com/office/drawing/2014/main" id="{4B392EEC-1A52-4BE8-B960-DC3892BC865F}"/>
+              </a:ext>
+            </a:extLst>
+          </p:cNvPr>
+          <p:cNvPicPr>
+            <a:picLocks noChangeAspect="1"/>
+          </p:cNvPicPr>
+          <p:nvPr/>
+        </p:nvPicPr>
+        <p:blipFill>
+          <a:blip r:embed="rId3">
+            <a:extLst>
+              <a:ext uri="{28A0092B-C50C-407E-A947-70E740481C1C}">
+                <a14:useLocalDpi xmlns:a14="http://schemas.microsoft.com/office/drawing/2010/main" val="0"/>
+              </a:ext>
+              <a:ext uri="{96DAC541-7B7A-43D3-8B79-37D633B846F1}">
+                <asvg:svgBlip xmlns:asvg="http://schemas.microsoft.com/office/drawing/2016/SVG/main" r:embed="rId4"/>
+              </a:ext>
+            </a:extLst>
+          </a:blip>
+          <a:stretch>
+            <a:fillRect/>
+          </a:stretch>
+        </p:blipFill>
+        <p:spPr>
+          <a:xfrm>
+            <a:off x="1404595" y="838986"/>
+            <a:ext cx="8870622" cy="5379843"/>
+          </a:xfrm>
+          <a:prstGeom prst="rect">
+            <a:avLst/>
+          </a:prstGeom>
+        </p:spPr>
+      </p:pic>
+    </p:spTree>
+    <p:extLst>
+      <p:ext uri="{BB962C8B-B14F-4D97-AF65-F5344CB8AC3E}">
+        <p14:creationId xmlns:p14="http://schemas.microsoft.com/office/powerpoint/2010/main" val="2556510997"/>
+      </p:ext>
+    </p:extLst>
+  </p:cSld>
+  <p:clrMapOvr>
+    <a:masterClrMapping/>
+  </p:clrMapOvr>
+</p:sld>
+</file>
+
+<file path=ppt/slides/slide11.xml><?xml version="1.0" encoding="utf-8"?>
+<p:sld xmlns:a="http://schemas.openxmlformats.org/drawingml/2006/main" xmlns:r="http://schemas.openxmlformats.org/officeDocument/2006/relationships" xmlns:p="http://schemas.openxmlformats.org/presentationml/2006/main">
+  <p:cSld>
+    <p:bg>
+      <p:bgPr>
+        <a:blipFill rotWithShape="0">
+          <a:blip r:embed="rId2"/>
+          <a:stretch>
+            <a:fillRect/>
+          </a:stretch>
+        </a:blipFill>
+        <a:effectLst/>
+      </p:bgPr>
+    </p:bg>
+    <p:spTree>
+      <p:nvGrpSpPr>
+        <p:cNvPr id="1" name=""/>
+        <p:cNvGrpSpPr/>
+        <p:nvPr/>
+      </p:nvGrpSpPr>
+      <p:grpSpPr>
+        <a:xfrm>
+          <a:off x="0" y="0"/>
+          <a:ext cx="0" cy="0"/>
+          <a:chOff x="0" y="0"/>
+          <a:chExt cx="0" cy="0"/>
+        </a:xfrm>
+      </p:grpSpPr>
+      <p:sp>
+        <p:nvSpPr>
+          <p:cNvPr id="54" name="CustomShape 1"/>
+          <p:cNvSpPr/>
+          <p:nvPr/>
+        </p:nvSpPr>
+        <p:spPr>
+          <a:xfrm>
+            <a:off x="2146800" y="293804"/>
+            <a:ext cx="7898400" cy="365040"/>
+          </a:xfrm>
+          <a:prstGeom prst="rect">
+            <a:avLst/>
+          </a:prstGeom>
+          <a:noFill/>
+          <a:ln>
+            <a:noFill/>
+          </a:ln>
+        </p:spPr>
+        <p:style>
+          <a:lnRef idx="0">
+            <a:scrgbClr r="0" g="0" b="0"/>
+          </a:lnRef>
+          <a:fillRef idx="0">
+            <a:scrgbClr r="0" g="0" b="0"/>
+          </a:fillRef>
+          <a:effectRef idx="0">
+            <a:scrgbClr r="0" g="0" b="0"/>
+          </a:effectRef>
+          <a:fontRef idx="minor"/>
+        </p:style>
+        <p:txBody>
+          <a:bodyPr lIns="90000" tIns="45000" rIns="90000" bIns="45000" anchor="ctr" anchorCtr="1">
+            <a:spAutoFit/>
+          </a:bodyPr>
+          <a:lstStyle/>
+          <a:p>
             <a:pPr algn="ctr">
               <a:lnSpc>
                 <a:spcPct val="100000"/>
               </a:lnSpc>
             </a:pPr>
             <a:r>
-              <a:rPr lang="ru-RU" b="1" spc="-1" dirty="0">
+              <a:rPr lang="ru-RU" spc="-1" dirty="0">
                 <a:solidFill>
                   <a:srgbClr val="FFFFFF"/>
                 </a:solidFill>
@@ -3417,7 +3700,7 @@
               </a:rPr>
               <a:t>Физическая модель</a:t>
             </a:r>
-            <a:endParaRPr lang="ru-RU" sz="1800" b="0" strike="noStrike" spc="-1" dirty="0">
+            <a:endParaRPr lang="ru-RU" sz="1800" strike="noStrike" spc="-1" dirty="0">
               <a:latin typeface="Calibri" panose="020F0502020204030204" pitchFamily="34" charset="0"/>
               <a:cs typeface="Calibri" panose="020F0502020204030204" pitchFamily="34" charset="0"/>
             </a:endParaRPr>
@@ -3473,7 +3756,7 @@
                 </a:solidFill>
                 <a:latin typeface="Elektra Medium Pro"/>
               </a:rPr>
-              <a:t>10</a:t>
+              <a:t>11</a:t>
             </a:fld>
             <a:endParaRPr lang="ru-RU" sz="1800" b="0" strike="noStrike" spc="-1">
               <a:latin typeface="Arial"/>
@@ -3529,13 +3812,13 @@
 </p:sld>
 </file>
 
-<file path=ppt/slides/slide11.xml><?xml version="1.0" encoding="utf-8"?>
+<file path=ppt/slides/slide12.xml><?xml version="1.0" encoding="utf-8"?>
 <p:sld xmlns:a="http://schemas.openxmlformats.org/drawingml/2006/main" xmlns:r="http://schemas.openxmlformats.org/officeDocument/2006/relationships" xmlns:p="http://schemas.openxmlformats.org/presentationml/2006/main">
   <p:cSld>
     <p:bg>
       <p:bgPr>
         <a:blipFill rotWithShape="0">
-          <a:blip r:embed="rId2" cstate="print"/>
+          <a:blip r:embed="rId2"/>
           <a:stretch>
             <a:fillRect/>
           </a:stretch>
@@ -3559,13 +3842,13 @@
       </p:grpSpPr>
       <p:sp>
         <p:nvSpPr>
-          <p:cNvPr id="106" name="CustomShape 1"/>
+          <p:cNvPr id="54" name="CustomShape 1"/>
           <p:cNvSpPr/>
           <p:nvPr/>
         </p:nvSpPr>
         <p:spPr>
           <a:xfrm>
-            <a:off x="2118997" y="292347"/>
+            <a:off x="2146800" y="293804"/>
             <a:ext cx="7898400" cy="365040"/>
           </a:xfrm>
           <a:prstGeom prst="rect">
@@ -3594,52 +3877,23 @@
           </a:bodyPr>
           <a:lstStyle/>
           <a:p>
-            <a:pPr marL="0" marR="0" lvl="0" indent="0" algn="ctr" defTabSz="914400" rtl="0" eaLnBrk="1" fontAlgn="auto" latinLnBrk="0" hangingPunct="1">
+            <a:pPr algn="ctr">
               <a:lnSpc>
                 <a:spcPct val="100000"/>
               </a:lnSpc>
-              <a:spcBef>
-                <a:spcPts val="0"/>
-              </a:spcBef>
-              <a:spcAft>
-                <a:spcPts val="0"/>
-              </a:spcAft>
-              <a:buClrTx/>
-              <a:buSzTx/>
-              <a:buFontTx/>
-              <a:buNone/>
-              <a:tabLst/>
-              <a:defRPr/>
             </a:pPr>
             <a:r>
-              <a:rPr kumimoji="0" lang="ru-RU" sz="1800" b="1" i="0" u="none" strike="noStrike" kern="1200" cap="none" spc="-1" normalizeH="0" baseline="0" noProof="0" dirty="0">
-                <a:ln>
-                  <a:noFill/>
-                </a:ln>
+              <a:rPr lang="ru-RU" sz="1800" strike="noStrike" spc="-1" dirty="0">
                 <a:solidFill>
                   <a:srgbClr val="FFFFFF"/>
                 </a:solidFill>
-                <a:effectLst/>
-                <a:uLnTx/>
-                <a:uFillTx/>
-                <a:latin typeface="Calibri" panose="020F0502020204030204" pitchFamily="34" charset="0"/>
-                <a:ea typeface="DejaVu Sans"/>
-                <a:cs typeface="Calibri" panose="020F0502020204030204" pitchFamily="34" charset="0"/>
-              </a:rPr>
-              <a:t>Заключение</a:t>
-            </a:r>
-            <a:endParaRPr kumimoji="0" lang="ru-RU" sz="1800" b="0" i="0" u="none" strike="noStrike" kern="1200" cap="none" spc="-1" normalizeH="0" baseline="0" noProof="0" dirty="0">
-              <a:ln>
-                <a:noFill/>
-              </a:ln>
-              <a:solidFill>
-                <a:prstClr val="black"/>
-              </a:solidFill>
-              <a:effectLst/>
-              <a:uLnTx/>
-              <a:uFillTx/>
+                <a:latin typeface="Calibri" panose="020F0502020204030204" pitchFamily="34" charset="0"/>
+                <a:cs typeface="Calibri" panose="020F0502020204030204" pitchFamily="34" charset="0"/>
+              </a:rPr>
+              <a:t>Архитектура системы</a:t>
+            </a:r>
+            <a:endParaRPr lang="ru-RU" sz="1800" strike="noStrike" spc="-1" dirty="0">
               <a:latin typeface="Calibri" panose="020F0502020204030204" pitchFamily="34" charset="0"/>
-              <a:ea typeface="DejaVu Sans"/>
               <a:cs typeface="Calibri" panose="020F0502020204030204" pitchFamily="34" charset="0"/>
             </a:endParaRPr>
           </a:p>
@@ -3647,7 +3901,7 @@
       </p:sp>
       <p:sp>
         <p:nvSpPr>
-          <p:cNvPr id="107" name="CustomShape 2"/>
+          <p:cNvPr id="55" name="CustomShape 2"/>
           <p:cNvSpPr/>
           <p:nvPr/>
         </p:nvSpPr>
@@ -3682,322 +3936,60 @@
           </a:bodyPr>
           <a:lstStyle/>
           <a:p>
-            <a:pPr marL="0" marR="0" lvl="0" indent="0" algn="ctr" defTabSz="914400" rtl="0" eaLnBrk="1" fontAlgn="auto" latinLnBrk="0" hangingPunct="1">
+            <a:pPr algn="ctr">
               <a:lnSpc>
                 <a:spcPct val="100000"/>
               </a:lnSpc>
-              <a:spcBef>
-                <a:spcPts val="0"/>
-              </a:spcBef>
-              <a:spcAft>
-                <a:spcPts val="0"/>
-              </a:spcAft>
-              <a:buClrTx/>
-              <a:buSzTx/>
-              <a:buFontTx/>
-              <a:buNone/>
-              <a:tabLst/>
-              <a:defRPr/>
             </a:pPr>
-            <a:fld id="{70B94368-CDBA-4974-8450-BDAC626738DB}" type="slidenum">
-              <a:rPr kumimoji="0" lang="ru-RU" sz="1800" b="0" i="0" u="none" strike="noStrike" kern="1200" cap="none" spc="-1" normalizeH="0" baseline="0" noProof="0">
-                <a:ln>
-                  <a:noFill/>
-                </a:ln>
+            <a:fld id="{89F79450-C151-457E-9813-B313ED05920E}" type="slidenum">
+              <a:rPr lang="ru-RU" sz="1800" b="0" strike="noStrike" spc="-1">
                 <a:solidFill>
                   <a:srgbClr val="FFFFFF"/>
                 </a:solidFill>
-                <a:effectLst/>
-                <a:uLnTx/>
-                <a:uFillTx/>
                 <a:latin typeface="Elektra Medium Pro"/>
-                <a:ea typeface="DejaVu Sans"/>
-                <a:cs typeface="DejaVu Sans"/>
-              </a:rPr>
-              <a:pPr marL="0" marR="0" lvl="0" indent="0" algn="ctr" defTabSz="914400" rtl="0" eaLnBrk="1" fontAlgn="auto" latinLnBrk="0" hangingPunct="1">
-                <a:lnSpc>
-                  <a:spcPct val="100000"/>
-                </a:lnSpc>
-                <a:spcBef>
-                  <a:spcPts val="0"/>
-                </a:spcBef>
-                <a:spcAft>
-                  <a:spcPts val="0"/>
-                </a:spcAft>
-                <a:buClrTx/>
-                <a:buSzTx/>
-                <a:buFontTx/>
-                <a:buNone/>
-                <a:tabLst/>
-                <a:defRPr/>
-              </a:pPr>
-              <a:t>11</a:t>
+              </a:rPr>
+              <a:t>12</a:t>
             </a:fld>
-            <a:endParaRPr kumimoji="0" lang="ru-RU" sz="1800" b="0" i="0" u="none" strike="noStrike" kern="1200" cap="none" spc="-1" normalizeH="0" baseline="0" noProof="0">
-              <a:ln>
-                <a:noFill/>
-              </a:ln>
-              <a:solidFill>
-                <a:prstClr val="black"/>
-              </a:solidFill>
-              <a:effectLst/>
-              <a:uLnTx/>
-              <a:uFillTx/>
+            <a:endParaRPr lang="ru-RU" sz="1800" b="0" strike="noStrike" spc="-1">
               <a:latin typeface="Arial"/>
-              <a:ea typeface="DejaVu Sans"/>
-              <a:cs typeface="DejaVu Sans"/>
-            </a:endParaRPr>
-          </a:p>
-        </p:txBody>
-      </p:sp>
-      <p:sp>
-        <p:nvSpPr>
-          <p:cNvPr id="108" name="CustomShape 3"/>
-          <p:cNvSpPr/>
+            </a:endParaRPr>
+          </a:p>
+        </p:txBody>
+      </p:sp>
+      <p:pic>
+        <p:nvPicPr>
+          <p:cNvPr id="3" name="Рисунок 2">
+            <a:extLst>
+              <a:ext uri="{FF2B5EF4-FFF2-40B4-BE49-F238E27FC236}">
+                <a16:creationId xmlns:a16="http://schemas.microsoft.com/office/drawing/2014/main" id="{48ECF74F-671F-4260-BDA3-0D199ADB3021}"/>
+              </a:ext>
+            </a:extLst>
+          </p:cNvPr>
+          <p:cNvPicPr>
+            <a:picLocks noChangeAspect="1"/>
+          </p:cNvPicPr>
           <p:nvPr/>
-        </p:nvSpPr>
-        <p:spPr>
-          <a:xfrm>
-            <a:off x="6539400" y="1914480"/>
-            <a:ext cx="4904280" cy="1187640"/>
-          </a:xfrm>
-          <a:prstGeom prst="rect">
-            <a:avLst/>
-          </a:prstGeom>
-          <a:noFill/>
-          <a:ln>
-            <a:noFill/>
-          </a:ln>
-        </p:spPr>
-        <p:style>
-          <a:lnRef idx="0">
-            <a:scrgbClr r="0" g="0" b="0"/>
-          </a:lnRef>
-          <a:fillRef idx="0">
-            <a:scrgbClr r="0" g="0" b="0"/>
-          </a:fillRef>
-          <a:effectRef idx="0">
-            <a:scrgbClr r="0" g="0" b="0"/>
-          </a:effectRef>
-          <a:fontRef idx="minor"/>
-        </p:style>
-        <p:txBody>
-          <a:bodyPr lIns="90000" tIns="45000" rIns="90000" bIns="45000">
-            <a:spAutoFit/>
-          </a:bodyPr>
-          <a:lstStyle/>
-          <a:p>
-            <a:pPr marL="0" marR="0" lvl="0" indent="0" algn="l" defTabSz="914400" rtl="0" eaLnBrk="1" fontAlgn="auto" latinLnBrk="0" hangingPunct="1">
-              <a:lnSpc>
-                <a:spcPct val="100000"/>
-              </a:lnSpc>
-              <a:spcBef>
-                <a:spcPts val="0"/>
-              </a:spcBef>
-              <a:spcAft>
-                <a:spcPts val="0"/>
-              </a:spcAft>
-              <a:buClrTx/>
-              <a:buSzTx/>
-              <a:buFontTx/>
-              <a:buNone/>
-              <a:tabLst/>
-              <a:defRPr/>
-            </a:pPr>
-            <a:endParaRPr kumimoji="0" lang="ru-RU" sz="1800" b="0" i="0" u="none" strike="noStrike" kern="1200" cap="none" spc="-1" normalizeH="0" baseline="0" noProof="0">
-              <a:ln>
-                <a:noFill/>
-              </a:ln>
-              <a:solidFill>
-                <a:prstClr val="black"/>
-              </a:solidFill>
-              <a:effectLst/>
-              <a:uLnTx/>
-              <a:uFillTx/>
-              <a:latin typeface="Arial"/>
-              <a:ea typeface="DejaVu Sans"/>
-              <a:cs typeface="DejaVu Sans"/>
-            </a:endParaRPr>
-          </a:p>
-          <a:p>
-            <a:pPr marL="0" marR="0" lvl="0" indent="0" algn="l" defTabSz="914400" rtl="0" eaLnBrk="1" fontAlgn="auto" latinLnBrk="0" hangingPunct="1">
-              <a:lnSpc>
-                <a:spcPct val="100000"/>
-              </a:lnSpc>
-              <a:spcBef>
-                <a:spcPts val="0"/>
-              </a:spcBef>
-              <a:spcAft>
-                <a:spcPts val="0"/>
-              </a:spcAft>
-              <a:buClrTx/>
-              <a:buSzTx/>
-              <a:buFontTx/>
-              <a:buNone/>
-              <a:tabLst/>
-              <a:defRPr/>
-            </a:pPr>
-            <a:endParaRPr kumimoji="0" lang="ru-RU" sz="1800" b="0" i="0" u="none" strike="noStrike" kern="1200" cap="none" spc="-1" normalizeH="0" baseline="0" noProof="0">
-              <a:ln>
-                <a:noFill/>
-              </a:ln>
-              <a:solidFill>
-                <a:prstClr val="black"/>
-              </a:solidFill>
-              <a:effectLst/>
-              <a:uLnTx/>
-              <a:uFillTx/>
-              <a:latin typeface="Arial"/>
-              <a:ea typeface="DejaVu Sans"/>
-              <a:cs typeface="DejaVu Sans"/>
-            </a:endParaRPr>
-          </a:p>
-          <a:p>
-            <a:pPr marL="0" marR="0" lvl="0" indent="0" algn="l" defTabSz="914400" rtl="0" eaLnBrk="1" fontAlgn="auto" latinLnBrk="0" hangingPunct="1">
-              <a:lnSpc>
-                <a:spcPct val="100000"/>
-              </a:lnSpc>
-              <a:spcBef>
-                <a:spcPts val="0"/>
-              </a:spcBef>
-              <a:spcAft>
-                <a:spcPts val="0"/>
-              </a:spcAft>
-              <a:buClrTx/>
-              <a:buSzTx/>
-              <a:buFontTx/>
-              <a:buNone/>
-              <a:tabLst/>
-              <a:defRPr/>
-            </a:pPr>
-            <a:endParaRPr kumimoji="0" lang="ru-RU" sz="1800" b="0" i="0" u="none" strike="noStrike" kern="1200" cap="none" spc="-1" normalizeH="0" baseline="0" noProof="0">
-              <a:ln>
-                <a:noFill/>
-              </a:ln>
-              <a:solidFill>
-                <a:prstClr val="black"/>
-              </a:solidFill>
-              <a:effectLst/>
-              <a:uLnTx/>
-              <a:uFillTx/>
-              <a:latin typeface="Arial"/>
-              <a:ea typeface="DejaVu Sans"/>
-              <a:cs typeface="DejaVu Sans"/>
-            </a:endParaRPr>
-          </a:p>
-          <a:p>
-            <a:pPr marL="0" marR="0" lvl="0" indent="0" algn="l" defTabSz="914400" rtl="0" eaLnBrk="1" fontAlgn="auto" latinLnBrk="0" hangingPunct="1">
-              <a:lnSpc>
-                <a:spcPct val="100000"/>
-              </a:lnSpc>
-              <a:spcBef>
-                <a:spcPts val="0"/>
-              </a:spcBef>
-              <a:spcAft>
-                <a:spcPts val="0"/>
-              </a:spcAft>
-              <a:buClrTx/>
-              <a:buSzTx/>
-              <a:buFontTx/>
-              <a:buNone/>
-              <a:tabLst/>
-              <a:defRPr/>
-            </a:pPr>
-            <a:endParaRPr kumimoji="0" lang="ru-RU" sz="1800" b="0" i="0" u="none" strike="noStrike" kern="1200" cap="none" spc="-1" normalizeH="0" baseline="0" noProof="0">
-              <a:ln>
-                <a:noFill/>
-              </a:ln>
-              <a:solidFill>
-                <a:prstClr val="black"/>
-              </a:solidFill>
-              <a:effectLst/>
-              <a:uLnTx/>
-              <a:uFillTx/>
-              <a:latin typeface="Arial"/>
-              <a:ea typeface="DejaVu Sans"/>
-              <a:cs typeface="DejaVu Sans"/>
-            </a:endParaRPr>
-          </a:p>
-        </p:txBody>
-      </p:sp>
-      <p:sp>
-        <p:nvSpPr>
-          <p:cNvPr id="109" name="CustomShape 4"/>
-          <p:cNvSpPr/>
-          <p:nvPr/>
-        </p:nvSpPr>
-        <p:spPr>
-          <a:xfrm>
-            <a:off x="577970" y="1115897"/>
-            <a:ext cx="11057923" cy="463417"/>
-          </a:xfrm>
-          <a:prstGeom prst="rect">
-            <a:avLst/>
-          </a:prstGeom>
-          <a:noFill/>
-          <a:ln>
-            <a:noFill/>
-          </a:ln>
-        </p:spPr>
-        <p:style>
-          <a:lnRef idx="0">
-            <a:scrgbClr r="0" g="0" b="0"/>
-          </a:lnRef>
-          <a:fillRef idx="0">
-            <a:scrgbClr r="0" g="0" b="0"/>
-          </a:fillRef>
-          <a:effectRef idx="0">
-            <a:scrgbClr r="0" g="0" b="0"/>
-          </a:effectRef>
-          <a:fontRef idx="minor"/>
-        </p:style>
-        <p:txBody>
-          <a:bodyPr wrap="square" lIns="90000" tIns="45000" rIns="90000" bIns="45000">
-            <a:spAutoFit/>
-          </a:bodyPr>
-          <a:lstStyle/>
-          <a:p>
-            <a:pPr marL="0" marR="0" lvl="0" indent="0" algn="l" defTabSz="914400" rtl="0" eaLnBrk="1" fontAlgn="auto" latinLnBrk="0" hangingPunct="1">
-              <a:lnSpc>
-                <a:spcPct val="150000"/>
-              </a:lnSpc>
-              <a:spcBef>
-                <a:spcPts val="0"/>
-              </a:spcBef>
-              <a:spcAft>
-                <a:spcPts val="0"/>
-              </a:spcAft>
-              <a:buClrTx/>
-              <a:buSzTx/>
-              <a:buFontTx/>
-              <a:buNone/>
-              <a:tabLst/>
-              <a:defRPr/>
-            </a:pPr>
-            <a:r>
-              <a:rPr kumimoji="0" lang="ru-RU" sz="1800" b="0" i="0" u="none" strike="noStrike" kern="1200" cap="none" spc="0" normalizeH="0" baseline="0" noProof="0" dirty="0">
-                <a:ln>
-                  <a:noFill/>
-                </a:ln>
-                <a:solidFill>
-                  <a:prstClr val="black"/>
-                </a:solidFill>
-                <a:effectLst/>
-                <a:uLnTx/>
-                <a:uFillTx/>
-                <a:latin typeface="Calibri" panose="020F0502020204030204" pitchFamily="34" charset="0"/>
-                <a:ea typeface="DejaVu Sans"/>
-                <a:cs typeface="Calibri" panose="020F0502020204030204" pitchFamily="34" charset="0"/>
-              </a:rPr>
-              <a:t>В</a:t>
-            </a:r>
-          </a:p>
-        </p:txBody>
-      </p:sp>
+        </p:nvPicPr>
+        <p:blipFill>
+          <a:blip r:embed="rId3"/>
+          <a:stretch>
+            <a:fillRect/>
+          </a:stretch>
+        </p:blipFill>
+        <p:spPr>
+          <a:xfrm>
+            <a:off x="1042282" y="1462623"/>
+            <a:ext cx="10107436" cy="2876951"/>
+          </a:xfrm>
+          <a:prstGeom prst="rect">
+            <a:avLst/>
+          </a:prstGeom>
+        </p:spPr>
+      </p:pic>
     </p:spTree>
     <p:extLst>
       <p:ext uri="{BB962C8B-B14F-4D97-AF65-F5344CB8AC3E}">
-        <p14:creationId xmlns:p14="http://schemas.microsoft.com/office/powerpoint/2010/main" val="1902208218"/>
+        <p14:creationId xmlns:p14="http://schemas.microsoft.com/office/powerpoint/2010/main" val="3118308229"/>
       </p:ext>
     </p:extLst>
   </p:cSld>
@@ -4007,14 +3999,17 @@
 </p:sld>
 </file>
 
-<file path=ppt/slides/slide12.xml><?xml version="1.0" encoding="utf-8"?>
+<file path=ppt/slides/slide13.xml><?xml version="1.0" encoding="utf-8"?>
 <p:sld xmlns:a="http://schemas.openxmlformats.org/drawingml/2006/main" xmlns:r="http://schemas.openxmlformats.org/officeDocument/2006/relationships" xmlns:p="http://schemas.openxmlformats.org/presentationml/2006/main">
   <p:cSld>
     <p:bg>
       <p:bgPr>
-        <a:solidFill>
-          <a:srgbClr val="FFFFFF"/>
-        </a:solidFill>
+        <a:blipFill rotWithShape="0">
+          <a:blip r:embed="rId2"/>
+          <a:stretch>
+            <a:fillRect/>
+          </a:stretch>
+        </a:blipFill>
         <a:effectLst/>
       </p:bgPr>
     </p:bg>
@@ -4032,39 +4027,16 @@
           <a:chExt cx="0" cy="0"/>
         </a:xfrm>
       </p:grpSpPr>
-      <p:pic>
-        <p:nvPicPr>
-          <p:cNvPr id="129" name="Рисунок 2"/>
-          <p:cNvPicPr/>
-          <p:nvPr/>
-        </p:nvPicPr>
-        <p:blipFill>
-          <a:blip r:embed="rId2"/>
-          <a:stretch/>
-        </p:blipFill>
-        <p:spPr>
-          <a:xfrm>
-            <a:off x="0" y="1800"/>
-            <a:ext cx="12191760" cy="6854040"/>
-          </a:xfrm>
-          <a:prstGeom prst="rect">
-            <a:avLst/>
-          </a:prstGeom>
-          <a:ln>
-            <a:noFill/>
-          </a:ln>
-        </p:spPr>
-      </p:pic>
-      <p:sp>
-        <p:nvSpPr>
-          <p:cNvPr id="130" name="CustomShape 1"/>
+      <p:sp>
+        <p:nvSpPr>
+          <p:cNvPr id="54" name="CustomShape 1"/>
           <p:cNvSpPr/>
           <p:nvPr/>
         </p:nvSpPr>
         <p:spPr>
           <a:xfrm>
-            <a:off x="6627600" y="2721708"/>
-            <a:ext cx="3831480" cy="822240"/>
+            <a:off x="2146800" y="293804"/>
+            <a:ext cx="7898400" cy="365040"/>
           </a:xfrm>
           <a:prstGeom prst="rect">
             <a:avLst/>
@@ -4098,54 +4070,1416 @@
               </a:lnSpc>
             </a:pPr>
             <a:r>
-              <a:rPr lang="ru-RU" sz="2400" b="1" strike="noStrike" spc="-1" dirty="0">
+              <a:rPr lang="ru-RU" spc="-1" dirty="0">
                 <a:solidFill>
                   <a:srgbClr val="FFFFFF"/>
                 </a:solidFill>
                 <a:latin typeface="Calibri" panose="020F0502020204030204" pitchFamily="34" charset="0"/>
                 <a:cs typeface="Calibri" panose="020F0502020204030204" pitchFamily="34" charset="0"/>
               </a:rPr>
-              <a:t>БЛАГОДАРЮ </a:t>
-            </a:r>
-            <a:endParaRPr lang="ru-RU" sz="2400" b="0" strike="noStrike" spc="-1" dirty="0">
+              <a:t>Диаграмма вариантов использования</a:t>
+            </a:r>
+            <a:endParaRPr lang="ru-RU" sz="1800" strike="noStrike" spc="-1" dirty="0">
               <a:latin typeface="Calibri" panose="020F0502020204030204" pitchFamily="34" charset="0"/>
               <a:cs typeface="Calibri" panose="020F0502020204030204" pitchFamily="34" charset="0"/>
             </a:endParaRPr>
           </a:p>
+        </p:txBody>
+      </p:sp>
+      <p:sp>
+        <p:nvSpPr>
+          <p:cNvPr id="55" name="CustomShape 2"/>
+          <p:cNvSpPr/>
+          <p:nvPr/>
+        </p:nvSpPr>
+        <p:spPr>
+          <a:xfrm>
+            <a:off x="11109960" y="6324480"/>
+            <a:ext cx="468720" cy="364680"/>
+          </a:xfrm>
+          <a:prstGeom prst="rect">
+            <a:avLst/>
+          </a:prstGeom>
+          <a:noFill/>
+          <a:ln>
+            <a:noFill/>
+          </a:ln>
+        </p:spPr>
+        <p:style>
+          <a:lnRef idx="0">
+            <a:scrgbClr r="0" g="0" b="0"/>
+          </a:lnRef>
+          <a:fillRef idx="0">
+            <a:scrgbClr r="0" g="0" b="0"/>
+          </a:fillRef>
+          <a:effectRef idx="0">
+            <a:scrgbClr r="0" g="0" b="0"/>
+          </a:effectRef>
+          <a:fontRef idx="minor"/>
+        </p:style>
+        <p:txBody>
+          <a:bodyPr lIns="90000" tIns="45000" rIns="90000" bIns="45000">
+            <a:spAutoFit/>
+          </a:bodyPr>
+          <a:lstStyle/>
           <a:p>
             <a:pPr algn="ctr">
               <a:lnSpc>
                 <a:spcPct val="100000"/>
               </a:lnSpc>
             </a:pPr>
-            <a:r>
-              <a:rPr lang="ru-RU" sz="2400" b="1" strike="noStrike" spc="-1" dirty="0">
+            <a:fld id="{89F79450-C151-457E-9813-B313ED05920E}" type="slidenum">
+              <a:rPr lang="ru-RU" sz="1800" b="0" strike="noStrike" spc="-1">
                 <a:solidFill>
                   <a:srgbClr val="FFFFFF"/>
                 </a:solidFill>
-                <a:latin typeface="Calibri" panose="020F0502020204030204" pitchFamily="34" charset="0"/>
-                <a:cs typeface="Calibri" panose="020F0502020204030204" pitchFamily="34" charset="0"/>
-              </a:rPr>
-              <a:t>ЗА ВНИМАНИЕ</a:t>
-            </a:r>
-            <a:r>
-              <a:rPr lang="en-US" sz="2400" b="1" strike="noStrike" spc="-1" dirty="0">
+                <a:latin typeface="Elektra Medium Pro"/>
+              </a:rPr>
+              <a:t>13</a:t>
+            </a:fld>
+            <a:endParaRPr lang="ru-RU" sz="1800" b="0" strike="noStrike" spc="-1">
+              <a:latin typeface="Arial"/>
+            </a:endParaRPr>
+          </a:p>
+        </p:txBody>
+      </p:sp>
+      <p:pic>
+        <p:nvPicPr>
+          <p:cNvPr id="3" name="Рисунок 2">
+            <a:extLst>
+              <a:ext uri="{FF2B5EF4-FFF2-40B4-BE49-F238E27FC236}">
+                <a16:creationId xmlns:a16="http://schemas.microsoft.com/office/drawing/2014/main" id="{48ECF74F-671F-4260-BDA3-0D199ADB3021}"/>
+              </a:ext>
+            </a:extLst>
+          </p:cNvPr>
+          <p:cNvPicPr>
+            <a:picLocks noChangeAspect="1"/>
+          </p:cNvPicPr>
+          <p:nvPr/>
+        </p:nvPicPr>
+        <p:blipFill>
+          <a:blip r:embed="rId3">
+            <a:extLst>
+              <a:ext uri="{28A0092B-C50C-407E-A947-70E740481C1C}">
+                <a14:useLocalDpi xmlns:a14="http://schemas.microsoft.com/office/drawing/2010/main" val="0"/>
+              </a:ext>
+              <a:ext uri="{96DAC541-7B7A-43D3-8B79-37D633B846F1}">
+                <asvg:svgBlip xmlns:asvg="http://schemas.microsoft.com/office/drawing/2016/SVG/main" r:embed="rId4"/>
+              </a:ext>
+            </a:extLst>
+          </a:blip>
+          <a:srcRect/>
+          <a:stretch/>
+        </p:blipFill>
+        <p:spPr>
+          <a:xfrm>
+            <a:off x="0" y="1923069"/>
+            <a:ext cx="12144043" cy="2309567"/>
+          </a:xfrm>
+          <a:prstGeom prst="rect">
+            <a:avLst/>
+          </a:prstGeom>
+        </p:spPr>
+      </p:pic>
+    </p:spTree>
+    <p:extLst>
+      <p:ext uri="{BB962C8B-B14F-4D97-AF65-F5344CB8AC3E}">
+        <p14:creationId xmlns:p14="http://schemas.microsoft.com/office/powerpoint/2010/main" val="1410570676"/>
+      </p:ext>
+    </p:extLst>
+  </p:cSld>
+  <p:clrMapOvr>
+    <a:masterClrMapping/>
+  </p:clrMapOvr>
+</p:sld>
+</file>
+
+<file path=ppt/slides/slide14.xml><?xml version="1.0" encoding="utf-8"?>
+<p:sld xmlns:a="http://schemas.openxmlformats.org/drawingml/2006/main" xmlns:r="http://schemas.openxmlformats.org/officeDocument/2006/relationships" xmlns:p="http://schemas.openxmlformats.org/presentationml/2006/main">
+  <p:cSld>
+    <p:bg>
+      <p:bgPr>
+        <a:blipFill rotWithShape="0">
+          <a:blip r:embed="rId2"/>
+          <a:stretch>
+            <a:fillRect/>
+          </a:stretch>
+        </a:blipFill>
+        <a:effectLst/>
+      </p:bgPr>
+    </p:bg>
+    <p:spTree>
+      <p:nvGrpSpPr>
+        <p:cNvPr id="1" name=""/>
+        <p:cNvGrpSpPr/>
+        <p:nvPr/>
+      </p:nvGrpSpPr>
+      <p:grpSpPr>
+        <a:xfrm>
+          <a:off x="0" y="0"/>
+          <a:ext cx="0" cy="0"/>
+          <a:chOff x="0" y="0"/>
+          <a:chExt cx="0" cy="0"/>
+        </a:xfrm>
+      </p:grpSpPr>
+      <p:sp>
+        <p:nvSpPr>
+          <p:cNvPr id="54" name="CustomShape 1"/>
+          <p:cNvSpPr/>
+          <p:nvPr/>
+        </p:nvSpPr>
+        <p:spPr>
+          <a:xfrm>
+            <a:off x="2146800" y="293804"/>
+            <a:ext cx="7898400" cy="365040"/>
+          </a:xfrm>
+          <a:prstGeom prst="rect">
+            <a:avLst/>
+          </a:prstGeom>
+          <a:noFill/>
+          <a:ln>
+            <a:noFill/>
+          </a:ln>
+        </p:spPr>
+        <p:style>
+          <a:lnRef idx="0">
+            <a:scrgbClr r="0" g="0" b="0"/>
+          </a:lnRef>
+          <a:fillRef idx="0">
+            <a:scrgbClr r="0" g="0" b="0"/>
+          </a:fillRef>
+          <a:effectRef idx="0">
+            <a:scrgbClr r="0" g="0" b="0"/>
+          </a:effectRef>
+          <a:fontRef idx="minor"/>
+        </p:style>
+        <p:txBody>
+          <a:bodyPr lIns="90000" tIns="45000" rIns="90000" bIns="45000" anchor="ctr" anchorCtr="1">
+            <a:spAutoFit/>
+          </a:bodyPr>
+          <a:lstStyle/>
+          <a:p>
+            <a:pPr algn="ctr">
+              <a:lnSpc>
+                <a:spcPct val="100000"/>
+              </a:lnSpc>
+            </a:pPr>
+            <a:r>
+              <a:rPr lang="ru-RU" spc="-1" dirty="0">
                 <a:solidFill>
                   <a:srgbClr val="FFFFFF"/>
                 </a:solidFill>
                 <a:latin typeface="Calibri" panose="020F0502020204030204" pitchFamily="34" charset="0"/>
                 <a:cs typeface="Calibri" panose="020F0502020204030204" pitchFamily="34" charset="0"/>
               </a:rPr>
-              <a:t>!</a:t>
-            </a:r>
-            <a:endParaRPr lang="ru-RU" sz="2400" b="0" strike="noStrike" spc="-1" dirty="0">
+              <a:t>Диаграмма вариантов использования</a:t>
+            </a:r>
+            <a:endParaRPr lang="ru-RU" sz="1800" strike="noStrike" spc="-1" dirty="0">
               <a:latin typeface="Calibri" panose="020F0502020204030204" pitchFamily="34" charset="0"/>
               <a:cs typeface="Calibri" panose="020F0502020204030204" pitchFamily="34" charset="0"/>
             </a:endParaRPr>
           </a:p>
         </p:txBody>
       </p:sp>
+      <p:sp>
+        <p:nvSpPr>
+          <p:cNvPr id="55" name="CustomShape 2"/>
+          <p:cNvSpPr/>
+          <p:nvPr/>
+        </p:nvSpPr>
+        <p:spPr>
+          <a:xfrm>
+            <a:off x="11109960" y="6324480"/>
+            <a:ext cx="468720" cy="364680"/>
+          </a:xfrm>
+          <a:prstGeom prst="rect">
+            <a:avLst/>
+          </a:prstGeom>
+          <a:noFill/>
+          <a:ln>
+            <a:noFill/>
+          </a:ln>
+        </p:spPr>
+        <p:style>
+          <a:lnRef idx="0">
+            <a:scrgbClr r="0" g="0" b="0"/>
+          </a:lnRef>
+          <a:fillRef idx="0">
+            <a:scrgbClr r="0" g="0" b="0"/>
+          </a:fillRef>
+          <a:effectRef idx="0">
+            <a:scrgbClr r="0" g="0" b="0"/>
+          </a:effectRef>
+          <a:fontRef idx="minor"/>
+        </p:style>
+        <p:txBody>
+          <a:bodyPr lIns="90000" tIns="45000" rIns="90000" bIns="45000">
+            <a:spAutoFit/>
+          </a:bodyPr>
+          <a:lstStyle/>
+          <a:p>
+            <a:pPr algn="ctr">
+              <a:lnSpc>
+                <a:spcPct val="100000"/>
+              </a:lnSpc>
+            </a:pPr>
+            <a:fld id="{89F79450-C151-457E-9813-B313ED05920E}" type="slidenum">
+              <a:rPr lang="ru-RU" sz="1800" b="0" strike="noStrike" spc="-1">
+                <a:solidFill>
+                  <a:srgbClr val="FFFFFF"/>
+                </a:solidFill>
+                <a:latin typeface="Elektra Medium Pro"/>
+              </a:rPr>
+              <a:t>14</a:t>
+            </a:fld>
+            <a:endParaRPr lang="ru-RU" sz="1800" b="0" strike="noStrike" spc="-1">
+              <a:latin typeface="Arial"/>
+            </a:endParaRPr>
+          </a:p>
+        </p:txBody>
+      </p:sp>
+      <p:pic>
+        <p:nvPicPr>
+          <p:cNvPr id="3" name="Рисунок 2">
+            <a:extLst>
+              <a:ext uri="{FF2B5EF4-FFF2-40B4-BE49-F238E27FC236}">
+                <a16:creationId xmlns:a16="http://schemas.microsoft.com/office/drawing/2014/main" id="{48ECF74F-671F-4260-BDA3-0D199ADB3021}"/>
+              </a:ext>
+            </a:extLst>
+          </p:cNvPr>
+          <p:cNvPicPr>
+            <a:picLocks noChangeAspect="1"/>
+          </p:cNvPicPr>
+          <p:nvPr/>
+        </p:nvPicPr>
+        <p:blipFill>
+          <a:blip r:embed="rId3">
+            <a:extLst>
+              <a:ext uri="{28A0092B-C50C-407E-A947-70E740481C1C}">
+                <a14:useLocalDpi xmlns:a14="http://schemas.microsoft.com/office/drawing/2010/main" val="0"/>
+              </a:ext>
+            </a:extLst>
+          </a:blip>
+          <a:srcRect/>
+          <a:stretch/>
+        </p:blipFill>
+        <p:spPr>
+          <a:xfrm>
+            <a:off x="278987" y="1140642"/>
+            <a:ext cx="11634026" cy="4016130"/>
+          </a:xfrm>
+          <a:prstGeom prst="rect">
+            <a:avLst/>
+          </a:prstGeom>
+        </p:spPr>
+      </p:pic>
     </p:spTree>
+    <p:extLst>
+      <p:ext uri="{BB962C8B-B14F-4D97-AF65-F5344CB8AC3E}">
+        <p14:creationId xmlns:p14="http://schemas.microsoft.com/office/powerpoint/2010/main" val="2284713269"/>
+      </p:ext>
+    </p:extLst>
+  </p:cSld>
+  <p:clrMapOvr>
+    <a:masterClrMapping/>
+  </p:clrMapOvr>
+</p:sld>
+</file>
+
+<file path=ppt/slides/slide15.xml><?xml version="1.0" encoding="utf-8"?>
+<p:sld xmlns:a="http://schemas.openxmlformats.org/drawingml/2006/main" xmlns:r="http://schemas.openxmlformats.org/officeDocument/2006/relationships" xmlns:p="http://schemas.openxmlformats.org/presentationml/2006/main">
+  <p:cSld>
+    <p:bg>
+      <p:bgPr>
+        <a:blipFill rotWithShape="0">
+          <a:blip r:embed="rId2"/>
+          <a:stretch>
+            <a:fillRect/>
+          </a:stretch>
+        </a:blipFill>
+        <a:effectLst/>
+      </p:bgPr>
+    </p:bg>
+    <p:spTree>
+      <p:nvGrpSpPr>
+        <p:cNvPr id="1" name=""/>
+        <p:cNvGrpSpPr/>
+        <p:nvPr/>
+      </p:nvGrpSpPr>
+      <p:grpSpPr>
+        <a:xfrm>
+          <a:off x="0" y="0"/>
+          <a:ext cx="0" cy="0"/>
+          <a:chOff x="0" y="0"/>
+          <a:chExt cx="0" cy="0"/>
+        </a:xfrm>
+      </p:grpSpPr>
+      <p:sp>
+        <p:nvSpPr>
+          <p:cNvPr id="54" name="CustomShape 1"/>
+          <p:cNvSpPr/>
+          <p:nvPr/>
+        </p:nvSpPr>
+        <p:spPr>
+          <a:xfrm>
+            <a:off x="2146800" y="293804"/>
+            <a:ext cx="7898400" cy="365040"/>
+          </a:xfrm>
+          <a:prstGeom prst="rect">
+            <a:avLst/>
+          </a:prstGeom>
+          <a:noFill/>
+          <a:ln>
+            <a:noFill/>
+          </a:ln>
+        </p:spPr>
+        <p:style>
+          <a:lnRef idx="0">
+            <a:scrgbClr r="0" g="0" b="0"/>
+          </a:lnRef>
+          <a:fillRef idx="0">
+            <a:scrgbClr r="0" g="0" b="0"/>
+          </a:fillRef>
+          <a:effectRef idx="0">
+            <a:scrgbClr r="0" g="0" b="0"/>
+          </a:effectRef>
+          <a:fontRef idx="minor"/>
+        </p:style>
+        <p:txBody>
+          <a:bodyPr lIns="90000" tIns="45000" rIns="90000" bIns="45000" anchor="ctr" anchorCtr="1">
+            <a:spAutoFit/>
+          </a:bodyPr>
+          <a:lstStyle/>
+          <a:p>
+            <a:pPr algn="ctr">
+              <a:lnSpc>
+                <a:spcPct val="100000"/>
+              </a:lnSpc>
+            </a:pPr>
+            <a:r>
+              <a:rPr lang="ru-RU" spc="-1" dirty="0">
+                <a:solidFill>
+                  <a:srgbClr val="FFFFFF"/>
+                </a:solidFill>
+                <a:latin typeface="Calibri" panose="020F0502020204030204" pitchFamily="34" charset="0"/>
+                <a:cs typeface="Calibri" panose="020F0502020204030204" pitchFamily="34" charset="0"/>
+              </a:rPr>
+              <a:t>Диаграмма последовательности</a:t>
+            </a:r>
+            <a:endParaRPr lang="ru-RU" sz="1800" strike="noStrike" spc="-1" dirty="0">
+              <a:latin typeface="Calibri" panose="020F0502020204030204" pitchFamily="34" charset="0"/>
+              <a:cs typeface="Calibri" panose="020F0502020204030204" pitchFamily="34" charset="0"/>
+            </a:endParaRPr>
+          </a:p>
+        </p:txBody>
+      </p:sp>
+      <p:sp>
+        <p:nvSpPr>
+          <p:cNvPr id="55" name="CustomShape 2"/>
+          <p:cNvSpPr/>
+          <p:nvPr/>
+        </p:nvSpPr>
+        <p:spPr>
+          <a:xfrm>
+            <a:off x="11109960" y="6324480"/>
+            <a:ext cx="468720" cy="364680"/>
+          </a:xfrm>
+          <a:prstGeom prst="rect">
+            <a:avLst/>
+          </a:prstGeom>
+          <a:noFill/>
+          <a:ln>
+            <a:noFill/>
+          </a:ln>
+        </p:spPr>
+        <p:style>
+          <a:lnRef idx="0">
+            <a:scrgbClr r="0" g="0" b="0"/>
+          </a:lnRef>
+          <a:fillRef idx="0">
+            <a:scrgbClr r="0" g="0" b="0"/>
+          </a:fillRef>
+          <a:effectRef idx="0">
+            <a:scrgbClr r="0" g="0" b="0"/>
+          </a:effectRef>
+          <a:fontRef idx="minor"/>
+        </p:style>
+        <p:txBody>
+          <a:bodyPr lIns="90000" tIns="45000" rIns="90000" bIns="45000">
+            <a:spAutoFit/>
+          </a:bodyPr>
+          <a:lstStyle/>
+          <a:p>
+            <a:pPr algn="ctr">
+              <a:lnSpc>
+                <a:spcPct val="100000"/>
+              </a:lnSpc>
+            </a:pPr>
+            <a:fld id="{89F79450-C151-457E-9813-B313ED05920E}" type="slidenum">
+              <a:rPr lang="ru-RU" sz="1800" b="0" strike="noStrike" spc="-1">
+                <a:solidFill>
+                  <a:srgbClr val="FFFFFF"/>
+                </a:solidFill>
+                <a:latin typeface="Elektra Medium Pro"/>
+              </a:rPr>
+              <a:t>15</a:t>
+            </a:fld>
+            <a:endParaRPr lang="ru-RU" sz="1800" b="0" strike="noStrike" spc="-1">
+              <a:latin typeface="Arial"/>
+            </a:endParaRPr>
+          </a:p>
+        </p:txBody>
+      </p:sp>
+      <p:pic>
+        <p:nvPicPr>
+          <p:cNvPr id="3" name="Рисунок 2">
+            <a:extLst>
+              <a:ext uri="{FF2B5EF4-FFF2-40B4-BE49-F238E27FC236}">
+                <a16:creationId xmlns:a16="http://schemas.microsoft.com/office/drawing/2014/main" id="{48ECF74F-671F-4260-BDA3-0D199ADB3021}"/>
+              </a:ext>
+            </a:extLst>
+          </p:cNvPr>
+          <p:cNvPicPr>
+            <a:picLocks noChangeAspect="1"/>
+          </p:cNvPicPr>
+          <p:nvPr/>
+        </p:nvPicPr>
+        <p:blipFill>
+          <a:blip r:embed="rId3" cstate="print">
+            <a:extLst>
+              <a:ext uri="{28A0092B-C50C-407E-A947-70E740481C1C}">
+                <a14:useLocalDpi xmlns:a14="http://schemas.microsoft.com/office/drawing/2010/main" val="0"/>
+              </a:ext>
+              <a:ext uri="{96DAC541-7B7A-43D3-8B79-37D633B846F1}">
+                <asvg:svgBlip xmlns:asvg="http://schemas.microsoft.com/office/drawing/2016/SVG/main" r:embed="rId4"/>
+              </a:ext>
+            </a:extLst>
+          </a:blip>
+          <a:srcRect/>
+          <a:stretch/>
+        </p:blipFill>
+        <p:spPr>
+          <a:xfrm>
+            <a:off x="3770723" y="744461"/>
+            <a:ext cx="4072378" cy="5604142"/>
+          </a:xfrm>
+          <a:prstGeom prst="rect">
+            <a:avLst/>
+          </a:prstGeom>
+        </p:spPr>
+      </p:pic>
+    </p:spTree>
+    <p:extLst>
+      <p:ext uri="{BB962C8B-B14F-4D97-AF65-F5344CB8AC3E}">
+        <p14:creationId xmlns:p14="http://schemas.microsoft.com/office/powerpoint/2010/main" val="1609088673"/>
+      </p:ext>
+    </p:extLst>
+  </p:cSld>
+  <p:clrMapOvr>
+    <a:masterClrMapping/>
+  </p:clrMapOvr>
+</p:sld>
+</file>
+
+<file path=ppt/slides/slide16.xml><?xml version="1.0" encoding="utf-8"?>
+<p:sld xmlns:a="http://schemas.openxmlformats.org/drawingml/2006/main" xmlns:r="http://schemas.openxmlformats.org/officeDocument/2006/relationships" xmlns:p="http://schemas.openxmlformats.org/presentationml/2006/main">
+  <p:cSld>
+    <p:bg>
+      <p:bgPr>
+        <a:blipFill rotWithShape="0">
+          <a:blip r:embed="rId2"/>
+          <a:stretch>
+            <a:fillRect/>
+          </a:stretch>
+        </a:blipFill>
+        <a:effectLst/>
+      </p:bgPr>
+    </p:bg>
+    <p:spTree>
+      <p:nvGrpSpPr>
+        <p:cNvPr id="1" name=""/>
+        <p:cNvGrpSpPr/>
+        <p:nvPr/>
+      </p:nvGrpSpPr>
+      <p:grpSpPr>
+        <a:xfrm>
+          <a:off x="0" y="0"/>
+          <a:ext cx="0" cy="0"/>
+          <a:chOff x="0" y="0"/>
+          <a:chExt cx="0" cy="0"/>
+        </a:xfrm>
+      </p:grpSpPr>
+      <p:sp>
+        <p:nvSpPr>
+          <p:cNvPr id="54" name="CustomShape 1"/>
+          <p:cNvSpPr/>
+          <p:nvPr/>
+        </p:nvSpPr>
+        <p:spPr>
+          <a:xfrm>
+            <a:off x="2146800" y="293804"/>
+            <a:ext cx="7898400" cy="365040"/>
+          </a:xfrm>
+          <a:prstGeom prst="rect">
+            <a:avLst/>
+          </a:prstGeom>
+          <a:noFill/>
+          <a:ln>
+            <a:noFill/>
+          </a:ln>
+        </p:spPr>
+        <p:style>
+          <a:lnRef idx="0">
+            <a:scrgbClr r="0" g="0" b="0"/>
+          </a:lnRef>
+          <a:fillRef idx="0">
+            <a:scrgbClr r="0" g="0" b="0"/>
+          </a:fillRef>
+          <a:effectRef idx="0">
+            <a:scrgbClr r="0" g="0" b="0"/>
+          </a:effectRef>
+          <a:fontRef idx="minor"/>
+        </p:style>
+        <p:txBody>
+          <a:bodyPr lIns="90000" tIns="45000" rIns="90000" bIns="45000" anchor="ctr" anchorCtr="1">
+            <a:spAutoFit/>
+          </a:bodyPr>
+          <a:lstStyle/>
+          <a:p>
+            <a:pPr algn="ctr">
+              <a:lnSpc>
+                <a:spcPct val="100000"/>
+              </a:lnSpc>
+            </a:pPr>
+            <a:r>
+              <a:rPr lang="ru-RU" spc="-1" dirty="0">
+                <a:solidFill>
+                  <a:schemeClr val="bg1"/>
+                </a:solidFill>
+                <a:latin typeface="Calibri" panose="020F0502020204030204" pitchFamily="34" charset="0"/>
+                <a:cs typeface="Calibri" panose="020F0502020204030204" pitchFamily="34" charset="0"/>
+              </a:rPr>
+              <a:t>Каталог услуг</a:t>
+            </a:r>
+            <a:endParaRPr lang="ru-RU" sz="1800" b="0" strike="noStrike" spc="-1" dirty="0">
+              <a:solidFill>
+                <a:schemeClr val="bg1"/>
+              </a:solidFill>
+              <a:latin typeface="Calibri" panose="020F0502020204030204" pitchFamily="34" charset="0"/>
+              <a:cs typeface="Calibri" panose="020F0502020204030204" pitchFamily="34" charset="0"/>
+            </a:endParaRPr>
+          </a:p>
+        </p:txBody>
+      </p:sp>
+      <p:sp>
+        <p:nvSpPr>
+          <p:cNvPr id="55" name="CustomShape 2"/>
+          <p:cNvSpPr/>
+          <p:nvPr/>
+        </p:nvSpPr>
+        <p:spPr>
+          <a:xfrm>
+            <a:off x="11109960" y="6324480"/>
+            <a:ext cx="468720" cy="364680"/>
+          </a:xfrm>
+          <a:prstGeom prst="rect">
+            <a:avLst/>
+          </a:prstGeom>
+          <a:noFill/>
+          <a:ln>
+            <a:noFill/>
+          </a:ln>
+        </p:spPr>
+        <p:style>
+          <a:lnRef idx="0">
+            <a:scrgbClr r="0" g="0" b="0"/>
+          </a:lnRef>
+          <a:fillRef idx="0">
+            <a:scrgbClr r="0" g="0" b="0"/>
+          </a:fillRef>
+          <a:effectRef idx="0">
+            <a:scrgbClr r="0" g="0" b="0"/>
+          </a:effectRef>
+          <a:fontRef idx="minor"/>
+        </p:style>
+        <p:txBody>
+          <a:bodyPr lIns="90000" tIns="45000" rIns="90000" bIns="45000">
+            <a:spAutoFit/>
+          </a:bodyPr>
+          <a:lstStyle/>
+          <a:p>
+            <a:pPr algn="ctr">
+              <a:lnSpc>
+                <a:spcPct val="100000"/>
+              </a:lnSpc>
+            </a:pPr>
+            <a:fld id="{89F79450-C151-457E-9813-B313ED05920E}" type="slidenum">
+              <a:rPr lang="ru-RU" sz="1800" b="0" strike="noStrike" spc="-1">
+                <a:solidFill>
+                  <a:srgbClr val="FFFFFF"/>
+                </a:solidFill>
+                <a:latin typeface="Elektra Medium Pro"/>
+              </a:rPr>
+              <a:t>16</a:t>
+            </a:fld>
+            <a:endParaRPr lang="ru-RU" sz="1800" b="0" strike="noStrike" spc="-1">
+              <a:latin typeface="Arial"/>
+            </a:endParaRPr>
+          </a:p>
+        </p:txBody>
+      </p:sp>
+      <p:pic>
+        <p:nvPicPr>
+          <p:cNvPr id="7" name="Рисунок 6">
+            <a:extLst>
+              <a:ext uri="{FF2B5EF4-FFF2-40B4-BE49-F238E27FC236}">
+                <a16:creationId xmlns:a16="http://schemas.microsoft.com/office/drawing/2014/main" id="{1ECE596C-179D-4AD8-ADE7-0E595B8B7C63}"/>
+              </a:ext>
+            </a:extLst>
+          </p:cNvPr>
+          <p:cNvPicPr/>
+          <p:nvPr/>
+        </p:nvPicPr>
+        <p:blipFill>
+          <a:blip r:embed="rId3"/>
+          <a:stretch>
+            <a:fillRect/>
+          </a:stretch>
+        </p:blipFill>
+        <p:spPr>
+          <a:xfrm>
+            <a:off x="641023" y="820132"/>
+            <a:ext cx="11067068" cy="5128181"/>
+          </a:xfrm>
+          <a:prstGeom prst="rect">
+            <a:avLst/>
+          </a:prstGeom>
+        </p:spPr>
+      </p:pic>
+    </p:spTree>
+    <p:extLst>
+      <p:ext uri="{BB962C8B-B14F-4D97-AF65-F5344CB8AC3E}">
+        <p14:creationId xmlns:p14="http://schemas.microsoft.com/office/powerpoint/2010/main" val="3460214948"/>
+      </p:ext>
+    </p:extLst>
+  </p:cSld>
+  <p:clrMapOvr>
+    <a:masterClrMapping/>
+  </p:clrMapOvr>
+</p:sld>
+</file>
+
+<file path=ppt/slides/slide17.xml><?xml version="1.0" encoding="utf-8"?>
+<p:sld xmlns:a="http://schemas.openxmlformats.org/drawingml/2006/main" xmlns:r="http://schemas.openxmlformats.org/officeDocument/2006/relationships" xmlns:p="http://schemas.openxmlformats.org/presentationml/2006/main">
+  <p:cSld>
+    <p:bg>
+      <p:bgPr>
+        <a:blipFill rotWithShape="0">
+          <a:blip r:embed="rId2"/>
+          <a:stretch>
+            <a:fillRect/>
+          </a:stretch>
+        </a:blipFill>
+        <a:effectLst/>
+      </p:bgPr>
+    </p:bg>
+    <p:spTree>
+      <p:nvGrpSpPr>
+        <p:cNvPr id="1" name=""/>
+        <p:cNvGrpSpPr/>
+        <p:nvPr/>
+      </p:nvGrpSpPr>
+      <p:grpSpPr>
+        <a:xfrm>
+          <a:off x="0" y="0"/>
+          <a:ext cx="0" cy="0"/>
+          <a:chOff x="0" y="0"/>
+          <a:chExt cx="0" cy="0"/>
+        </a:xfrm>
+      </p:grpSpPr>
+      <p:sp>
+        <p:nvSpPr>
+          <p:cNvPr id="54" name="CustomShape 1"/>
+          <p:cNvSpPr/>
+          <p:nvPr/>
+        </p:nvSpPr>
+        <p:spPr>
+          <a:xfrm>
+            <a:off x="2146800" y="293804"/>
+            <a:ext cx="7898400" cy="365040"/>
+          </a:xfrm>
+          <a:prstGeom prst="rect">
+            <a:avLst/>
+          </a:prstGeom>
+          <a:noFill/>
+          <a:ln>
+            <a:noFill/>
+          </a:ln>
+        </p:spPr>
+        <p:style>
+          <a:lnRef idx="0">
+            <a:scrgbClr r="0" g="0" b="0"/>
+          </a:lnRef>
+          <a:fillRef idx="0">
+            <a:scrgbClr r="0" g="0" b="0"/>
+          </a:fillRef>
+          <a:effectRef idx="0">
+            <a:scrgbClr r="0" g="0" b="0"/>
+          </a:effectRef>
+          <a:fontRef idx="minor"/>
+        </p:style>
+        <p:txBody>
+          <a:bodyPr lIns="90000" tIns="45000" rIns="90000" bIns="45000" anchor="ctr" anchorCtr="1">
+            <a:spAutoFit/>
+          </a:bodyPr>
+          <a:lstStyle/>
+          <a:p>
+            <a:pPr algn="ctr">
+              <a:lnSpc>
+                <a:spcPct val="100000"/>
+              </a:lnSpc>
+            </a:pPr>
+            <a:r>
+              <a:rPr lang="ru-RU" sz="1800" b="0" strike="noStrike" spc="-1" dirty="0">
+                <a:solidFill>
+                  <a:schemeClr val="bg1"/>
+                </a:solidFill>
+                <a:latin typeface="Calibri" panose="020F0502020204030204" pitchFamily="34" charset="0"/>
+                <a:cs typeface="Calibri" panose="020F0502020204030204" pitchFamily="34" charset="0"/>
+              </a:rPr>
+              <a:t>Личный кабинет-з</a:t>
+            </a:r>
+            <a:r>
+              <a:rPr lang="ru-RU" spc="-1" dirty="0">
+                <a:solidFill>
+                  <a:schemeClr val="bg1"/>
+                </a:solidFill>
+                <a:latin typeface="Calibri" panose="020F0502020204030204" pitchFamily="34" charset="0"/>
+                <a:cs typeface="Calibri" panose="020F0502020204030204" pitchFamily="34" charset="0"/>
+              </a:rPr>
+              <a:t>аказ-наряды</a:t>
+            </a:r>
+            <a:endParaRPr lang="ru-RU" sz="1800" b="0" strike="noStrike" spc="-1" dirty="0">
+              <a:solidFill>
+                <a:schemeClr val="bg1"/>
+              </a:solidFill>
+              <a:latin typeface="Calibri" panose="020F0502020204030204" pitchFamily="34" charset="0"/>
+              <a:cs typeface="Calibri" panose="020F0502020204030204" pitchFamily="34" charset="0"/>
+            </a:endParaRPr>
+          </a:p>
+        </p:txBody>
+      </p:sp>
+      <p:sp>
+        <p:nvSpPr>
+          <p:cNvPr id="55" name="CustomShape 2"/>
+          <p:cNvSpPr/>
+          <p:nvPr/>
+        </p:nvSpPr>
+        <p:spPr>
+          <a:xfrm>
+            <a:off x="11109960" y="6324480"/>
+            <a:ext cx="468720" cy="364680"/>
+          </a:xfrm>
+          <a:prstGeom prst="rect">
+            <a:avLst/>
+          </a:prstGeom>
+          <a:noFill/>
+          <a:ln>
+            <a:noFill/>
+          </a:ln>
+        </p:spPr>
+        <p:style>
+          <a:lnRef idx="0">
+            <a:scrgbClr r="0" g="0" b="0"/>
+          </a:lnRef>
+          <a:fillRef idx="0">
+            <a:scrgbClr r="0" g="0" b="0"/>
+          </a:fillRef>
+          <a:effectRef idx="0">
+            <a:scrgbClr r="0" g="0" b="0"/>
+          </a:effectRef>
+          <a:fontRef idx="minor"/>
+        </p:style>
+        <p:txBody>
+          <a:bodyPr lIns="90000" tIns="45000" rIns="90000" bIns="45000">
+            <a:spAutoFit/>
+          </a:bodyPr>
+          <a:lstStyle/>
+          <a:p>
+            <a:pPr algn="ctr">
+              <a:lnSpc>
+                <a:spcPct val="100000"/>
+              </a:lnSpc>
+            </a:pPr>
+            <a:fld id="{89F79450-C151-457E-9813-B313ED05920E}" type="slidenum">
+              <a:rPr lang="ru-RU" sz="1800" b="0" strike="noStrike" spc="-1">
+                <a:solidFill>
+                  <a:srgbClr val="FFFFFF"/>
+                </a:solidFill>
+                <a:latin typeface="Elektra Medium Pro"/>
+              </a:rPr>
+              <a:t>17</a:t>
+            </a:fld>
+            <a:endParaRPr lang="ru-RU" sz="1800" b="0" strike="noStrike" spc="-1">
+              <a:latin typeface="Arial"/>
+            </a:endParaRPr>
+          </a:p>
+        </p:txBody>
+      </p:sp>
+      <p:pic>
+        <p:nvPicPr>
+          <p:cNvPr id="7" name="Рисунок 6">
+            <a:extLst>
+              <a:ext uri="{FF2B5EF4-FFF2-40B4-BE49-F238E27FC236}">
+                <a16:creationId xmlns:a16="http://schemas.microsoft.com/office/drawing/2014/main" id="{1ECE596C-179D-4AD8-ADE7-0E595B8B7C63}"/>
+              </a:ext>
+            </a:extLst>
+          </p:cNvPr>
+          <p:cNvPicPr/>
+          <p:nvPr/>
+        </p:nvPicPr>
+        <p:blipFill>
+          <a:blip r:embed="rId3">
+            <a:extLst>
+              <a:ext uri="{28A0092B-C50C-407E-A947-70E740481C1C}">
+                <a14:useLocalDpi xmlns:a14="http://schemas.microsoft.com/office/drawing/2010/main" val="0"/>
+              </a:ext>
+            </a:extLst>
+          </a:blip>
+          <a:srcRect/>
+          <a:stretch/>
+        </p:blipFill>
+        <p:spPr>
+          <a:xfrm>
+            <a:off x="641023" y="825831"/>
+            <a:ext cx="11067068" cy="5116782"/>
+          </a:xfrm>
+          <a:prstGeom prst="rect">
+            <a:avLst/>
+          </a:prstGeom>
+        </p:spPr>
+      </p:pic>
+    </p:spTree>
+    <p:extLst>
+      <p:ext uri="{BB962C8B-B14F-4D97-AF65-F5344CB8AC3E}">
+        <p14:creationId xmlns:p14="http://schemas.microsoft.com/office/powerpoint/2010/main" val="354734510"/>
+      </p:ext>
+    </p:extLst>
+  </p:cSld>
+  <p:clrMapOvr>
+    <a:masterClrMapping/>
+  </p:clrMapOvr>
+</p:sld>
+</file>
+
+<file path=ppt/slides/slide18.xml><?xml version="1.0" encoding="utf-8"?>
+<p:sld xmlns:a="http://schemas.openxmlformats.org/drawingml/2006/main" xmlns:r="http://schemas.openxmlformats.org/officeDocument/2006/relationships" xmlns:p="http://schemas.openxmlformats.org/presentationml/2006/main">
+  <p:cSld>
+    <p:bg>
+      <p:bgPr>
+        <a:blipFill rotWithShape="0">
+          <a:blip r:embed="rId2"/>
+          <a:stretch>
+            <a:fillRect/>
+          </a:stretch>
+        </a:blipFill>
+        <a:effectLst/>
+      </p:bgPr>
+    </p:bg>
+    <p:spTree>
+      <p:nvGrpSpPr>
+        <p:cNvPr id="1" name=""/>
+        <p:cNvGrpSpPr/>
+        <p:nvPr/>
+      </p:nvGrpSpPr>
+      <p:grpSpPr>
+        <a:xfrm>
+          <a:off x="0" y="0"/>
+          <a:ext cx="0" cy="0"/>
+          <a:chOff x="0" y="0"/>
+          <a:chExt cx="0" cy="0"/>
+        </a:xfrm>
+      </p:grpSpPr>
+      <p:sp>
+        <p:nvSpPr>
+          <p:cNvPr id="54" name="CustomShape 1"/>
+          <p:cNvSpPr/>
+          <p:nvPr/>
+        </p:nvSpPr>
+        <p:spPr>
+          <a:xfrm>
+            <a:off x="2146800" y="293804"/>
+            <a:ext cx="7898400" cy="365040"/>
+          </a:xfrm>
+          <a:prstGeom prst="rect">
+            <a:avLst/>
+          </a:prstGeom>
+          <a:noFill/>
+          <a:ln>
+            <a:noFill/>
+          </a:ln>
+        </p:spPr>
+        <p:style>
+          <a:lnRef idx="0">
+            <a:scrgbClr r="0" g="0" b="0"/>
+          </a:lnRef>
+          <a:fillRef idx="0">
+            <a:scrgbClr r="0" g="0" b="0"/>
+          </a:fillRef>
+          <a:effectRef idx="0">
+            <a:scrgbClr r="0" g="0" b="0"/>
+          </a:effectRef>
+          <a:fontRef idx="minor"/>
+        </p:style>
+        <p:txBody>
+          <a:bodyPr lIns="90000" tIns="45000" rIns="90000" bIns="45000" anchor="ctr" anchorCtr="1">
+            <a:spAutoFit/>
+          </a:bodyPr>
+          <a:lstStyle/>
+          <a:p>
+            <a:pPr algn="ctr">
+              <a:lnSpc>
+                <a:spcPct val="100000"/>
+              </a:lnSpc>
+            </a:pPr>
+            <a:r>
+              <a:rPr lang="ru-RU" sz="1800" b="0" strike="noStrike" spc="-1" dirty="0">
+                <a:solidFill>
+                  <a:schemeClr val="bg1"/>
+                </a:solidFill>
+                <a:latin typeface="Calibri" panose="020F0502020204030204" pitchFamily="34" charset="0"/>
+                <a:cs typeface="Calibri" panose="020F0502020204030204" pitchFamily="34" charset="0"/>
+              </a:rPr>
+              <a:t>Тестирование</a:t>
+            </a:r>
+          </a:p>
+        </p:txBody>
+      </p:sp>
+      <p:sp>
+        <p:nvSpPr>
+          <p:cNvPr id="55" name="CustomShape 2"/>
+          <p:cNvSpPr/>
+          <p:nvPr/>
+        </p:nvSpPr>
+        <p:spPr>
+          <a:xfrm>
+            <a:off x="11109960" y="6324480"/>
+            <a:ext cx="468720" cy="364680"/>
+          </a:xfrm>
+          <a:prstGeom prst="rect">
+            <a:avLst/>
+          </a:prstGeom>
+          <a:noFill/>
+          <a:ln>
+            <a:noFill/>
+          </a:ln>
+        </p:spPr>
+        <p:style>
+          <a:lnRef idx="0">
+            <a:scrgbClr r="0" g="0" b="0"/>
+          </a:lnRef>
+          <a:fillRef idx="0">
+            <a:scrgbClr r="0" g="0" b="0"/>
+          </a:fillRef>
+          <a:effectRef idx="0">
+            <a:scrgbClr r="0" g="0" b="0"/>
+          </a:effectRef>
+          <a:fontRef idx="minor"/>
+        </p:style>
+        <p:txBody>
+          <a:bodyPr lIns="90000" tIns="45000" rIns="90000" bIns="45000">
+            <a:spAutoFit/>
+          </a:bodyPr>
+          <a:lstStyle/>
+          <a:p>
+            <a:pPr algn="ctr">
+              <a:lnSpc>
+                <a:spcPct val="100000"/>
+              </a:lnSpc>
+            </a:pPr>
+            <a:fld id="{89F79450-C151-457E-9813-B313ED05920E}" type="slidenum">
+              <a:rPr lang="ru-RU" sz="1800" b="0" strike="noStrike" spc="-1">
+                <a:solidFill>
+                  <a:srgbClr val="FFFFFF"/>
+                </a:solidFill>
+                <a:latin typeface="Elektra Medium Pro"/>
+              </a:rPr>
+              <a:t>18</a:t>
+            </a:fld>
+            <a:endParaRPr lang="ru-RU" sz="1800" b="0" strike="noStrike" spc="-1">
+              <a:latin typeface="Arial"/>
+            </a:endParaRPr>
+          </a:p>
+        </p:txBody>
+      </p:sp>
+      <p:pic>
+        <p:nvPicPr>
+          <p:cNvPr id="3" name="Рисунок 2">
+            <a:extLst>
+              <a:ext uri="{FF2B5EF4-FFF2-40B4-BE49-F238E27FC236}">
+                <a16:creationId xmlns:a16="http://schemas.microsoft.com/office/drawing/2014/main" id="{CED034A7-FDFF-42A5-93DD-EAF4C6C762B1}"/>
+              </a:ext>
+            </a:extLst>
+          </p:cNvPr>
+          <p:cNvPicPr>
+            <a:picLocks noChangeAspect="1"/>
+          </p:cNvPicPr>
+          <p:nvPr/>
+        </p:nvPicPr>
+        <p:blipFill>
+          <a:blip r:embed="rId3">
+            <a:extLst>
+              <a:ext uri="{28A0092B-C50C-407E-A947-70E740481C1C}">
+                <a14:useLocalDpi xmlns:a14="http://schemas.microsoft.com/office/drawing/2010/main" val="0"/>
+              </a:ext>
+            </a:extLst>
+          </a:blip>
+          <a:stretch>
+            <a:fillRect/>
+          </a:stretch>
+        </p:blipFill>
+        <p:spPr>
+          <a:xfrm>
+            <a:off x="354529" y="1514811"/>
+            <a:ext cx="3198591" cy="3198591"/>
+          </a:xfrm>
+          <a:prstGeom prst="rect">
+            <a:avLst/>
+          </a:prstGeom>
+        </p:spPr>
+      </p:pic>
+      <p:pic>
+        <p:nvPicPr>
+          <p:cNvPr id="2052" name="Picture 4" descr="SOA Testing with Mocha, Chai and Supertest">
+            <a:extLst>
+              <a:ext uri="{FF2B5EF4-FFF2-40B4-BE49-F238E27FC236}">
+                <a16:creationId xmlns:a16="http://schemas.microsoft.com/office/drawing/2014/main" id="{C409A7B2-C3D7-4741-89D6-A43918932B26}"/>
+              </a:ext>
+            </a:extLst>
+          </p:cNvPr>
+          <p:cNvPicPr>
+            <a:picLocks noChangeAspect="1" noChangeArrowheads="1"/>
+          </p:cNvPicPr>
+          <p:nvPr/>
+        </p:nvPicPr>
+        <p:blipFill>
+          <a:blip r:embed="rId4">
+            <a:extLst>
+              <a:ext uri="{28A0092B-C50C-407E-A947-70E740481C1C}">
+                <a14:useLocalDpi xmlns:a14="http://schemas.microsoft.com/office/drawing/2010/main" val="0"/>
+              </a:ext>
+            </a:extLst>
+          </a:blip>
+          <a:srcRect/>
+          <a:stretch>
+            <a:fillRect/>
+          </a:stretch>
+        </p:blipFill>
+        <p:spPr bwMode="auto">
+          <a:xfrm>
+            <a:off x="3923008" y="1371707"/>
+            <a:ext cx="3348517" cy="3348517"/>
+          </a:xfrm>
+          <a:prstGeom prst="rect">
+            <a:avLst/>
+          </a:prstGeom>
+          <a:noFill/>
+          <a:extLst>
+            <a:ext uri="{909E8E84-426E-40DD-AFC4-6F175D3DCCD1}">
+              <a14:hiddenFill xmlns:a14="http://schemas.microsoft.com/office/drawing/2010/main">
+                <a:solidFill>
+                  <a:srgbClr val="FFFFFF"/>
+                </a:solidFill>
+              </a14:hiddenFill>
+            </a:ext>
+          </a:extLst>
+        </p:spPr>
+      </p:pic>
+      <p:pic>
+        <p:nvPicPr>
+          <p:cNvPr id="2054" name="Picture 6">
+            <a:extLst>
+              <a:ext uri="{FF2B5EF4-FFF2-40B4-BE49-F238E27FC236}">
+                <a16:creationId xmlns:a16="http://schemas.microsoft.com/office/drawing/2014/main" id="{D151EFDF-40C2-49CA-8020-92F5055ED465}"/>
+              </a:ext>
+            </a:extLst>
+          </p:cNvPr>
+          <p:cNvPicPr>
+            <a:picLocks noChangeAspect="1" noChangeArrowheads="1"/>
+          </p:cNvPicPr>
+          <p:nvPr/>
+        </p:nvPicPr>
+        <p:blipFill>
+          <a:blip r:embed="rId5">
+            <a:extLst>
+              <a:ext uri="{28A0092B-C50C-407E-A947-70E740481C1C}">
+                <a14:useLocalDpi xmlns:a14="http://schemas.microsoft.com/office/drawing/2010/main" val="0"/>
+              </a:ext>
+            </a:extLst>
+          </a:blip>
+          <a:srcRect/>
+          <a:stretch>
+            <a:fillRect/>
+          </a:stretch>
+        </p:blipFill>
+        <p:spPr bwMode="auto">
+          <a:xfrm>
+            <a:off x="7271525" y="2203002"/>
+            <a:ext cx="4962525" cy="1685925"/>
+          </a:xfrm>
+          <a:prstGeom prst="rect">
+            <a:avLst/>
+          </a:prstGeom>
+          <a:noFill/>
+          <a:extLst>
+            <a:ext uri="{909E8E84-426E-40DD-AFC4-6F175D3DCCD1}">
+              <a14:hiddenFill xmlns:a14="http://schemas.microsoft.com/office/drawing/2010/main">
+                <a:solidFill>
+                  <a:srgbClr val="FFFFFF"/>
+                </a:solidFill>
+              </a14:hiddenFill>
+            </a:ext>
+          </a:extLst>
+        </p:spPr>
+      </p:pic>
+    </p:spTree>
+    <p:extLst>
+      <p:ext uri="{BB962C8B-B14F-4D97-AF65-F5344CB8AC3E}">
+        <p14:creationId xmlns:p14="http://schemas.microsoft.com/office/powerpoint/2010/main" val="2394782919"/>
+      </p:ext>
+    </p:extLst>
+  </p:cSld>
+  <p:clrMapOvr>
+    <a:masterClrMapping/>
+  </p:clrMapOvr>
+</p:sld>
+</file>
+
+<file path=ppt/slides/slide19.xml><?xml version="1.0" encoding="utf-8"?>
+<p:sld xmlns:a="http://schemas.openxmlformats.org/drawingml/2006/main" xmlns:r="http://schemas.openxmlformats.org/officeDocument/2006/relationships" xmlns:p="http://schemas.openxmlformats.org/presentationml/2006/main">
+  <p:cSld>
+    <p:bg>
+      <p:bgPr>
+        <a:blipFill rotWithShape="0">
+          <a:blip r:embed="rId2"/>
+          <a:stretch>
+            <a:fillRect/>
+          </a:stretch>
+        </a:blipFill>
+        <a:effectLst/>
+      </p:bgPr>
+    </p:bg>
+    <p:spTree>
+      <p:nvGrpSpPr>
+        <p:cNvPr id="1" name=""/>
+        <p:cNvGrpSpPr/>
+        <p:nvPr/>
+      </p:nvGrpSpPr>
+      <p:grpSpPr>
+        <a:xfrm>
+          <a:off x="0" y="0"/>
+          <a:ext cx="0" cy="0"/>
+          <a:chOff x="0" y="0"/>
+          <a:chExt cx="0" cy="0"/>
+        </a:xfrm>
+      </p:grpSpPr>
+      <p:sp>
+        <p:nvSpPr>
+          <p:cNvPr id="54" name="CustomShape 1"/>
+          <p:cNvSpPr/>
+          <p:nvPr/>
+        </p:nvSpPr>
+        <p:spPr>
+          <a:xfrm>
+            <a:off x="2146800" y="293804"/>
+            <a:ext cx="7898400" cy="365040"/>
+          </a:xfrm>
+          <a:prstGeom prst="rect">
+            <a:avLst/>
+          </a:prstGeom>
+          <a:noFill/>
+          <a:ln>
+            <a:noFill/>
+          </a:ln>
+        </p:spPr>
+        <p:style>
+          <a:lnRef idx="0">
+            <a:scrgbClr r="0" g="0" b="0"/>
+          </a:lnRef>
+          <a:fillRef idx="0">
+            <a:scrgbClr r="0" g="0" b="0"/>
+          </a:fillRef>
+          <a:effectRef idx="0">
+            <a:scrgbClr r="0" g="0" b="0"/>
+          </a:effectRef>
+          <a:fontRef idx="minor"/>
+        </p:style>
+        <p:txBody>
+          <a:bodyPr lIns="90000" tIns="45000" rIns="90000" bIns="45000" anchor="ctr" anchorCtr="1">
+            <a:spAutoFit/>
+          </a:bodyPr>
+          <a:lstStyle/>
+          <a:p>
+            <a:pPr algn="ctr">
+              <a:lnSpc>
+                <a:spcPct val="100000"/>
+              </a:lnSpc>
+            </a:pPr>
+            <a:r>
+              <a:rPr lang="ru-RU" spc="-1" dirty="0">
+                <a:solidFill>
+                  <a:schemeClr val="bg1"/>
+                </a:solidFill>
+                <a:latin typeface="Calibri" panose="020F0502020204030204" pitchFamily="34" charset="0"/>
+                <a:cs typeface="Calibri" panose="020F0502020204030204" pitchFamily="34" charset="0"/>
+              </a:rPr>
+              <a:t>Модульное и интеграционное тестирование</a:t>
+            </a:r>
+            <a:endParaRPr lang="ru-RU" sz="1800" b="0" strike="noStrike" spc="-1" dirty="0">
+              <a:solidFill>
+                <a:schemeClr val="bg1"/>
+              </a:solidFill>
+              <a:latin typeface="Calibri" panose="020F0502020204030204" pitchFamily="34" charset="0"/>
+              <a:cs typeface="Calibri" panose="020F0502020204030204" pitchFamily="34" charset="0"/>
+            </a:endParaRPr>
+          </a:p>
+        </p:txBody>
+      </p:sp>
+      <p:sp>
+        <p:nvSpPr>
+          <p:cNvPr id="55" name="CustomShape 2"/>
+          <p:cNvSpPr/>
+          <p:nvPr/>
+        </p:nvSpPr>
+        <p:spPr>
+          <a:xfrm>
+            <a:off x="11109960" y="6324480"/>
+            <a:ext cx="468720" cy="364680"/>
+          </a:xfrm>
+          <a:prstGeom prst="rect">
+            <a:avLst/>
+          </a:prstGeom>
+          <a:noFill/>
+          <a:ln>
+            <a:noFill/>
+          </a:ln>
+        </p:spPr>
+        <p:style>
+          <a:lnRef idx="0">
+            <a:scrgbClr r="0" g="0" b="0"/>
+          </a:lnRef>
+          <a:fillRef idx="0">
+            <a:scrgbClr r="0" g="0" b="0"/>
+          </a:fillRef>
+          <a:effectRef idx="0">
+            <a:scrgbClr r="0" g="0" b="0"/>
+          </a:effectRef>
+          <a:fontRef idx="minor"/>
+        </p:style>
+        <p:txBody>
+          <a:bodyPr lIns="90000" tIns="45000" rIns="90000" bIns="45000">
+            <a:spAutoFit/>
+          </a:bodyPr>
+          <a:lstStyle/>
+          <a:p>
+            <a:pPr algn="ctr">
+              <a:lnSpc>
+                <a:spcPct val="100000"/>
+              </a:lnSpc>
+            </a:pPr>
+            <a:fld id="{89F79450-C151-457E-9813-B313ED05920E}" type="slidenum">
+              <a:rPr lang="ru-RU" sz="1800" b="0" strike="noStrike" spc="-1">
+                <a:solidFill>
+                  <a:srgbClr val="FFFFFF"/>
+                </a:solidFill>
+                <a:latin typeface="Elektra Medium Pro"/>
+              </a:rPr>
+              <a:t>19</a:t>
+            </a:fld>
+            <a:endParaRPr lang="ru-RU" sz="1800" b="0" strike="noStrike" spc="-1">
+              <a:latin typeface="Arial"/>
+            </a:endParaRPr>
+          </a:p>
+        </p:txBody>
+      </p:sp>
+      <p:pic>
+        <p:nvPicPr>
+          <p:cNvPr id="4" name="Рисунок 3">
+            <a:extLst>
+              <a:ext uri="{FF2B5EF4-FFF2-40B4-BE49-F238E27FC236}">
+                <a16:creationId xmlns:a16="http://schemas.microsoft.com/office/drawing/2014/main" id="{8F8377A5-B452-4B95-A573-ECBC1E28E335}"/>
+              </a:ext>
+            </a:extLst>
+          </p:cNvPr>
+          <p:cNvPicPr>
+            <a:picLocks noChangeAspect="1"/>
+          </p:cNvPicPr>
+          <p:nvPr/>
+        </p:nvPicPr>
+        <p:blipFill>
+          <a:blip r:embed="rId3">
+            <a:extLst>
+              <a:ext uri="{28A0092B-C50C-407E-A947-70E740481C1C}">
+                <a14:useLocalDpi xmlns:a14="http://schemas.microsoft.com/office/drawing/2010/main" val="0"/>
+              </a:ext>
+            </a:extLst>
+          </a:blip>
+          <a:stretch>
+            <a:fillRect/>
+          </a:stretch>
+        </p:blipFill>
+        <p:spPr>
+          <a:xfrm>
+            <a:off x="-1" y="1919221"/>
+            <a:ext cx="6504495" cy="1938595"/>
+          </a:xfrm>
+          <a:prstGeom prst="rect">
+            <a:avLst/>
+          </a:prstGeom>
+        </p:spPr>
+      </p:pic>
+      <p:pic>
+        <p:nvPicPr>
+          <p:cNvPr id="6" name="Рисунок 5">
+            <a:extLst>
+              <a:ext uri="{FF2B5EF4-FFF2-40B4-BE49-F238E27FC236}">
+                <a16:creationId xmlns:a16="http://schemas.microsoft.com/office/drawing/2014/main" id="{4A64769E-25DB-481E-89AF-C24E603476D1}"/>
+              </a:ext>
+            </a:extLst>
+          </p:cNvPr>
+          <p:cNvPicPr>
+            <a:picLocks noChangeAspect="1"/>
+          </p:cNvPicPr>
+          <p:nvPr/>
+        </p:nvPicPr>
+        <p:blipFill>
+          <a:blip r:embed="rId4">
+            <a:extLst>
+              <a:ext uri="{28A0092B-C50C-407E-A947-70E740481C1C}">
+                <a14:useLocalDpi xmlns:a14="http://schemas.microsoft.com/office/drawing/2010/main" val="0"/>
+              </a:ext>
+            </a:extLst>
+          </a:blip>
+          <a:stretch>
+            <a:fillRect/>
+          </a:stretch>
+        </p:blipFill>
+        <p:spPr>
+          <a:xfrm>
+            <a:off x="6387666" y="1725104"/>
+            <a:ext cx="5804334" cy="2967269"/>
+          </a:xfrm>
+          <a:prstGeom prst="rect">
+            <a:avLst/>
+          </a:prstGeom>
+        </p:spPr>
+      </p:pic>
+    </p:spTree>
+    <p:extLst>
+      <p:ext uri="{BB962C8B-B14F-4D97-AF65-F5344CB8AC3E}">
+        <p14:creationId xmlns:p14="http://schemas.microsoft.com/office/powerpoint/2010/main" val="2491293019"/>
+      </p:ext>
+    </p:extLst>
   </p:cSld>
   <p:clrMapOvr>
     <a:masterClrMapping/>
@@ -4314,6 +5648,16 @@
               </a:lnSpc>
             </a:pPr>
             <a:r>
+              <a:rPr lang="ru-RU" sz="1800" strike="noStrike" spc="-1" dirty="0">
+                <a:solidFill>
+                  <a:srgbClr val="FFFFFF"/>
+                </a:solidFill>
+                <a:latin typeface="Calibri" panose="020F0502020204030204" pitchFamily="34" charset="0"/>
+                <a:cs typeface="Calibri" panose="020F0502020204030204" pitchFamily="34" charset="0"/>
+              </a:rPr>
+              <a:t>Актуальность</a:t>
+            </a:r>
+            <a:r>
               <a:rPr lang="ru-RU" sz="1800" b="1" strike="noStrike" spc="-1" dirty="0">
                 <a:solidFill>
                   <a:srgbClr val="FFFFFF"/>
@@ -4321,7 +5665,7 @@
                 <a:latin typeface="Calibri" panose="020F0502020204030204" pitchFamily="34" charset="0"/>
                 <a:cs typeface="Calibri" panose="020F0502020204030204" pitchFamily="34" charset="0"/>
               </a:rPr>
-              <a:t>Актуальность </a:t>
+              <a:t> </a:t>
             </a:r>
             <a:endParaRPr lang="ru-RU" sz="1800" b="0" strike="noStrike" spc="-1" dirty="0">
               <a:latin typeface="Calibri" panose="020F0502020204030204" pitchFamily="34" charset="0"/>
@@ -4383,6 +5727,894 @@
             </a:fld>
             <a:endParaRPr lang="ru-RU" sz="1800" b="0" strike="noStrike" spc="-1">
               <a:latin typeface="Arial"/>
+            </a:endParaRPr>
+          </a:p>
+        </p:txBody>
+      </p:sp>
+    </p:spTree>
+  </p:cSld>
+  <p:clrMapOvr>
+    <a:masterClrMapping/>
+  </p:clrMapOvr>
+</p:sld>
+</file>
+
+<file path=ppt/slides/slide20.xml><?xml version="1.0" encoding="utf-8"?>
+<p:sld xmlns:a="http://schemas.openxmlformats.org/drawingml/2006/main" xmlns:r="http://schemas.openxmlformats.org/officeDocument/2006/relationships" xmlns:p="http://schemas.openxmlformats.org/presentationml/2006/main">
+  <p:cSld>
+    <p:bg>
+      <p:bgPr>
+        <a:blipFill rotWithShape="0">
+          <a:blip r:embed="rId2"/>
+          <a:stretch>
+            <a:fillRect/>
+          </a:stretch>
+        </a:blipFill>
+        <a:effectLst/>
+      </p:bgPr>
+    </p:bg>
+    <p:spTree>
+      <p:nvGrpSpPr>
+        <p:cNvPr id="1" name=""/>
+        <p:cNvGrpSpPr/>
+        <p:nvPr/>
+      </p:nvGrpSpPr>
+      <p:grpSpPr>
+        <a:xfrm>
+          <a:off x="0" y="0"/>
+          <a:ext cx="0" cy="0"/>
+          <a:chOff x="0" y="0"/>
+          <a:chExt cx="0" cy="0"/>
+        </a:xfrm>
+      </p:grpSpPr>
+      <p:sp>
+        <p:nvSpPr>
+          <p:cNvPr id="54" name="CustomShape 1"/>
+          <p:cNvSpPr/>
+          <p:nvPr/>
+        </p:nvSpPr>
+        <p:spPr>
+          <a:xfrm>
+            <a:off x="2146800" y="293804"/>
+            <a:ext cx="7898400" cy="365040"/>
+          </a:xfrm>
+          <a:prstGeom prst="rect">
+            <a:avLst/>
+          </a:prstGeom>
+          <a:noFill/>
+          <a:ln>
+            <a:noFill/>
+          </a:ln>
+        </p:spPr>
+        <p:style>
+          <a:lnRef idx="0">
+            <a:scrgbClr r="0" g="0" b="0"/>
+          </a:lnRef>
+          <a:fillRef idx="0">
+            <a:scrgbClr r="0" g="0" b="0"/>
+          </a:fillRef>
+          <a:effectRef idx="0">
+            <a:scrgbClr r="0" g="0" b="0"/>
+          </a:effectRef>
+          <a:fontRef idx="minor"/>
+        </p:style>
+        <p:txBody>
+          <a:bodyPr lIns="90000" tIns="45000" rIns="90000" bIns="45000" anchor="ctr" anchorCtr="1">
+            <a:spAutoFit/>
+          </a:bodyPr>
+          <a:lstStyle/>
+          <a:p>
+            <a:pPr algn="ctr">
+              <a:lnSpc>
+                <a:spcPct val="100000"/>
+              </a:lnSpc>
+            </a:pPr>
+            <a:r>
+              <a:rPr lang="ru-RU" spc="-1" dirty="0">
+                <a:solidFill>
+                  <a:schemeClr val="bg1"/>
+                </a:solidFill>
+                <a:latin typeface="Calibri" panose="020F0502020204030204" pitchFamily="34" charset="0"/>
+                <a:cs typeface="Calibri" panose="020F0502020204030204" pitchFamily="34" charset="0"/>
+              </a:rPr>
+              <a:t>Нагрузочное тестирование </a:t>
+            </a:r>
+            <a:r>
+              <a:rPr lang="en-US" spc="-1" dirty="0">
+                <a:solidFill>
+                  <a:schemeClr val="bg1"/>
+                </a:solidFill>
+                <a:latin typeface="Calibri" panose="020F0502020204030204" pitchFamily="34" charset="0"/>
+                <a:cs typeface="Calibri" panose="020F0502020204030204" pitchFamily="34" charset="0"/>
+              </a:rPr>
+              <a:t>JMeter</a:t>
+            </a:r>
+            <a:endParaRPr lang="ru-RU" sz="1800" b="0" strike="noStrike" spc="-1" dirty="0">
+              <a:solidFill>
+                <a:schemeClr val="bg1"/>
+              </a:solidFill>
+              <a:latin typeface="Calibri" panose="020F0502020204030204" pitchFamily="34" charset="0"/>
+              <a:cs typeface="Calibri" panose="020F0502020204030204" pitchFamily="34" charset="0"/>
+            </a:endParaRPr>
+          </a:p>
+        </p:txBody>
+      </p:sp>
+      <p:sp>
+        <p:nvSpPr>
+          <p:cNvPr id="55" name="CustomShape 2"/>
+          <p:cNvSpPr/>
+          <p:nvPr/>
+        </p:nvSpPr>
+        <p:spPr>
+          <a:xfrm>
+            <a:off x="11109960" y="6324480"/>
+            <a:ext cx="468720" cy="364680"/>
+          </a:xfrm>
+          <a:prstGeom prst="rect">
+            <a:avLst/>
+          </a:prstGeom>
+          <a:noFill/>
+          <a:ln>
+            <a:noFill/>
+          </a:ln>
+        </p:spPr>
+        <p:style>
+          <a:lnRef idx="0">
+            <a:scrgbClr r="0" g="0" b="0"/>
+          </a:lnRef>
+          <a:fillRef idx="0">
+            <a:scrgbClr r="0" g="0" b="0"/>
+          </a:fillRef>
+          <a:effectRef idx="0">
+            <a:scrgbClr r="0" g="0" b="0"/>
+          </a:effectRef>
+          <a:fontRef idx="minor"/>
+        </p:style>
+        <p:txBody>
+          <a:bodyPr lIns="90000" tIns="45000" rIns="90000" bIns="45000">
+            <a:spAutoFit/>
+          </a:bodyPr>
+          <a:lstStyle/>
+          <a:p>
+            <a:pPr algn="ctr">
+              <a:lnSpc>
+                <a:spcPct val="100000"/>
+              </a:lnSpc>
+            </a:pPr>
+            <a:fld id="{89F79450-C151-457E-9813-B313ED05920E}" type="slidenum">
+              <a:rPr lang="ru-RU" sz="1800" b="0" strike="noStrike" spc="-1">
+                <a:solidFill>
+                  <a:srgbClr val="FFFFFF"/>
+                </a:solidFill>
+                <a:latin typeface="Elektra Medium Pro"/>
+              </a:rPr>
+              <a:t>20</a:t>
+            </a:fld>
+            <a:endParaRPr lang="ru-RU" sz="1800" b="0" strike="noStrike" spc="-1">
+              <a:latin typeface="Arial"/>
+            </a:endParaRPr>
+          </a:p>
+        </p:txBody>
+      </p:sp>
+      <p:pic>
+        <p:nvPicPr>
+          <p:cNvPr id="3" name="Рисунок 2">
+            <a:extLst>
+              <a:ext uri="{FF2B5EF4-FFF2-40B4-BE49-F238E27FC236}">
+                <a16:creationId xmlns:a16="http://schemas.microsoft.com/office/drawing/2014/main" id="{FE746306-4A11-4A5E-9D6F-959BC5188E29}"/>
+              </a:ext>
+            </a:extLst>
+          </p:cNvPr>
+          <p:cNvPicPr>
+            <a:picLocks noChangeAspect="1"/>
+          </p:cNvPicPr>
+          <p:nvPr/>
+        </p:nvPicPr>
+        <p:blipFill>
+          <a:blip r:embed="rId3"/>
+          <a:stretch>
+            <a:fillRect/>
+          </a:stretch>
+        </p:blipFill>
+        <p:spPr>
+          <a:xfrm>
+            <a:off x="0" y="1179604"/>
+            <a:ext cx="12192000" cy="1501067"/>
+          </a:xfrm>
+          <a:prstGeom prst="rect">
+            <a:avLst/>
+          </a:prstGeom>
+        </p:spPr>
+      </p:pic>
+      <p:pic>
+        <p:nvPicPr>
+          <p:cNvPr id="8" name="Рисунок 7">
+            <a:extLst>
+              <a:ext uri="{FF2B5EF4-FFF2-40B4-BE49-F238E27FC236}">
+                <a16:creationId xmlns:a16="http://schemas.microsoft.com/office/drawing/2014/main" id="{57C3B506-C405-4F1E-8000-D7F80F0ADF9C}"/>
+              </a:ext>
+            </a:extLst>
+          </p:cNvPr>
+          <p:cNvPicPr>
+            <a:picLocks noChangeAspect="1"/>
+          </p:cNvPicPr>
+          <p:nvPr/>
+        </p:nvPicPr>
+        <p:blipFill>
+          <a:blip r:embed="rId4"/>
+          <a:stretch>
+            <a:fillRect/>
+          </a:stretch>
+        </p:blipFill>
+        <p:spPr>
+          <a:xfrm>
+            <a:off x="0" y="3757370"/>
+            <a:ext cx="12192000" cy="1477059"/>
+          </a:xfrm>
+          <a:prstGeom prst="rect">
+            <a:avLst/>
+          </a:prstGeom>
+        </p:spPr>
+      </p:pic>
+    </p:spTree>
+    <p:extLst>
+      <p:ext uri="{BB962C8B-B14F-4D97-AF65-F5344CB8AC3E}">
+        <p14:creationId xmlns:p14="http://schemas.microsoft.com/office/powerpoint/2010/main" val="4065019780"/>
+      </p:ext>
+    </p:extLst>
+  </p:cSld>
+  <p:clrMapOvr>
+    <a:masterClrMapping/>
+  </p:clrMapOvr>
+</p:sld>
+</file>
+
+<file path=ppt/slides/slide21.xml><?xml version="1.0" encoding="utf-8"?>
+<p:sld xmlns:a="http://schemas.openxmlformats.org/drawingml/2006/main" xmlns:r="http://schemas.openxmlformats.org/officeDocument/2006/relationships" xmlns:p="http://schemas.openxmlformats.org/presentationml/2006/main">
+  <p:cSld>
+    <p:bg>
+      <p:bgPr>
+        <a:blipFill rotWithShape="0">
+          <a:blip r:embed="rId2" cstate="print"/>
+          <a:stretch>
+            <a:fillRect/>
+          </a:stretch>
+        </a:blipFill>
+        <a:effectLst/>
+      </p:bgPr>
+    </p:bg>
+    <p:spTree>
+      <p:nvGrpSpPr>
+        <p:cNvPr id="1" name=""/>
+        <p:cNvGrpSpPr/>
+        <p:nvPr/>
+      </p:nvGrpSpPr>
+      <p:grpSpPr>
+        <a:xfrm>
+          <a:off x="0" y="0"/>
+          <a:ext cx="0" cy="0"/>
+          <a:chOff x="0" y="0"/>
+          <a:chExt cx="0" cy="0"/>
+        </a:xfrm>
+      </p:grpSpPr>
+      <p:sp>
+        <p:nvSpPr>
+          <p:cNvPr id="106" name="CustomShape 1"/>
+          <p:cNvSpPr/>
+          <p:nvPr/>
+        </p:nvSpPr>
+        <p:spPr>
+          <a:xfrm>
+            <a:off x="2118997" y="292347"/>
+            <a:ext cx="7898400" cy="365040"/>
+          </a:xfrm>
+          <a:prstGeom prst="rect">
+            <a:avLst/>
+          </a:prstGeom>
+          <a:noFill/>
+          <a:ln>
+            <a:noFill/>
+          </a:ln>
+        </p:spPr>
+        <p:style>
+          <a:lnRef idx="0">
+            <a:scrgbClr r="0" g="0" b="0"/>
+          </a:lnRef>
+          <a:fillRef idx="0">
+            <a:scrgbClr r="0" g="0" b="0"/>
+          </a:fillRef>
+          <a:effectRef idx="0">
+            <a:scrgbClr r="0" g="0" b="0"/>
+          </a:effectRef>
+          <a:fontRef idx="minor"/>
+        </p:style>
+        <p:txBody>
+          <a:bodyPr lIns="90000" tIns="45000" rIns="90000" bIns="45000" anchor="ctr" anchorCtr="1">
+            <a:spAutoFit/>
+          </a:bodyPr>
+          <a:lstStyle/>
+          <a:p>
+            <a:pPr marL="0" marR="0" lvl="0" indent="0" algn="ctr" defTabSz="914400" rtl="0" eaLnBrk="1" fontAlgn="auto" latinLnBrk="0" hangingPunct="1">
+              <a:lnSpc>
+                <a:spcPct val="100000"/>
+              </a:lnSpc>
+              <a:spcBef>
+                <a:spcPts val="0"/>
+              </a:spcBef>
+              <a:spcAft>
+                <a:spcPts val="0"/>
+              </a:spcAft>
+              <a:buClrTx/>
+              <a:buSzTx/>
+              <a:buFontTx/>
+              <a:buNone/>
+              <a:tabLst/>
+              <a:defRPr/>
+            </a:pPr>
+            <a:r>
+              <a:rPr kumimoji="0" lang="ru-RU" sz="1800" b="1" i="0" u="none" strike="noStrike" kern="1200" cap="none" spc="-1" normalizeH="0" baseline="0" noProof="0" dirty="0">
+                <a:ln>
+                  <a:noFill/>
+                </a:ln>
+                <a:solidFill>
+                  <a:srgbClr val="FFFFFF"/>
+                </a:solidFill>
+                <a:effectLst/>
+                <a:uLnTx/>
+                <a:uFillTx/>
+                <a:latin typeface="Calibri" panose="020F0502020204030204" pitchFamily="34" charset="0"/>
+                <a:ea typeface="DejaVu Sans"/>
+                <a:cs typeface="Calibri" panose="020F0502020204030204" pitchFamily="34" charset="0"/>
+              </a:rPr>
+              <a:t>Заключение</a:t>
+            </a:r>
+            <a:endParaRPr kumimoji="0" lang="ru-RU" sz="1800" b="0" i="0" u="none" strike="noStrike" kern="1200" cap="none" spc="-1" normalizeH="0" baseline="0" noProof="0" dirty="0">
+              <a:ln>
+                <a:noFill/>
+              </a:ln>
+              <a:solidFill>
+                <a:prstClr val="black"/>
+              </a:solidFill>
+              <a:effectLst/>
+              <a:uLnTx/>
+              <a:uFillTx/>
+              <a:latin typeface="Calibri" panose="020F0502020204030204" pitchFamily="34" charset="0"/>
+              <a:ea typeface="DejaVu Sans"/>
+              <a:cs typeface="Calibri" panose="020F0502020204030204" pitchFamily="34" charset="0"/>
+            </a:endParaRPr>
+          </a:p>
+        </p:txBody>
+      </p:sp>
+      <p:sp>
+        <p:nvSpPr>
+          <p:cNvPr id="107" name="CustomShape 2"/>
+          <p:cNvSpPr/>
+          <p:nvPr/>
+        </p:nvSpPr>
+        <p:spPr>
+          <a:xfrm>
+            <a:off x="11109960" y="6324480"/>
+            <a:ext cx="468720" cy="364680"/>
+          </a:xfrm>
+          <a:prstGeom prst="rect">
+            <a:avLst/>
+          </a:prstGeom>
+          <a:noFill/>
+          <a:ln>
+            <a:noFill/>
+          </a:ln>
+        </p:spPr>
+        <p:style>
+          <a:lnRef idx="0">
+            <a:scrgbClr r="0" g="0" b="0"/>
+          </a:lnRef>
+          <a:fillRef idx="0">
+            <a:scrgbClr r="0" g="0" b="0"/>
+          </a:fillRef>
+          <a:effectRef idx="0">
+            <a:scrgbClr r="0" g="0" b="0"/>
+          </a:effectRef>
+          <a:fontRef idx="minor"/>
+        </p:style>
+        <p:txBody>
+          <a:bodyPr lIns="90000" tIns="45000" rIns="90000" bIns="45000">
+            <a:spAutoFit/>
+          </a:bodyPr>
+          <a:lstStyle/>
+          <a:p>
+            <a:pPr marL="0" marR="0" lvl="0" indent="0" algn="ctr" defTabSz="914400" rtl="0" eaLnBrk="1" fontAlgn="auto" latinLnBrk="0" hangingPunct="1">
+              <a:lnSpc>
+                <a:spcPct val="100000"/>
+              </a:lnSpc>
+              <a:spcBef>
+                <a:spcPts val="0"/>
+              </a:spcBef>
+              <a:spcAft>
+                <a:spcPts val="0"/>
+              </a:spcAft>
+              <a:buClrTx/>
+              <a:buSzTx/>
+              <a:buFontTx/>
+              <a:buNone/>
+              <a:tabLst/>
+              <a:defRPr/>
+            </a:pPr>
+            <a:fld id="{70B94368-CDBA-4974-8450-BDAC626738DB}" type="slidenum">
+              <a:rPr kumimoji="0" lang="ru-RU" sz="1800" b="0" i="0" u="none" strike="noStrike" kern="1200" cap="none" spc="-1" normalizeH="0" baseline="0" noProof="0">
+                <a:ln>
+                  <a:noFill/>
+                </a:ln>
+                <a:solidFill>
+                  <a:srgbClr val="FFFFFF"/>
+                </a:solidFill>
+                <a:effectLst/>
+                <a:uLnTx/>
+                <a:uFillTx/>
+                <a:latin typeface="Elektra Medium Pro"/>
+                <a:ea typeface="DejaVu Sans"/>
+                <a:cs typeface="DejaVu Sans"/>
+              </a:rPr>
+              <a:pPr marL="0" marR="0" lvl="0" indent="0" algn="ctr" defTabSz="914400" rtl="0" eaLnBrk="1" fontAlgn="auto" latinLnBrk="0" hangingPunct="1">
+                <a:lnSpc>
+                  <a:spcPct val="100000"/>
+                </a:lnSpc>
+                <a:spcBef>
+                  <a:spcPts val="0"/>
+                </a:spcBef>
+                <a:spcAft>
+                  <a:spcPts val="0"/>
+                </a:spcAft>
+                <a:buClrTx/>
+                <a:buSzTx/>
+                <a:buFontTx/>
+                <a:buNone/>
+                <a:tabLst/>
+                <a:defRPr/>
+              </a:pPr>
+              <a:t>21</a:t>
+            </a:fld>
+            <a:endParaRPr kumimoji="0" lang="ru-RU" sz="1800" b="0" i="0" u="none" strike="noStrike" kern="1200" cap="none" spc="-1" normalizeH="0" baseline="0" noProof="0">
+              <a:ln>
+                <a:noFill/>
+              </a:ln>
+              <a:solidFill>
+                <a:prstClr val="black"/>
+              </a:solidFill>
+              <a:effectLst/>
+              <a:uLnTx/>
+              <a:uFillTx/>
+              <a:latin typeface="Arial"/>
+              <a:ea typeface="DejaVu Sans"/>
+              <a:cs typeface="DejaVu Sans"/>
+            </a:endParaRPr>
+          </a:p>
+        </p:txBody>
+      </p:sp>
+      <p:sp>
+        <p:nvSpPr>
+          <p:cNvPr id="108" name="CustomShape 3"/>
+          <p:cNvSpPr/>
+          <p:nvPr/>
+        </p:nvSpPr>
+        <p:spPr>
+          <a:xfrm>
+            <a:off x="6539400" y="1914480"/>
+            <a:ext cx="4904280" cy="1187640"/>
+          </a:xfrm>
+          <a:prstGeom prst="rect">
+            <a:avLst/>
+          </a:prstGeom>
+          <a:noFill/>
+          <a:ln>
+            <a:noFill/>
+          </a:ln>
+        </p:spPr>
+        <p:style>
+          <a:lnRef idx="0">
+            <a:scrgbClr r="0" g="0" b="0"/>
+          </a:lnRef>
+          <a:fillRef idx="0">
+            <a:scrgbClr r="0" g="0" b="0"/>
+          </a:fillRef>
+          <a:effectRef idx="0">
+            <a:scrgbClr r="0" g="0" b="0"/>
+          </a:effectRef>
+          <a:fontRef idx="minor"/>
+        </p:style>
+        <p:txBody>
+          <a:bodyPr lIns="90000" tIns="45000" rIns="90000" bIns="45000">
+            <a:spAutoFit/>
+          </a:bodyPr>
+          <a:lstStyle/>
+          <a:p>
+            <a:pPr marL="0" marR="0" lvl="0" indent="0" algn="l" defTabSz="914400" rtl="0" eaLnBrk="1" fontAlgn="auto" latinLnBrk="0" hangingPunct="1">
+              <a:lnSpc>
+                <a:spcPct val="100000"/>
+              </a:lnSpc>
+              <a:spcBef>
+                <a:spcPts val="0"/>
+              </a:spcBef>
+              <a:spcAft>
+                <a:spcPts val="0"/>
+              </a:spcAft>
+              <a:buClrTx/>
+              <a:buSzTx/>
+              <a:buFontTx/>
+              <a:buNone/>
+              <a:tabLst/>
+              <a:defRPr/>
+            </a:pPr>
+            <a:endParaRPr kumimoji="0" lang="ru-RU" sz="1800" b="0" i="0" u="none" strike="noStrike" kern="1200" cap="none" spc="-1" normalizeH="0" baseline="0" noProof="0">
+              <a:ln>
+                <a:noFill/>
+              </a:ln>
+              <a:solidFill>
+                <a:prstClr val="black"/>
+              </a:solidFill>
+              <a:effectLst/>
+              <a:uLnTx/>
+              <a:uFillTx/>
+              <a:latin typeface="Arial"/>
+              <a:ea typeface="DejaVu Sans"/>
+              <a:cs typeface="DejaVu Sans"/>
+            </a:endParaRPr>
+          </a:p>
+          <a:p>
+            <a:pPr marL="0" marR="0" lvl="0" indent="0" algn="l" defTabSz="914400" rtl="0" eaLnBrk="1" fontAlgn="auto" latinLnBrk="0" hangingPunct="1">
+              <a:lnSpc>
+                <a:spcPct val="100000"/>
+              </a:lnSpc>
+              <a:spcBef>
+                <a:spcPts val="0"/>
+              </a:spcBef>
+              <a:spcAft>
+                <a:spcPts val="0"/>
+              </a:spcAft>
+              <a:buClrTx/>
+              <a:buSzTx/>
+              <a:buFontTx/>
+              <a:buNone/>
+              <a:tabLst/>
+              <a:defRPr/>
+            </a:pPr>
+            <a:endParaRPr kumimoji="0" lang="ru-RU" sz="1800" b="0" i="0" u="none" strike="noStrike" kern="1200" cap="none" spc="-1" normalizeH="0" baseline="0" noProof="0">
+              <a:ln>
+                <a:noFill/>
+              </a:ln>
+              <a:solidFill>
+                <a:prstClr val="black"/>
+              </a:solidFill>
+              <a:effectLst/>
+              <a:uLnTx/>
+              <a:uFillTx/>
+              <a:latin typeface="Arial"/>
+              <a:ea typeface="DejaVu Sans"/>
+              <a:cs typeface="DejaVu Sans"/>
+            </a:endParaRPr>
+          </a:p>
+          <a:p>
+            <a:pPr marL="0" marR="0" lvl="0" indent="0" algn="l" defTabSz="914400" rtl="0" eaLnBrk="1" fontAlgn="auto" latinLnBrk="0" hangingPunct="1">
+              <a:lnSpc>
+                <a:spcPct val="100000"/>
+              </a:lnSpc>
+              <a:spcBef>
+                <a:spcPts val="0"/>
+              </a:spcBef>
+              <a:spcAft>
+                <a:spcPts val="0"/>
+              </a:spcAft>
+              <a:buClrTx/>
+              <a:buSzTx/>
+              <a:buFontTx/>
+              <a:buNone/>
+              <a:tabLst/>
+              <a:defRPr/>
+            </a:pPr>
+            <a:endParaRPr kumimoji="0" lang="ru-RU" sz="1800" b="0" i="0" u="none" strike="noStrike" kern="1200" cap="none" spc="-1" normalizeH="0" baseline="0" noProof="0">
+              <a:ln>
+                <a:noFill/>
+              </a:ln>
+              <a:solidFill>
+                <a:prstClr val="black"/>
+              </a:solidFill>
+              <a:effectLst/>
+              <a:uLnTx/>
+              <a:uFillTx/>
+              <a:latin typeface="Arial"/>
+              <a:ea typeface="DejaVu Sans"/>
+              <a:cs typeface="DejaVu Sans"/>
+            </a:endParaRPr>
+          </a:p>
+          <a:p>
+            <a:pPr marL="0" marR="0" lvl="0" indent="0" algn="l" defTabSz="914400" rtl="0" eaLnBrk="1" fontAlgn="auto" latinLnBrk="0" hangingPunct="1">
+              <a:lnSpc>
+                <a:spcPct val="100000"/>
+              </a:lnSpc>
+              <a:spcBef>
+                <a:spcPts val="0"/>
+              </a:spcBef>
+              <a:spcAft>
+                <a:spcPts val="0"/>
+              </a:spcAft>
+              <a:buClrTx/>
+              <a:buSzTx/>
+              <a:buFontTx/>
+              <a:buNone/>
+              <a:tabLst/>
+              <a:defRPr/>
+            </a:pPr>
+            <a:endParaRPr kumimoji="0" lang="ru-RU" sz="1800" b="0" i="0" u="none" strike="noStrike" kern="1200" cap="none" spc="-1" normalizeH="0" baseline="0" noProof="0">
+              <a:ln>
+                <a:noFill/>
+              </a:ln>
+              <a:solidFill>
+                <a:prstClr val="black"/>
+              </a:solidFill>
+              <a:effectLst/>
+              <a:uLnTx/>
+              <a:uFillTx/>
+              <a:latin typeface="Arial"/>
+              <a:ea typeface="DejaVu Sans"/>
+              <a:cs typeface="DejaVu Sans"/>
+            </a:endParaRPr>
+          </a:p>
+        </p:txBody>
+      </p:sp>
+      <p:sp>
+        <p:nvSpPr>
+          <p:cNvPr id="109" name="CustomShape 4"/>
+          <p:cNvSpPr/>
+          <p:nvPr/>
+        </p:nvSpPr>
+        <p:spPr>
+          <a:xfrm>
+            <a:off x="577970" y="1115897"/>
+            <a:ext cx="11057923" cy="2540909"/>
+          </a:xfrm>
+          <a:prstGeom prst="rect">
+            <a:avLst/>
+          </a:prstGeom>
+          <a:noFill/>
+          <a:ln>
+            <a:noFill/>
+          </a:ln>
+        </p:spPr>
+        <p:style>
+          <a:lnRef idx="0">
+            <a:scrgbClr r="0" g="0" b="0"/>
+          </a:lnRef>
+          <a:fillRef idx="0">
+            <a:scrgbClr r="0" g="0" b="0"/>
+          </a:fillRef>
+          <a:effectRef idx="0">
+            <a:scrgbClr r="0" g="0" b="0"/>
+          </a:effectRef>
+          <a:fontRef idx="minor"/>
+        </p:style>
+        <p:txBody>
+          <a:bodyPr wrap="square" lIns="90000" tIns="45000" rIns="90000" bIns="45000">
+            <a:spAutoFit/>
+          </a:bodyPr>
+          <a:lstStyle/>
+          <a:p>
+            <a:pPr>
+              <a:lnSpc>
+                <a:spcPct val="150000"/>
+              </a:lnSpc>
+              <a:defRPr/>
+            </a:pPr>
+            <a:r>
+              <a:rPr lang="ru-RU" sz="1800" dirty="0">
+                <a:solidFill>
+                  <a:srgbClr val="000000"/>
+                </a:solidFill>
+                <a:effectLst/>
+                <a:latin typeface="Calibri" panose="020F0502020204030204" pitchFamily="34" charset="0"/>
+                <a:ea typeface="Times New Roman" panose="02020603050405020304" pitchFamily="18" charset="0"/>
+                <a:cs typeface="Calibri" panose="020F0502020204030204" pitchFamily="34" charset="0"/>
+              </a:rPr>
+              <a:t>В ходе выполнения курсовой работы спроектирована и реализована информационная система «Авторемонтная мастерская», позволяющая клиенту осуществлять просмотр каталога с услугами, оформлять заявку на обслуживание в авторемонтную мастерскую, а также отслеживать свои заказы с помощью личного кабинета.</a:t>
+            </a:r>
+            <a:endParaRPr lang="ru-RU" sz="1800" dirty="0">
+              <a:effectLst/>
+              <a:latin typeface="Calibri" panose="020F0502020204030204" pitchFamily="34" charset="0"/>
+              <a:ea typeface="Times New Roman" panose="02020603050405020304" pitchFamily="18" charset="0"/>
+              <a:cs typeface="Calibri" panose="020F0502020204030204" pitchFamily="34" charset="0"/>
+            </a:endParaRPr>
+          </a:p>
+          <a:p>
+            <a:pPr marL="0" marR="0" lvl="0" indent="0" algn="l" defTabSz="914400" rtl="0" eaLnBrk="1" fontAlgn="auto" latinLnBrk="0" hangingPunct="1">
+              <a:lnSpc>
+                <a:spcPct val="150000"/>
+              </a:lnSpc>
+              <a:spcBef>
+                <a:spcPts val="0"/>
+              </a:spcBef>
+              <a:spcAft>
+                <a:spcPts val="0"/>
+              </a:spcAft>
+              <a:buClrTx/>
+              <a:buSzTx/>
+              <a:buFontTx/>
+              <a:buNone/>
+              <a:tabLst/>
+              <a:defRPr/>
+            </a:pPr>
+            <a:r>
+              <a:rPr lang="ru-RU" dirty="0">
+                <a:solidFill>
+                  <a:prstClr val="black"/>
+                </a:solidFill>
+                <a:latin typeface="Calibri" panose="020F0502020204030204" pitchFamily="34" charset="0"/>
+                <a:ea typeface="DejaVu Sans"/>
+                <a:cs typeface="Calibri" panose="020F0502020204030204" pitchFamily="34" charset="0"/>
+              </a:rPr>
+              <a:t>Мастер-приёмщик и администратор также имеют свой собственный функционал, позволяющий эффективно работать с клиентами, заявками и заказ-нарядами.</a:t>
+            </a:r>
+            <a:endParaRPr kumimoji="0" lang="ru-RU" sz="1800" b="0" i="0" u="none" strike="noStrike" kern="1200" cap="none" spc="0" normalizeH="0" baseline="0" noProof="0" dirty="0">
+              <a:ln>
+                <a:noFill/>
+              </a:ln>
+              <a:solidFill>
+                <a:prstClr val="black"/>
+              </a:solidFill>
+              <a:effectLst/>
+              <a:uLnTx/>
+              <a:uFillTx/>
+              <a:latin typeface="Calibri" panose="020F0502020204030204" pitchFamily="34" charset="0"/>
+              <a:ea typeface="DejaVu Sans"/>
+              <a:cs typeface="Calibri" panose="020F0502020204030204" pitchFamily="34" charset="0"/>
+            </a:endParaRPr>
+          </a:p>
+        </p:txBody>
+      </p:sp>
+    </p:spTree>
+    <p:extLst>
+      <p:ext uri="{BB962C8B-B14F-4D97-AF65-F5344CB8AC3E}">
+        <p14:creationId xmlns:p14="http://schemas.microsoft.com/office/powerpoint/2010/main" val="1902208218"/>
+      </p:ext>
+    </p:extLst>
+  </p:cSld>
+  <p:clrMapOvr>
+    <a:masterClrMapping/>
+  </p:clrMapOvr>
+</p:sld>
+</file>
+
+<file path=ppt/slides/slide22.xml><?xml version="1.0" encoding="utf-8"?>
+<p:sld xmlns:a="http://schemas.openxmlformats.org/drawingml/2006/main" xmlns:r="http://schemas.openxmlformats.org/officeDocument/2006/relationships" xmlns:p="http://schemas.openxmlformats.org/presentationml/2006/main">
+  <p:cSld>
+    <p:bg>
+      <p:bgPr>
+        <a:solidFill>
+          <a:srgbClr val="FFFFFF"/>
+        </a:solidFill>
+        <a:effectLst/>
+      </p:bgPr>
+    </p:bg>
+    <p:spTree>
+      <p:nvGrpSpPr>
+        <p:cNvPr id="1" name=""/>
+        <p:cNvGrpSpPr/>
+        <p:nvPr/>
+      </p:nvGrpSpPr>
+      <p:grpSpPr>
+        <a:xfrm>
+          <a:off x="0" y="0"/>
+          <a:ext cx="0" cy="0"/>
+          <a:chOff x="0" y="0"/>
+          <a:chExt cx="0" cy="0"/>
+        </a:xfrm>
+      </p:grpSpPr>
+      <p:pic>
+        <p:nvPicPr>
+          <p:cNvPr id="129" name="Рисунок 2"/>
+          <p:cNvPicPr/>
+          <p:nvPr/>
+        </p:nvPicPr>
+        <p:blipFill>
+          <a:blip r:embed="rId2"/>
+          <a:stretch/>
+        </p:blipFill>
+        <p:spPr>
+          <a:xfrm>
+            <a:off x="0" y="1800"/>
+            <a:ext cx="12191760" cy="6854040"/>
+          </a:xfrm>
+          <a:prstGeom prst="rect">
+            <a:avLst/>
+          </a:prstGeom>
+          <a:ln>
+            <a:noFill/>
+          </a:ln>
+        </p:spPr>
+      </p:pic>
+      <p:sp>
+        <p:nvSpPr>
+          <p:cNvPr id="130" name="CustomShape 1"/>
+          <p:cNvSpPr/>
+          <p:nvPr/>
+        </p:nvSpPr>
+        <p:spPr>
+          <a:xfrm>
+            <a:off x="6627600" y="2721708"/>
+            <a:ext cx="3831480" cy="822240"/>
+          </a:xfrm>
+          <a:prstGeom prst="rect">
+            <a:avLst/>
+          </a:prstGeom>
+          <a:noFill/>
+          <a:ln>
+            <a:noFill/>
+          </a:ln>
+        </p:spPr>
+        <p:style>
+          <a:lnRef idx="0">
+            <a:scrgbClr r="0" g="0" b="0"/>
+          </a:lnRef>
+          <a:fillRef idx="0">
+            <a:scrgbClr r="0" g="0" b="0"/>
+          </a:fillRef>
+          <a:effectRef idx="0">
+            <a:scrgbClr r="0" g="0" b="0"/>
+          </a:effectRef>
+          <a:fontRef idx="minor"/>
+        </p:style>
+        <p:txBody>
+          <a:bodyPr lIns="90000" tIns="45000" rIns="90000" bIns="45000" anchor="ctr" anchorCtr="1">
+            <a:spAutoFit/>
+          </a:bodyPr>
+          <a:lstStyle/>
+          <a:p>
+            <a:pPr algn="ctr">
+              <a:lnSpc>
+                <a:spcPct val="100000"/>
+              </a:lnSpc>
+            </a:pPr>
+            <a:r>
+              <a:rPr lang="ru-RU" sz="2400" b="1" strike="noStrike" spc="-1" dirty="0">
+                <a:solidFill>
+                  <a:srgbClr val="FFFFFF"/>
+                </a:solidFill>
+                <a:latin typeface="Calibri" panose="020F0502020204030204" pitchFamily="34" charset="0"/>
+                <a:cs typeface="Calibri" panose="020F0502020204030204" pitchFamily="34" charset="0"/>
+              </a:rPr>
+              <a:t>БЛАГОДАРЮ </a:t>
+            </a:r>
+            <a:endParaRPr lang="ru-RU" sz="2400" b="0" strike="noStrike" spc="-1" dirty="0">
+              <a:latin typeface="Calibri" panose="020F0502020204030204" pitchFamily="34" charset="0"/>
+              <a:cs typeface="Calibri" panose="020F0502020204030204" pitchFamily="34" charset="0"/>
+            </a:endParaRPr>
+          </a:p>
+          <a:p>
+            <a:pPr algn="ctr">
+              <a:lnSpc>
+                <a:spcPct val="100000"/>
+              </a:lnSpc>
+            </a:pPr>
+            <a:r>
+              <a:rPr lang="ru-RU" sz="2400" b="1" strike="noStrike" spc="-1" dirty="0">
+                <a:solidFill>
+                  <a:srgbClr val="FFFFFF"/>
+                </a:solidFill>
+                <a:latin typeface="Calibri" panose="020F0502020204030204" pitchFamily="34" charset="0"/>
+                <a:cs typeface="Calibri" panose="020F0502020204030204" pitchFamily="34" charset="0"/>
+              </a:rPr>
+              <a:t>ЗА ВНИМАНИЕ</a:t>
+            </a:r>
+            <a:r>
+              <a:rPr lang="en-US" sz="2400" b="1" strike="noStrike" spc="-1" dirty="0">
+                <a:solidFill>
+                  <a:srgbClr val="FFFFFF"/>
+                </a:solidFill>
+                <a:latin typeface="Calibri" panose="020F0502020204030204" pitchFamily="34" charset="0"/>
+                <a:cs typeface="Calibri" panose="020F0502020204030204" pitchFamily="34" charset="0"/>
+              </a:rPr>
+              <a:t>!</a:t>
+            </a:r>
+            <a:endParaRPr lang="ru-RU" sz="2400" b="0" strike="noStrike" spc="-1" dirty="0">
+              <a:latin typeface="Calibri" panose="020F0502020204030204" pitchFamily="34" charset="0"/>
+              <a:cs typeface="Calibri" panose="020F0502020204030204" pitchFamily="34" charset="0"/>
             </a:endParaRPr>
           </a:p>
         </p:txBody>
@@ -4537,7 +6769,7 @@
               </a:lnSpc>
             </a:pPr>
             <a:r>
-              <a:rPr lang="ru-RU" sz="1800" b="1" strike="noStrike" spc="-1" dirty="0">
+              <a:rPr lang="ru-RU" sz="1800" strike="noStrike" spc="-1" dirty="0">
                 <a:solidFill>
                   <a:srgbClr val="FFFFFF"/>
                 </a:solidFill>
@@ -4546,7 +6778,7 @@
               </a:rPr>
               <a:t>Цель и задачи курсовой работы</a:t>
             </a:r>
-            <a:endParaRPr lang="ru-RU" sz="1800" b="0" strike="noStrike" spc="-1" dirty="0">
+            <a:endParaRPr lang="ru-RU" sz="1800" strike="noStrike" spc="-1" dirty="0">
               <a:latin typeface="Calibri" panose="020F0502020204030204" pitchFamily="34" charset="0"/>
               <a:cs typeface="Calibri" panose="020F0502020204030204" pitchFamily="34" charset="0"/>
             </a:endParaRPr>
@@ -4956,7 +7188,7 @@
               </a:lnSpc>
             </a:pPr>
             <a:r>
-              <a:rPr lang="ru-RU" sz="1800" b="1" strike="noStrike" spc="-1" dirty="0">
+              <a:rPr lang="ru-RU" sz="1800" strike="noStrike" spc="-1" dirty="0">
                 <a:solidFill>
                   <a:srgbClr val="FFFFFF"/>
                 </a:solidFill>
@@ -4965,7 +7197,7 @@
               </a:rPr>
               <a:t>Обзор аналогов</a:t>
             </a:r>
-            <a:endParaRPr lang="ru-RU" sz="1800" b="0" strike="noStrike" spc="-1" dirty="0">
+            <a:endParaRPr lang="ru-RU" sz="1800" strike="noStrike" spc="-1" dirty="0">
               <a:latin typeface="Calibri" panose="020F0502020204030204" pitchFamily="34" charset="0"/>
               <a:cs typeface="Calibri" panose="020F0502020204030204" pitchFamily="34" charset="0"/>
             </a:endParaRPr>
@@ -5260,7 +7492,7 @@
               </a:lnSpc>
             </a:pPr>
             <a:r>
-              <a:rPr lang="ru-RU" sz="1800" b="1" strike="noStrike" spc="-1" dirty="0">
+              <a:rPr lang="ru-RU" sz="1800" strike="noStrike" spc="-1" dirty="0">
                 <a:solidFill>
                   <a:srgbClr val="FFFFFF"/>
                 </a:solidFill>
@@ -5269,7 +7501,7 @@
               </a:rPr>
               <a:t>Обзор аналогов</a:t>
             </a:r>
-            <a:endParaRPr lang="ru-RU" sz="1800" b="0" strike="noStrike" spc="-1" dirty="0">
+            <a:endParaRPr lang="ru-RU" sz="1800" strike="noStrike" spc="-1" dirty="0">
               <a:latin typeface="Calibri" panose="020F0502020204030204" pitchFamily="34" charset="0"/>
               <a:cs typeface="Calibri" panose="020F0502020204030204" pitchFamily="34" charset="0"/>
             </a:endParaRPr>
@@ -5553,7 +7785,7 @@
               </a:lnSpc>
             </a:pPr>
             <a:r>
-              <a:rPr lang="ru-RU" sz="1800" b="1" strike="noStrike" spc="-1" dirty="0">
+              <a:rPr lang="ru-RU" sz="1800" strike="noStrike" spc="-1" dirty="0">
                 <a:solidFill>
                   <a:srgbClr val="FFFFFF"/>
                 </a:solidFill>
@@ -5562,7 +7794,7 @@
               </a:rPr>
               <a:t>Функциональные требования</a:t>
             </a:r>
-            <a:endParaRPr lang="ru-RU" sz="1800" b="0" strike="noStrike" spc="-1" dirty="0">
+            <a:endParaRPr lang="ru-RU" sz="1800" strike="noStrike" spc="-1" dirty="0">
               <a:latin typeface="Calibri" panose="020F0502020204030204" pitchFamily="34" charset="0"/>
               <a:cs typeface="Calibri" panose="020F0502020204030204" pitchFamily="34" charset="0"/>
             </a:endParaRPr>
@@ -5635,7 +7867,7 @@
         <p:spPr>
           <a:xfrm>
             <a:off x="553299" y="733366"/>
-            <a:ext cx="11085401" cy="18745345"/>
+            <a:ext cx="11085401" cy="5353858"/>
           </a:xfrm>
           <a:prstGeom prst="rect">
             <a:avLst/>
@@ -5663,11 +7895,6 @@
           </a:bodyPr>
           <a:lstStyle/>
           <a:p>
-            <a:pPr>
-              <a:lnSpc>
-                <a:spcPct val="150000"/>
-              </a:lnSpc>
-            </a:pPr>
             <a:r>
               <a:rPr lang="ru-RU" sz="1800" kern="1200" dirty="0">
                 <a:solidFill>
@@ -5682,11 +7909,6 @@
             </a:r>
           </a:p>
           <a:p>
-            <a:pPr>
-              <a:lnSpc>
-                <a:spcPct val="150000"/>
-              </a:lnSpc>
-            </a:pPr>
             <a:r>
               <a:rPr lang="ru-RU" sz="1800" kern="1200" dirty="0">
                 <a:solidFill>
@@ -5701,11 +7923,6 @@
             </a:r>
           </a:p>
           <a:p>
-            <a:pPr>
-              <a:lnSpc>
-                <a:spcPct val="150000"/>
-              </a:lnSpc>
-            </a:pPr>
             <a:r>
               <a:rPr lang="ru-RU" sz="1800" kern="1200" dirty="0">
                 <a:solidFill>
@@ -5720,11 +7937,6 @@
             </a:r>
           </a:p>
           <a:p>
-            <a:pPr>
-              <a:lnSpc>
-                <a:spcPct val="150000"/>
-              </a:lnSpc>
-            </a:pPr>
             <a:r>
               <a:rPr lang="ru-RU" sz="1800" kern="1200" dirty="0">
                 <a:solidFill>
@@ -5748,11 +7960,6 @@
             </a:endParaRPr>
           </a:p>
           <a:p>
-            <a:pPr>
-              <a:lnSpc>
-                <a:spcPct val="150000"/>
-              </a:lnSpc>
-            </a:pPr>
             <a:r>
               <a:rPr lang="en-US" sz="1800" kern="1200" dirty="0">
                 <a:solidFill>
@@ -5779,11 +7986,6 @@
             </a:r>
           </a:p>
           <a:p>
-            <a:pPr>
-              <a:lnSpc>
-                <a:spcPct val="150000"/>
-              </a:lnSpc>
-            </a:pPr>
             <a:r>
               <a:rPr lang="en-US" sz="1800" kern="1200" dirty="0">
                 <a:solidFill>
@@ -5810,11 +8012,6 @@
             </a:r>
           </a:p>
           <a:p>
-            <a:pPr>
-              <a:lnSpc>
-                <a:spcPct val="150000"/>
-              </a:lnSpc>
-            </a:pPr>
             <a:r>
               <a:rPr lang="en-US" sz="1800" kern="1200" dirty="0">
                 <a:solidFill>
@@ -5841,11 +8038,6 @@
             </a:r>
           </a:p>
           <a:p>
-            <a:pPr>
-              <a:lnSpc>
-                <a:spcPct val="150000"/>
-              </a:lnSpc>
-            </a:pPr>
             <a:r>
               <a:rPr lang="en-US" sz="1800" kern="1200" dirty="0">
                 <a:solidFill>
@@ -5869,6 +8061,111 @@
                 <a:cs typeface="Calibri" panose="020F0502020204030204" pitchFamily="34" charset="0"/>
               </a:rPr>
               <a:t>.1.2) Запись в авторемонтную мастерскую </a:t>
+            </a:r>
+            <a:r>
+              <a:rPr lang="ru-RU" dirty="0">
+                <a:solidFill>
+                  <a:srgbClr val="000000"/>
+                </a:solidFill>
+                <a:latin typeface="Calibri" panose="020F0502020204030204" pitchFamily="34" charset="0"/>
+                <a:ea typeface="DejaVu Sans" panose="020B0603030804020204" pitchFamily="34" charset="0"/>
+                <a:cs typeface="Calibri" panose="020F0502020204030204" pitchFamily="34" charset="0"/>
+              </a:rPr>
+              <a:t>по звонку или по заявке</a:t>
+            </a:r>
+            <a:r>
+              <a:rPr lang="en-US" dirty="0">
+                <a:solidFill>
+                  <a:srgbClr val="000000"/>
+                </a:solidFill>
+                <a:latin typeface="Calibri" panose="020F0502020204030204" pitchFamily="34" charset="0"/>
+                <a:ea typeface="DejaVu Sans" panose="020B0603030804020204" pitchFamily="34" charset="0"/>
+                <a:cs typeface="Calibri" panose="020F0502020204030204" pitchFamily="34" charset="0"/>
+              </a:rPr>
+              <a:t>;</a:t>
+            </a:r>
+            <a:endParaRPr lang="ru-RU" dirty="0">
+              <a:solidFill>
+                <a:srgbClr val="000000"/>
+              </a:solidFill>
+              <a:latin typeface="Calibri" panose="020F0502020204030204" pitchFamily="34" charset="0"/>
+              <a:ea typeface="DejaVu Sans" panose="020B0603030804020204" pitchFamily="34" charset="0"/>
+              <a:cs typeface="Calibri" panose="020F0502020204030204" pitchFamily="34" charset="0"/>
+            </a:endParaRPr>
+          </a:p>
+          <a:p>
+            <a:r>
+              <a:rPr lang="en-US" dirty="0">
+                <a:solidFill>
+                  <a:srgbClr val="000000"/>
+                </a:solidFill>
+                <a:latin typeface="Calibri" panose="020F0502020204030204" pitchFamily="34" charset="0"/>
+                <a:ea typeface="DejaVu Sans" panose="020B0603030804020204" pitchFamily="34" charset="0"/>
+                <a:cs typeface="Calibri" panose="020F0502020204030204" pitchFamily="34" charset="0"/>
+              </a:rPr>
+              <a:t>4</a:t>
+            </a:r>
+            <a:r>
+              <a:rPr lang="ru-RU" sz="1800" kern="1200" dirty="0">
+                <a:solidFill>
+                  <a:srgbClr val="000000"/>
+                </a:solidFill>
+                <a:effectLst/>
+                <a:latin typeface="Calibri" panose="020F0502020204030204" pitchFamily="34" charset="0"/>
+                <a:ea typeface="DejaVu Sans" panose="020B0603030804020204" pitchFamily="34" charset="0"/>
+                <a:cs typeface="Calibri" panose="020F0502020204030204" pitchFamily="34" charset="0"/>
+              </a:rPr>
+              <a:t>.2) Предоставление следующего функционала зарегистрированному пользователю:</a:t>
+            </a:r>
+          </a:p>
+          <a:p>
+            <a:r>
+              <a:rPr lang="en-US" dirty="0">
+                <a:solidFill>
+                  <a:srgbClr val="000000"/>
+                </a:solidFill>
+                <a:latin typeface="Calibri" panose="020F0502020204030204" pitchFamily="34" charset="0"/>
+                <a:ea typeface="DejaVu Sans" panose="020B0603030804020204" pitchFamily="34" charset="0"/>
+                <a:cs typeface="Calibri" panose="020F0502020204030204" pitchFamily="34" charset="0"/>
+              </a:rPr>
+              <a:t>4</a:t>
+            </a:r>
+            <a:r>
+              <a:rPr lang="ru-RU" sz="1800" kern="1200" dirty="0">
+                <a:solidFill>
+                  <a:srgbClr val="000000"/>
+                </a:solidFill>
+                <a:effectLst/>
+                <a:latin typeface="Calibri" panose="020F0502020204030204" pitchFamily="34" charset="0"/>
+                <a:ea typeface="DejaVu Sans" panose="020B0603030804020204" pitchFamily="34" charset="0"/>
+                <a:cs typeface="Calibri" panose="020F0502020204030204" pitchFamily="34" charset="0"/>
+              </a:rPr>
+              <a:t>.2.1) Просмотр информации об оказываемых услугах и контактах авторемонтных мастерских;</a:t>
+            </a:r>
+          </a:p>
+          <a:p>
+            <a:r>
+              <a:rPr lang="en-US" dirty="0">
+                <a:solidFill>
+                  <a:srgbClr val="000000"/>
+                </a:solidFill>
+                <a:latin typeface="Calibri" panose="020F0502020204030204" pitchFamily="34" charset="0"/>
+                <a:ea typeface="DejaVu Sans" panose="020B0603030804020204" pitchFamily="34" charset="0"/>
+                <a:cs typeface="Calibri" panose="020F0502020204030204" pitchFamily="34" charset="0"/>
+              </a:rPr>
+              <a:t>4</a:t>
+            </a:r>
+            <a:r>
+              <a:rPr lang="ru-RU" sz="1800" kern="1200" dirty="0">
+                <a:solidFill>
+                  <a:srgbClr val="000000"/>
+                </a:solidFill>
+                <a:effectLst/>
+                <a:latin typeface="Calibri" panose="020F0502020204030204" pitchFamily="34" charset="0"/>
+                <a:ea typeface="DejaVu Sans" panose="020B0603030804020204" pitchFamily="34" charset="0"/>
+                <a:cs typeface="Calibri" panose="020F0502020204030204" pitchFamily="34" charset="0"/>
+              </a:rPr>
+              <a:t>.2.2) Запись в авторемонтную мастерскую </a:t>
             </a:r>
             <a:r>
               <a:rPr lang="ru-RU" dirty="0">
@@ -5903,22 +8200,20 @@
             </a:endParaRPr>
           </a:p>
           <a:p>
-            <a:pPr>
-              <a:lnSpc>
-                <a:spcPct val="150000"/>
-              </a:lnSpc>
-            </a:pPr>
-            <a:r>
-              <a:rPr lang="en-US" dirty="0">
+            <a:r>
+              <a:rPr lang="ru-RU" sz="1800" kern="1200" dirty="0">
                 <a:solidFill>
                   <a:srgbClr val="000000"/>
                 </a:solidFill>
+                <a:effectLst/>
                 <a:latin typeface="Calibri" panose="020F0502020204030204" pitchFamily="34" charset="0"/>
                 <a:ea typeface="DejaVu Sans" panose="020B0603030804020204" pitchFamily="34" charset="0"/>
                 <a:cs typeface="Calibri" panose="020F0502020204030204" pitchFamily="34" charset="0"/>
               </a:rPr>
-              <a:t>4</a:t>
-            </a:r>
+              <a:t>4.2.3) Возможность авторизации;</a:t>
+            </a:r>
+          </a:p>
+          <a:p>
             <a:r>
               <a:rPr lang="ru-RU" sz="1800" kern="1200" dirty="0">
                 <a:solidFill>
@@ -5929,90 +8224,10 @@
                 <a:ea typeface="DejaVu Sans" panose="020B0603030804020204" pitchFamily="34" charset="0"/>
                 <a:cs typeface="Calibri" panose="020F0502020204030204" pitchFamily="34" charset="0"/>
               </a:rPr>
-              <a:t>.2) Предоставление следующего функционала зарегистрированному пользователю:</a:t>
-            </a:r>
-          </a:p>
-          <a:p>
-            <a:pPr>
-              <a:lnSpc>
-                <a:spcPct val="150000"/>
-              </a:lnSpc>
-            </a:pPr>
-            <a:r>
-              <a:rPr lang="en-US" dirty="0">
-                <a:solidFill>
-                  <a:srgbClr val="000000"/>
-                </a:solidFill>
-                <a:latin typeface="Calibri" panose="020F0502020204030204" pitchFamily="34" charset="0"/>
-                <a:ea typeface="DejaVu Sans" panose="020B0603030804020204" pitchFamily="34" charset="0"/>
-                <a:cs typeface="Calibri" panose="020F0502020204030204" pitchFamily="34" charset="0"/>
-              </a:rPr>
-              <a:t>4</a:t>
-            </a:r>
-            <a:r>
-              <a:rPr lang="ru-RU" sz="1800" kern="1200" dirty="0">
-                <a:solidFill>
-                  <a:srgbClr val="000000"/>
-                </a:solidFill>
-                <a:effectLst/>
-                <a:latin typeface="Calibri" panose="020F0502020204030204" pitchFamily="34" charset="0"/>
-                <a:ea typeface="DejaVu Sans" panose="020B0603030804020204" pitchFamily="34" charset="0"/>
-                <a:cs typeface="Calibri" panose="020F0502020204030204" pitchFamily="34" charset="0"/>
-              </a:rPr>
-              <a:t>.2.1) Просмотр информации об оказываемых услугах и контактах авторемонтных мастерских;</a:t>
-            </a:r>
-          </a:p>
-          <a:p>
-            <a:pPr>
-              <a:lnSpc>
-                <a:spcPct val="150000"/>
-              </a:lnSpc>
-            </a:pPr>
-            <a:r>
-              <a:rPr lang="en-US" dirty="0">
-                <a:solidFill>
-                  <a:srgbClr val="000000"/>
-                </a:solidFill>
-                <a:latin typeface="Calibri" panose="020F0502020204030204" pitchFamily="34" charset="0"/>
-                <a:ea typeface="DejaVu Sans" panose="020B0603030804020204" pitchFamily="34" charset="0"/>
-                <a:cs typeface="Calibri" panose="020F0502020204030204" pitchFamily="34" charset="0"/>
-              </a:rPr>
-              <a:t>4</a:t>
-            </a:r>
-            <a:r>
-              <a:rPr lang="ru-RU" sz="1800" kern="1200" dirty="0">
-                <a:solidFill>
-                  <a:srgbClr val="000000"/>
-                </a:solidFill>
-                <a:effectLst/>
-                <a:latin typeface="Calibri" panose="020F0502020204030204" pitchFamily="34" charset="0"/>
-                <a:ea typeface="DejaVu Sans" panose="020B0603030804020204" pitchFamily="34" charset="0"/>
-                <a:cs typeface="Calibri" panose="020F0502020204030204" pitchFamily="34" charset="0"/>
-              </a:rPr>
-              <a:t>.2.2) Запись в авторемонтную мастерскую </a:t>
-            </a:r>
-            <a:r>
-              <a:rPr lang="ru-RU" dirty="0">
-                <a:solidFill>
-                  <a:srgbClr val="000000"/>
-                </a:solidFill>
-                <a:latin typeface="Calibri" panose="020F0502020204030204" pitchFamily="34" charset="0"/>
-                <a:ea typeface="DejaVu Sans" panose="020B0603030804020204" pitchFamily="34" charset="0"/>
-                <a:cs typeface="Calibri" panose="020F0502020204030204" pitchFamily="34" charset="0"/>
-              </a:rPr>
-              <a:t>по звонку или по заявке</a:t>
-            </a:r>
-            <a:r>
-              <a:rPr lang="en-US" dirty="0">
-                <a:solidFill>
-                  <a:srgbClr val="000000"/>
-                </a:solidFill>
-                <a:latin typeface="Calibri" panose="020F0502020204030204" pitchFamily="34" charset="0"/>
-                <a:ea typeface="DejaVu Sans" panose="020B0603030804020204" pitchFamily="34" charset="0"/>
-                <a:cs typeface="Calibri" panose="020F0502020204030204" pitchFamily="34" charset="0"/>
-              </a:rPr>
-              <a:t>;</a:t>
-            </a:r>
+              <a:t>4.2.4) Доступ к личному кабинету и отслеживание в нём статусов обслуживаемых автомобилей, а также просмотр прошлых обращений </a:t>
+            </a:r>
+          </a:p>
+          <a:p>
             <a:endParaRPr lang="ru-RU" sz="1800" kern="1200" dirty="0">
               <a:solidFill>
                 <a:srgbClr val="000000"/>
@@ -6024,555 +8239,7 @@
             </a:endParaRPr>
           </a:p>
           <a:p>
-            <a:pPr>
-              <a:lnSpc>
-                <a:spcPct val="150000"/>
-              </a:lnSpc>
-            </a:pPr>
-            <a:r>
-              <a:rPr lang="ru-RU" sz="1800" kern="1200" dirty="0">
-                <a:solidFill>
-                  <a:srgbClr val="000000"/>
-                </a:solidFill>
-                <a:effectLst/>
-                <a:latin typeface="Calibri" panose="020F0502020204030204" pitchFamily="34" charset="0"/>
-                <a:ea typeface="DejaVu Sans" panose="020B0603030804020204" pitchFamily="34" charset="0"/>
-                <a:cs typeface="Calibri" panose="020F0502020204030204" pitchFamily="34" charset="0"/>
-              </a:rPr>
-              <a:t>4.2.3) Возможность авторизации;</a:t>
-            </a:r>
-          </a:p>
-          <a:p>
-            <a:pPr>
-              <a:lnSpc>
-                <a:spcPct val="150000"/>
-              </a:lnSpc>
-            </a:pPr>
-            <a:r>
-              <a:rPr lang="ru-RU" sz="1800" kern="1200" dirty="0">
-                <a:solidFill>
-                  <a:srgbClr val="000000"/>
-                </a:solidFill>
-                <a:effectLst/>
-                <a:latin typeface="Calibri" panose="020F0502020204030204" pitchFamily="34" charset="0"/>
-                <a:ea typeface="DejaVu Sans" panose="020B0603030804020204" pitchFamily="34" charset="0"/>
-                <a:cs typeface="Calibri" panose="020F0502020204030204" pitchFamily="34" charset="0"/>
-              </a:rPr>
-              <a:t>4.2.4) Доступ к личному кабинету и отслеживание в нём статусов обслуживаемых автомобилей, а также просмотр прошлых обращений </a:t>
-            </a:r>
-          </a:p>
-          <a:p>
-            <a:pPr>
-              <a:lnSpc>
-                <a:spcPct val="150000"/>
-              </a:lnSpc>
-            </a:pPr>
-            <a:r>
-              <a:rPr lang="ru-RU" sz="1800" kern="1200" dirty="0">
-                <a:solidFill>
-                  <a:srgbClr val="000000"/>
-                </a:solidFill>
-                <a:effectLst/>
-                <a:latin typeface="Calibri" panose="020F0502020204030204" pitchFamily="34" charset="0"/>
-                <a:ea typeface="DejaVu Sans" panose="020B0603030804020204" pitchFamily="34" charset="0"/>
-                <a:cs typeface="Calibri" panose="020F0502020204030204" pitchFamily="34" charset="0"/>
-              </a:rPr>
-              <a:t>5.3) Предоставление следующего функционала администратору:</a:t>
-            </a:r>
-          </a:p>
-          <a:p>
-            <a:pPr>
-              <a:lnSpc>
-                <a:spcPct val="150000"/>
-              </a:lnSpc>
-            </a:pPr>
-            <a:r>
-              <a:rPr lang="ru-RU" sz="1800" kern="1200" dirty="0">
-                <a:solidFill>
-                  <a:srgbClr val="000000"/>
-                </a:solidFill>
-                <a:effectLst/>
-                <a:latin typeface="Calibri" panose="020F0502020204030204" pitchFamily="34" charset="0"/>
-                <a:ea typeface="DejaVu Sans" panose="020B0603030804020204" pitchFamily="34" charset="0"/>
-                <a:cs typeface="Calibri" panose="020F0502020204030204" pitchFamily="34" charset="0"/>
-              </a:rPr>
-              <a:t>5.3.1) Возможность авторизации;</a:t>
-            </a:r>
-          </a:p>
-          <a:p>
-            <a:pPr>
-              <a:lnSpc>
-                <a:spcPct val="150000"/>
-              </a:lnSpc>
-            </a:pPr>
-            <a:r>
-              <a:rPr lang="ru-RU" sz="1800" kern="1200" dirty="0">
-                <a:solidFill>
-                  <a:srgbClr val="000000"/>
-                </a:solidFill>
-                <a:effectLst/>
-                <a:latin typeface="Calibri" panose="020F0502020204030204" pitchFamily="34" charset="0"/>
-                <a:ea typeface="DejaVu Sans" panose="020B0603030804020204" pitchFamily="34" charset="0"/>
-                <a:cs typeface="Calibri" panose="020F0502020204030204" pitchFamily="34" charset="0"/>
-              </a:rPr>
-              <a:t>5.3.2) Доступ к личному кабинету;</a:t>
-            </a:r>
-          </a:p>
-          <a:p>
-            <a:pPr>
-              <a:lnSpc>
-                <a:spcPct val="150000"/>
-              </a:lnSpc>
-            </a:pPr>
-            <a:r>
-              <a:rPr lang="ru-RU" sz="1800" kern="1200" dirty="0">
-                <a:solidFill>
-                  <a:srgbClr val="000000"/>
-                </a:solidFill>
-                <a:effectLst/>
-                <a:latin typeface="Calibri" panose="020F0502020204030204" pitchFamily="34" charset="0"/>
-                <a:ea typeface="DejaVu Sans" panose="020B0603030804020204" pitchFamily="34" charset="0"/>
-                <a:cs typeface="Calibri" panose="020F0502020204030204" pitchFamily="34" charset="0"/>
-              </a:rPr>
-              <a:t>5.3.3) Создание и редактирование клиентов;</a:t>
-            </a:r>
-          </a:p>
-          <a:p>
-            <a:pPr>
-              <a:lnSpc>
-                <a:spcPct val="150000"/>
-              </a:lnSpc>
-            </a:pPr>
-            <a:r>
-              <a:rPr lang="ru-RU" sz="1800" kern="1200" dirty="0">
-                <a:solidFill>
-                  <a:srgbClr val="000000"/>
-                </a:solidFill>
-                <a:effectLst/>
-                <a:latin typeface="Calibri" panose="020F0502020204030204" pitchFamily="34" charset="0"/>
-                <a:ea typeface="DejaVu Sans" panose="020B0603030804020204" pitchFamily="34" charset="0"/>
-                <a:cs typeface="Calibri" panose="020F0502020204030204" pitchFamily="34" charset="0"/>
-              </a:rPr>
-              <a:t>5.3.4) Выдача доступа к аккаунту клиенту;</a:t>
-            </a:r>
-          </a:p>
-          <a:p>
-            <a:pPr>
-              <a:lnSpc>
-                <a:spcPct val="150000"/>
-              </a:lnSpc>
-            </a:pPr>
-            <a:r>
-              <a:rPr lang="ru-RU" sz="1800" kern="1200" dirty="0">
-                <a:solidFill>
-                  <a:srgbClr val="000000"/>
-                </a:solidFill>
-                <a:effectLst/>
-                <a:latin typeface="Calibri" panose="020F0502020204030204" pitchFamily="34" charset="0"/>
-                <a:ea typeface="DejaVu Sans" panose="020B0603030804020204" pitchFamily="34" charset="0"/>
-                <a:cs typeface="Calibri" panose="020F0502020204030204" pitchFamily="34" charset="0"/>
-              </a:rPr>
-              <a:t>5.3.5) Создание и редактирование автомобилей клиентов;</a:t>
-            </a:r>
-          </a:p>
-          <a:p>
-            <a:pPr>
-              <a:lnSpc>
-                <a:spcPct val="150000"/>
-              </a:lnSpc>
-            </a:pPr>
-            <a:r>
-              <a:rPr lang="ru-RU" sz="1800" kern="1200" dirty="0">
-                <a:solidFill>
-                  <a:srgbClr val="000000"/>
-                </a:solidFill>
-                <a:effectLst/>
-                <a:latin typeface="Calibri" panose="020F0502020204030204" pitchFamily="34" charset="0"/>
-                <a:ea typeface="DejaVu Sans" panose="020B0603030804020204" pitchFamily="34" charset="0"/>
-                <a:cs typeface="Calibri" panose="020F0502020204030204" pitchFamily="34" charset="0"/>
-              </a:rPr>
-              <a:t>5.3.6) Создание и редактирование заявок;</a:t>
-            </a:r>
-          </a:p>
-          <a:p>
-            <a:pPr>
-              <a:lnSpc>
-                <a:spcPct val="150000"/>
-              </a:lnSpc>
-            </a:pPr>
-            <a:r>
-              <a:rPr lang="ru-RU" sz="1800" kern="1200" dirty="0">
-                <a:solidFill>
-                  <a:srgbClr val="000000"/>
-                </a:solidFill>
-                <a:effectLst/>
-                <a:latin typeface="Calibri" panose="020F0502020204030204" pitchFamily="34" charset="0"/>
-                <a:ea typeface="DejaVu Sans" panose="020B0603030804020204" pitchFamily="34" charset="0"/>
-                <a:cs typeface="Calibri" panose="020F0502020204030204" pitchFamily="34" charset="0"/>
-              </a:rPr>
-              <a:t>5.4) Предоставление следующего функционала мастеру-приёмщику:</a:t>
-            </a:r>
-          </a:p>
-          <a:p>
-            <a:pPr>
-              <a:lnSpc>
-                <a:spcPct val="150000"/>
-              </a:lnSpc>
-            </a:pPr>
-            <a:r>
-              <a:rPr lang="ru-RU" sz="1800" kern="1200" dirty="0">
-                <a:solidFill>
-                  <a:srgbClr val="000000"/>
-                </a:solidFill>
-                <a:effectLst/>
-                <a:latin typeface="Calibri" panose="020F0502020204030204" pitchFamily="34" charset="0"/>
-                <a:ea typeface="DejaVu Sans" panose="020B0603030804020204" pitchFamily="34" charset="0"/>
-                <a:cs typeface="Calibri" panose="020F0502020204030204" pitchFamily="34" charset="0"/>
-              </a:rPr>
-              <a:t>5.4.1) Возможность авторизации;</a:t>
-            </a:r>
-          </a:p>
-          <a:p>
-            <a:pPr>
-              <a:lnSpc>
-                <a:spcPct val="150000"/>
-              </a:lnSpc>
-            </a:pPr>
-            <a:r>
-              <a:rPr lang="ru-RU" sz="1800" kern="1200" dirty="0">
-                <a:solidFill>
-                  <a:srgbClr val="000000"/>
-                </a:solidFill>
-                <a:effectLst/>
-                <a:latin typeface="Calibri" panose="020F0502020204030204" pitchFamily="34" charset="0"/>
-                <a:ea typeface="DejaVu Sans" panose="020B0603030804020204" pitchFamily="34" charset="0"/>
-                <a:cs typeface="Calibri" panose="020F0502020204030204" pitchFamily="34" charset="0"/>
-              </a:rPr>
-              <a:t>5.4.2) Доступ к личному кабинету;</a:t>
-            </a:r>
-          </a:p>
-          <a:p>
-            <a:pPr>
-              <a:lnSpc>
-                <a:spcPct val="150000"/>
-              </a:lnSpc>
-            </a:pPr>
-            <a:r>
-              <a:rPr lang="ru-RU" sz="1800" kern="1200" dirty="0">
-                <a:solidFill>
-                  <a:srgbClr val="000000"/>
-                </a:solidFill>
-                <a:effectLst/>
-                <a:latin typeface="Calibri" panose="020F0502020204030204" pitchFamily="34" charset="0"/>
-                <a:ea typeface="DejaVu Sans" panose="020B0603030804020204" pitchFamily="34" charset="0"/>
-                <a:cs typeface="Calibri" panose="020F0502020204030204" pitchFamily="34" charset="0"/>
-              </a:rPr>
-              <a:t>5.4.3) Создание и редактирование заказ-нарядов;</a:t>
-            </a:r>
-          </a:p>
-          <a:p>
-            <a:pPr>
-              <a:lnSpc>
-                <a:spcPct val="150000"/>
-              </a:lnSpc>
-            </a:pPr>
-            <a:r>
-              <a:rPr lang="ru-RU" sz="1800" kern="1200" dirty="0">
-                <a:solidFill>
-                  <a:srgbClr val="000000"/>
-                </a:solidFill>
-                <a:effectLst/>
-                <a:latin typeface="Calibri" panose="020F0502020204030204" pitchFamily="34" charset="0"/>
-                <a:ea typeface="DejaVu Sans" panose="020B0603030804020204" pitchFamily="34" charset="0"/>
-                <a:cs typeface="Calibri" panose="020F0502020204030204" pitchFamily="34" charset="0"/>
-              </a:rPr>
-              <a:t>5.4.4) Внесение новых поставщиков и редактирование старых;</a:t>
-            </a:r>
-          </a:p>
-          <a:p>
-            <a:pPr>
-              <a:lnSpc>
-                <a:spcPct val="150000"/>
-              </a:lnSpc>
-            </a:pPr>
-            <a:r>
-              <a:rPr lang="ru-RU" sz="1800" kern="1200" dirty="0">
-                <a:solidFill>
-                  <a:srgbClr val="000000"/>
-                </a:solidFill>
-                <a:effectLst/>
-                <a:latin typeface="Calibri" panose="020F0502020204030204" pitchFamily="34" charset="0"/>
-                <a:ea typeface="DejaVu Sans" panose="020B0603030804020204" pitchFamily="34" charset="0"/>
-                <a:cs typeface="Calibri" panose="020F0502020204030204" pitchFamily="34" charset="0"/>
-              </a:rPr>
-              <a:t>5.4.5) Внесение новых договоров на закупку комплектующих, а также изменение  и удаление старых;</a:t>
-            </a:r>
-          </a:p>
-          <a:p>
-            <a:pPr>
-              <a:lnSpc>
-                <a:spcPct val="150000"/>
-              </a:lnSpc>
-            </a:pPr>
-            <a:r>
-              <a:rPr lang="ru-RU" sz="1800" kern="1200" dirty="0">
-                <a:solidFill>
-                  <a:srgbClr val="000000"/>
-                </a:solidFill>
-                <a:effectLst/>
-                <a:latin typeface="Calibri" panose="020F0502020204030204" pitchFamily="34" charset="0"/>
-                <a:ea typeface="DejaVu Sans" panose="020B0603030804020204" pitchFamily="34" charset="0"/>
-                <a:cs typeface="Calibri" panose="020F0502020204030204" pitchFamily="34" charset="0"/>
-              </a:rPr>
-              <a:t>5.5) Предоставление следующего функционала владельцу/менеджеру:</a:t>
-            </a:r>
-          </a:p>
-          <a:p>
-            <a:pPr>
-              <a:lnSpc>
-                <a:spcPct val="150000"/>
-              </a:lnSpc>
-            </a:pPr>
-            <a:r>
-              <a:rPr lang="ru-RU" sz="1800" kern="1200" dirty="0">
-                <a:solidFill>
-                  <a:srgbClr val="000000"/>
-                </a:solidFill>
-                <a:effectLst/>
-                <a:latin typeface="Calibri" panose="020F0502020204030204" pitchFamily="34" charset="0"/>
-                <a:ea typeface="DejaVu Sans" panose="020B0603030804020204" pitchFamily="34" charset="0"/>
-                <a:cs typeface="Calibri" panose="020F0502020204030204" pitchFamily="34" charset="0"/>
-              </a:rPr>
-              <a:t>5.5.1) Возможность авторизации;</a:t>
-            </a:r>
-          </a:p>
-          <a:p>
-            <a:pPr>
-              <a:lnSpc>
-                <a:spcPct val="150000"/>
-              </a:lnSpc>
-            </a:pPr>
-            <a:r>
-              <a:rPr lang="ru-RU" sz="1800" kern="1200" dirty="0">
-                <a:solidFill>
-                  <a:srgbClr val="000000"/>
-                </a:solidFill>
-                <a:effectLst/>
-                <a:latin typeface="Calibri" panose="020F0502020204030204" pitchFamily="34" charset="0"/>
-                <a:ea typeface="DejaVu Sans" panose="020B0603030804020204" pitchFamily="34" charset="0"/>
-                <a:cs typeface="Calibri" panose="020F0502020204030204" pitchFamily="34" charset="0"/>
-              </a:rPr>
-              <a:t>5.5.2) Доступ к личному кабинету;</a:t>
-            </a:r>
-          </a:p>
-          <a:p>
-            <a:pPr>
-              <a:lnSpc>
-                <a:spcPct val="150000"/>
-              </a:lnSpc>
-            </a:pPr>
-            <a:r>
-              <a:rPr lang="ru-RU" sz="1800" kern="1200" dirty="0">
-                <a:solidFill>
-                  <a:srgbClr val="000000"/>
-                </a:solidFill>
-                <a:effectLst/>
-                <a:latin typeface="Calibri" panose="020F0502020204030204" pitchFamily="34" charset="0"/>
-                <a:ea typeface="DejaVu Sans" panose="020B0603030804020204" pitchFamily="34" charset="0"/>
-                <a:cs typeface="Calibri" panose="020F0502020204030204" pitchFamily="34" charset="0"/>
-              </a:rPr>
-              <a:t>5.5.3) Просмотр заявок;</a:t>
-            </a:r>
-          </a:p>
-          <a:p>
-            <a:pPr>
-              <a:lnSpc>
-                <a:spcPct val="150000"/>
-              </a:lnSpc>
-            </a:pPr>
-            <a:r>
-              <a:rPr lang="ru-RU" sz="1800" kern="1200" dirty="0">
-                <a:solidFill>
-                  <a:srgbClr val="000000"/>
-                </a:solidFill>
-                <a:effectLst/>
-                <a:latin typeface="Calibri" panose="020F0502020204030204" pitchFamily="34" charset="0"/>
-                <a:ea typeface="DejaVu Sans" panose="020B0603030804020204" pitchFamily="34" charset="0"/>
-                <a:cs typeface="Calibri" panose="020F0502020204030204" pitchFamily="34" charset="0"/>
-              </a:rPr>
-              <a:t>5.5.4) Просмотр заказ-нарядов;</a:t>
-            </a:r>
-          </a:p>
-          <a:p>
-            <a:pPr>
-              <a:lnSpc>
-                <a:spcPct val="150000"/>
-              </a:lnSpc>
-            </a:pPr>
-            <a:r>
-              <a:rPr lang="ru-RU" sz="1800" kern="1200" dirty="0">
-                <a:solidFill>
-                  <a:srgbClr val="000000"/>
-                </a:solidFill>
-                <a:effectLst/>
-                <a:latin typeface="Calibri" panose="020F0502020204030204" pitchFamily="34" charset="0"/>
-                <a:ea typeface="DejaVu Sans" panose="020B0603030804020204" pitchFamily="34" charset="0"/>
-                <a:cs typeface="Calibri" panose="020F0502020204030204" pitchFamily="34" charset="0"/>
-              </a:rPr>
-              <a:t>5.5.5) Просмотр базы клиентов;</a:t>
-            </a:r>
-          </a:p>
-          <a:p>
-            <a:pPr>
-              <a:lnSpc>
-                <a:spcPct val="150000"/>
-              </a:lnSpc>
-            </a:pPr>
-            <a:r>
-              <a:rPr lang="ru-RU" sz="1800" kern="1200" dirty="0">
-                <a:solidFill>
-                  <a:srgbClr val="000000"/>
-                </a:solidFill>
-                <a:effectLst/>
-                <a:latin typeface="Calibri" panose="020F0502020204030204" pitchFamily="34" charset="0"/>
-                <a:ea typeface="DejaVu Sans" panose="020B0603030804020204" pitchFamily="34" charset="0"/>
-                <a:cs typeface="Calibri" panose="020F0502020204030204" pitchFamily="34" charset="0"/>
-              </a:rPr>
-              <a:t>5.5.6) Просмотр автомобилей клиентов;</a:t>
-            </a:r>
-          </a:p>
-          <a:p>
-            <a:pPr>
-              <a:lnSpc>
-                <a:spcPct val="150000"/>
-              </a:lnSpc>
-            </a:pPr>
-            <a:r>
-              <a:rPr lang="ru-RU" sz="1800" kern="1200" dirty="0">
-                <a:solidFill>
-                  <a:srgbClr val="000000"/>
-                </a:solidFill>
-                <a:effectLst/>
-                <a:latin typeface="Calibri" panose="020F0502020204030204" pitchFamily="34" charset="0"/>
-                <a:ea typeface="DejaVu Sans" panose="020B0603030804020204" pitchFamily="34" charset="0"/>
-                <a:cs typeface="Calibri" panose="020F0502020204030204" pitchFamily="34" charset="0"/>
-              </a:rPr>
-              <a:t>5.5.7) Создание, редактирование и отключение персонала;</a:t>
-            </a:r>
-          </a:p>
-          <a:p>
-            <a:pPr>
-              <a:lnSpc>
-                <a:spcPct val="150000"/>
-              </a:lnSpc>
-            </a:pPr>
-            <a:r>
-              <a:rPr lang="ru-RU" sz="1800" kern="1200" dirty="0">
-                <a:solidFill>
-                  <a:srgbClr val="000000"/>
-                </a:solidFill>
-                <a:effectLst/>
-                <a:latin typeface="Calibri" panose="020F0502020204030204" pitchFamily="34" charset="0"/>
-                <a:ea typeface="DejaVu Sans" panose="020B0603030804020204" pitchFamily="34" charset="0"/>
-                <a:cs typeface="Calibri" panose="020F0502020204030204" pitchFamily="34" charset="0"/>
-              </a:rPr>
-              <a:t>5.5.8) Создание новых и редактирование старых филиалов;</a:t>
-            </a:r>
-          </a:p>
-          <a:p>
-            <a:pPr>
-              <a:lnSpc>
-                <a:spcPct val="150000"/>
-              </a:lnSpc>
-            </a:pPr>
-            <a:r>
-              <a:rPr lang="ru-RU" sz="1800" kern="1200" dirty="0">
-                <a:solidFill>
-                  <a:srgbClr val="000000"/>
-                </a:solidFill>
-                <a:effectLst/>
-                <a:latin typeface="Calibri" panose="020F0502020204030204" pitchFamily="34" charset="0"/>
-                <a:ea typeface="DejaVu Sans" panose="020B0603030804020204" pitchFamily="34" charset="0"/>
-                <a:cs typeface="Calibri" panose="020F0502020204030204" pitchFamily="34" charset="0"/>
-              </a:rPr>
-              <a:t>5.5.9) Создание новых и редактирование старых услуг;</a:t>
-            </a:r>
-          </a:p>
-          <a:p>
-            <a:pPr>
-              <a:lnSpc>
-                <a:spcPct val="150000"/>
-              </a:lnSpc>
-            </a:pPr>
-            <a:r>
-              <a:rPr lang="ru-RU" sz="1800" kern="1200" dirty="0">
-                <a:solidFill>
-                  <a:srgbClr val="000000"/>
-                </a:solidFill>
-                <a:effectLst/>
-                <a:latin typeface="Calibri" panose="020F0502020204030204" pitchFamily="34" charset="0"/>
-                <a:ea typeface="DejaVu Sans" panose="020B0603030804020204" pitchFamily="34" charset="0"/>
-                <a:cs typeface="Calibri" panose="020F0502020204030204" pitchFamily="34" charset="0"/>
-              </a:rPr>
-              <a:t>5.5.10) Внесение новых поставщиков и редактирование старых;</a:t>
-            </a:r>
-          </a:p>
-          <a:p>
-            <a:pPr>
-              <a:lnSpc>
-                <a:spcPct val="150000"/>
-              </a:lnSpc>
-            </a:pPr>
-            <a:r>
-              <a:rPr lang="ru-RU" sz="1800" kern="1200" dirty="0">
-                <a:solidFill>
-                  <a:srgbClr val="000000"/>
-                </a:solidFill>
-                <a:effectLst/>
-                <a:latin typeface="Calibri" panose="020F0502020204030204" pitchFamily="34" charset="0"/>
-                <a:ea typeface="DejaVu Sans" panose="020B0603030804020204" pitchFamily="34" charset="0"/>
-                <a:cs typeface="Calibri" panose="020F0502020204030204" pitchFamily="34" charset="0"/>
-              </a:rPr>
-              <a:t>5.5.11) Внесение новых договоров на закупку комплектующих, а также изменение  и удаление старых;</a:t>
-            </a:r>
-          </a:p>
-          <a:p>
-            <a:pPr>
-              <a:lnSpc>
-                <a:spcPct val="150000"/>
-              </a:lnSpc>
-            </a:pPr>
-            <a:endParaRPr lang="ru-RU" sz="1800" kern="1200" dirty="0">
-              <a:solidFill>
-                <a:srgbClr val="000000"/>
-              </a:solidFill>
-              <a:effectLst/>
-              <a:latin typeface="Calibri" panose="020F0502020204030204" pitchFamily="34" charset="0"/>
-              <a:ea typeface="DejaVu Sans" panose="020B0603030804020204" pitchFamily="34" charset="0"/>
-              <a:cs typeface="Calibri" panose="020F0502020204030204" pitchFamily="34" charset="0"/>
-            </a:endParaRPr>
-          </a:p>
-          <a:p>
-            <a:pPr>
-              <a:lnSpc>
-                <a:spcPct val="150000"/>
-              </a:lnSpc>
-            </a:pPr>
-            <a:endParaRPr lang="ru-RU" sz="1800" kern="1200" dirty="0">
-              <a:solidFill>
-                <a:srgbClr val="000000"/>
-              </a:solidFill>
-              <a:effectLst/>
-              <a:latin typeface="Calibri" panose="020F0502020204030204" pitchFamily="34" charset="0"/>
-              <a:ea typeface="DejaVu Sans" panose="020B0603030804020204" pitchFamily="34" charset="0"/>
-              <a:cs typeface="Calibri" panose="020F0502020204030204" pitchFamily="34" charset="0"/>
-            </a:endParaRPr>
-          </a:p>
-          <a:p>
             <a:pPr marL="342900" indent="-342900">
-              <a:lnSpc>
-                <a:spcPct val="150000"/>
-              </a:lnSpc>
               <a:buAutoNum type="arabicParenR"/>
             </a:pPr>
             <a:endParaRPr lang="ru-RU" dirty="0">
@@ -6666,16 +8333,16 @@
               </a:lnSpc>
             </a:pPr>
             <a:r>
-              <a:rPr lang="ru-RU" sz="1800" b="1" strike="noStrike" spc="-1" dirty="0">
+              <a:rPr lang="ru-RU" sz="1800" strike="noStrike" spc="-1" dirty="0">
                 <a:solidFill>
                   <a:srgbClr val="FFFFFF"/>
                 </a:solidFill>
                 <a:latin typeface="Calibri" panose="020F0502020204030204" pitchFamily="34" charset="0"/>
                 <a:cs typeface="Calibri" panose="020F0502020204030204" pitchFamily="34" charset="0"/>
               </a:rPr>
-              <a:t>Нефункциональные требования</a:t>
-            </a:r>
-            <a:endParaRPr lang="ru-RU" sz="1800" b="0" strike="noStrike" spc="-1" dirty="0">
+              <a:t>Функциональные требования</a:t>
+            </a:r>
+            <a:endParaRPr lang="ru-RU" sz="1800" strike="noStrike" spc="-1" dirty="0">
               <a:latin typeface="Calibri" panose="020F0502020204030204" pitchFamily="34" charset="0"/>
               <a:cs typeface="Calibri" panose="020F0502020204030204" pitchFamily="34" charset="0"/>
             </a:endParaRPr>
@@ -6747,8 +8414,8 @@
         </p:nvSpPr>
         <p:spPr>
           <a:xfrm>
-            <a:off x="623641" y="828527"/>
-            <a:ext cx="11133253" cy="4202902"/>
+            <a:off x="553299" y="733366"/>
+            <a:ext cx="11085401" cy="8123847"/>
           </a:xfrm>
           <a:prstGeom prst="rect">
             <a:avLst/>
@@ -6776,144 +8443,380 @@
           </a:bodyPr>
           <a:lstStyle/>
           <a:p>
-            <a:pPr>
-              <a:lnSpc>
-                <a:spcPct val="150000"/>
-              </a:lnSpc>
-            </a:pPr>
-            <a:r>
-              <a:rPr lang="ru-RU" dirty="0">
-                <a:latin typeface="Calibri" panose="020F0502020204030204" pitchFamily="34" charset="0"/>
-                <a:cs typeface="Calibri" panose="020F0502020204030204" pitchFamily="34" charset="0"/>
-              </a:rPr>
-              <a:t>В ходе анализа предметной области были выявлены следующие нефункциональные требования:</a:t>
-            </a:r>
-          </a:p>
-          <a:p>
-            <a:pPr>
-              <a:lnSpc>
-                <a:spcPct val="150000"/>
-              </a:lnSpc>
-            </a:pPr>
-            <a:r>
-              <a:rPr lang="ru-RU" dirty="0">
-                <a:latin typeface="Calibri" panose="020F0502020204030204" pitchFamily="34" charset="0"/>
-                <a:cs typeface="Calibri" panose="020F0502020204030204" pitchFamily="34" charset="0"/>
-              </a:rPr>
-              <a:t>1) кроссбраузерность</a:t>
-            </a:r>
-            <a:r>
-              <a:rPr lang="en-US" dirty="0">
-                <a:latin typeface="Calibri" panose="020F0502020204030204" pitchFamily="34" charset="0"/>
-                <a:cs typeface="Calibri" panose="020F0502020204030204" pitchFamily="34" charset="0"/>
-              </a:rPr>
-              <a:t>;</a:t>
-            </a:r>
-            <a:endParaRPr lang="ru-RU" dirty="0">
+            <a:r>
+              <a:rPr lang="ru-RU" sz="1800" kern="1200" dirty="0">
+                <a:solidFill>
+                  <a:srgbClr val="000000"/>
+                </a:solidFill>
+                <a:effectLst/>
+                <a:latin typeface="Calibri" panose="020F0502020204030204" pitchFamily="34" charset="0"/>
+                <a:ea typeface="DejaVu Sans" panose="020B0603030804020204" pitchFamily="34" charset="0"/>
+                <a:cs typeface="Calibri" panose="020F0502020204030204" pitchFamily="34" charset="0"/>
+              </a:rPr>
+              <a:t>5.3) Предоставление следующего функционала администратору:</a:t>
+            </a:r>
+          </a:p>
+          <a:p>
+            <a:r>
+              <a:rPr lang="ru-RU" sz="1800" kern="1200" dirty="0">
+                <a:solidFill>
+                  <a:srgbClr val="000000"/>
+                </a:solidFill>
+                <a:effectLst/>
+                <a:latin typeface="Calibri" panose="020F0502020204030204" pitchFamily="34" charset="0"/>
+                <a:ea typeface="DejaVu Sans" panose="020B0603030804020204" pitchFamily="34" charset="0"/>
+                <a:cs typeface="Calibri" panose="020F0502020204030204" pitchFamily="34" charset="0"/>
+              </a:rPr>
+              <a:t>5.3.1) Возможность авторизации;</a:t>
+            </a:r>
+          </a:p>
+          <a:p>
+            <a:r>
+              <a:rPr lang="ru-RU" sz="1800" kern="1200" dirty="0">
+                <a:solidFill>
+                  <a:srgbClr val="000000"/>
+                </a:solidFill>
+                <a:effectLst/>
+                <a:latin typeface="Calibri" panose="020F0502020204030204" pitchFamily="34" charset="0"/>
+                <a:ea typeface="DejaVu Sans" panose="020B0603030804020204" pitchFamily="34" charset="0"/>
+                <a:cs typeface="Calibri" panose="020F0502020204030204" pitchFamily="34" charset="0"/>
+              </a:rPr>
+              <a:t>5.3.2) Доступ к личному кабинету;</a:t>
+            </a:r>
+          </a:p>
+          <a:p>
+            <a:r>
+              <a:rPr lang="ru-RU" sz="1800" kern="1200" dirty="0">
+                <a:solidFill>
+                  <a:srgbClr val="000000"/>
+                </a:solidFill>
+                <a:effectLst/>
+                <a:latin typeface="Calibri" panose="020F0502020204030204" pitchFamily="34" charset="0"/>
+                <a:ea typeface="DejaVu Sans" panose="020B0603030804020204" pitchFamily="34" charset="0"/>
+                <a:cs typeface="Calibri" panose="020F0502020204030204" pitchFamily="34" charset="0"/>
+              </a:rPr>
+              <a:t>5.3.3) Создание и редактирование клиентов;</a:t>
+            </a:r>
+          </a:p>
+          <a:p>
+            <a:r>
+              <a:rPr lang="ru-RU" sz="1800" kern="1200" dirty="0">
+                <a:solidFill>
+                  <a:srgbClr val="000000"/>
+                </a:solidFill>
+                <a:effectLst/>
+                <a:latin typeface="Calibri" panose="020F0502020204030204" pitchFamily="34" charset="0"/>
+                <a:ea typeface="DejaVu Sans" panose="020B0603030804020204" pitchFamily="34" charset="0"/>
+                <a:cs typeface="Calibri" panose="020F0502020204030204" pitchFamily="34" charset="0"/>
+              </a:rPr>
+              <a:t>5.3.4) Выдача доступа к аккаунту клиенту;</a:t>
+            </a:r>
+          </a:p>
+          <a:p>
+            <a:r>
+              <a:rPr lang="ru-RU" sz="1800" kern="1200" dirty="0">
+                <a:solidFill>
+                  <a:srgbClr val="000000"/>
+                </a:solidFill>
+                <a:effectLst/>
+                <a:latin typeface="Calibri" panose="020F0502020204030204" pitchFamily="34" charset="0"/>
+                <a:ea typeface="DejaVu Sans" panose="020B0603030804020204" pitchFamily="34" charset="0"/>
+                <a:cs typeface="Calibri" panose="020F0502020204030204" pitchFamily="34" charset="0"/>
+              </a:rPr>
+              <a:t>5.3.5) Создание и редактирование автомобилей клиентов;</a:t>
+            </a:r>
+          </a:p>
+          <a:p>
+            <a:r>
+              <a:rPr lang="ru-RU" sz="1800" kern="1200" dirty="0">
+                <a:solidFill>
+                  <a:srgbClr val="000000"/>
+                </a:solidFill>
+                <a:effectLst/>
+                <a:latin typeface="Calibri" panose="020F0502020204030204" pitchFamily="34" charset="0"/>
+                <a:ea typeface="DejaVu Sans" panose="020B0603030804020204" pitchFamily="34" charset="0"/>
+                <a:cs typeface="Calibri" panose="020F0502020204030204" pitchFamily="34" charset="0"/>
+              </a:rPr>
+              <a:t>5.3.6) Создание и редактирование заявок;</a:t>
+            </a:r>
+          </a:p>
+          <a:p>
+            <a:r>
+              <a:rPr lang="ru-RU" sz="1800" kern="1200" dirty="0">
+                <a:solidFill>
+                  <a:srgbClr val="000000"/>
+                </a:solidFill>
+                <a:effectLst/>
+                <a:latin typeface="Calibri" panose="020F0502020204030204" pitchFamily="34" charset="0"/>
+                <a:ea typeface="DejaVu Sans" panose="020B0603030804020204" pitchFamily="34" charset="0"/>
+                <a:cs typeface="Calibri" panose="020F0502020204030204" pitchFamily="34" charset="0"/>
+              </a:rPr>
+              <a:t>5.4) Предоставление следующего функционала мастеру-приёмщику:</a:t>
+            </a:r>
+          </a:p>
+          <a:p>
+            <a:r>
+              <a:rPr lang="ru-RU" sz="1800" kern="1200" dirty="0">
+                <a:solidFill>
+                  <a:srgbClr val="000000"/>
+                </a:solidFill>
+                <a:effectLst/>
+                <a:latin typeface="Calibri" panose="020F0502020204030204" pitchFamily="34" charset="0"/>
+                <a:ea typeface="DejaVu Sans" panose="020B0603030804020204" pitchFamily="34" charset="0"/>
+                <a:cs typeface="Calibri" panose="020F0502020204030204" pitchFamily="34" charset="0"/>
+              </a:rPr>
+              <a:t>5.4.1) Возможность авторизации;</a:t>
+            </a:r>
+          </a:p>
+          <a:p>
+            <a:r>
+              <a:rPr lang="ru-RU" sz="1800" kern="1200" dirty="0">
+                <a:solidFill>
+                  <a:srgbClr val="000000"/>
+                </a:solidFill>
+                <a:effectLst/>
+                <a:latin typeface="Calibri" panose="020F0502020204030204" pitchFamily="34" charset="0"/>
+                <a:ea typeface="DejaVu Sans" panose="020B0603030804020204" pitchFamily="34" charset="0"/>
+                <a:cs typeface="Calibri" panose="020F0502020204030204" pitchFamily="34" charset="0"/>
+              </a:rPr>
+              <a:t>5.4.2) Доступ к личному кабинету;</a:t>
+            </a:r>
+          </a:p>
+          <a:p>
+            <a:r>
+              <a:rPr lang="ru-RU" sz="1800" kern="1200" dirty="0">
+                <a:solidFill>
+                  <a:srgbClr val="000000"/>
+                </a:solidFill>
+                <a:effectLst/>
+                <a:latin typeface="Calibri" panose="020F0502020204030204" pitchFamily="34" charset="0"/>
+                <a:ea typeface="DejaVu Sans" panose="020B0603030804020204" pitchFamily="34" charset="0"/>
+                <a:cs typeface="Calibri" panose="020F0502020204030204" pitchFamily="34" charset="0"/>
+              </a:rPr>
+              <a:t>5.4.3) Создание и редактирование заказ-нарядов;</a:t>
+            </a:r>
+          </a:p>
+          <a:p>
+            <a:r>
+              <a:rPr lang="ru-RU" sz="1800" kern="1200" dirty="0">
+                <a:solidFill>
+                  <a:srgbClr val="000000"/>
+                </a:solidFill>
+                <a:effectLst/>
+                <a:latin typeface="Calibri" panose="020F0502020204030204" pitchFamily="34" charset="0"/>
+                <a:ea typeface="DejaVu Sans" panose="020B0603030804020204" pitchFamily="34" charset="0"/>
+                <a:cs typeface="Calibri" panose="020F0502020204030204" pitchFamily="34" charset="0"/>
+              </a:rPr>
+              <a:t>5.4.4) Внесение новых поставщиков и редактирование старых;</a:t>
+            </a:r>
+          </a:p>
+          <a:p>
+            <a:r>
+              <a:rPr lang="ru-RU" sz="1800" kern="1200" dirty="0">
+                <a:solidFill>
+                  <a:srgbClr val="000000"/>
+                </a:solidFill>
+                <a:effectLst/>
+                <a:latin typeface="Calibri" panose="020F0502020204030204" pitchFamily="34" charset="0"/>
+                <a:ea typeface="DejaVu Sans" panose="020B0603030804020204" pitchFamily="34" charset="0"/>
+                <a:cs typeface="Calibri" panose="020F0502020204030204" pitchFamily="34" charset="0"/>
+              </a:rPr>
+              <a:t>5.4.5) Внесение новых договоров на закупку комплектующих, а также изменение  и удаление старых;</a:t>
+            </a:r>
+          </a:p>
+          <a:p>
+            <a:r>
+              <a:rPr lang="ru-RU" sz="1800" kern="1200" dirty="0">
+                <a:solidFill>
+                  <a:srgbClr val="000000"/>
+                </a:solidFill>
+                <a:effectLst/>
+                <a:latin typeface="Calibri" panose="020F0502020204030204" pitchFamily="34" charset="0"/>
+                <a:ea typeface="DejaVu Sans" panose="020B0603030804020204" pitchFamily="34" charset="0"/>
+                <a:cs typeface="Calibri" panose="020F0502020204030204" pitchFamily="34" charset="0"/>
+              </a:rPr>
+              <a:t>5.5) Предоставление следующего функционала владельцу/менеджеру:</a:t>
+            </a:r>
+          </a:p>
+          <a:p>
+            <a:r>
+              <a:rPr lang="ru-RU" sz="1800" kern="1200" dirty="0">
+                <a:solidFill>
+                  <a:srgbClr val="000000"/>
+                </a:solidFill>
+                <a:effectLst/>
+                <a:latin typeface="Calibri" panose="020F0502020204030204" pitchFamily="34" charset="0"/>
+                <a:ea typeface="DejaVu Sans" panose="020B0603030804020204" pitchFamily="34" charset="0"/>
+                <a:cs typeface="Calibri" panose="020F0502020204030204" pitchFamily="34" charset="0"/>
+              </a:rPr>
+              <a:t>5.5.1) Возможность авторизации;</a:t>
+            </a:r>
+          </a:p>
+          <a:p>
+            <a:r>
+              <a:rPr lang="ru-RU" sz="1800" kern="1200" dirty="0">
+                <a:solidFill>
+                  <a:srgbClr val="000000"/>
+                </a:solidFill>
+                <a:effectLst/>
+                <a:latin typeface="Calibri" panose="020F0502020204030204" pitchFamily="34" charset="0"/>
+                <a:ea typeface="DejaVu Sans" panose="020B0603030804020204" pitchFamily="34" charset="0"/>
+                <a:cs typeface="Calibri" panose="020F0502020204030204" pitchFamily="34" charset="0"/>
+              </a:rPr>
+              <a:t>5.5.2) Доступ к личному кабинету;</a:t>
+            </a:r>
+          </a:p>
+          <a:p>
+            <a:r>
+              <a:rPr lang="ru-RU" sz="1800" kern="1200" dirty="0">
+                <a:solidFill>
+                  <a:srgbClr val="000000"/>
+                </a:solidFill>
+                <a:effectLst/>
+                <a:latin typeface="Calibri" panose="020F0502020204030204" pitchFamily="34" charset="0"/>
+                <a:ea typeface="DejaVu Sans" panose="020B0603030804020204" pitchFamily="34" charset="0"/>
+                <a:cs typeface="Calibri" panose="020F0502020204030204" pitchFamily="34" charset="0"/>
+              </a:rPr>
+              <a:t>5.5.3) Просмотр заявок;</a:t>
+            </a:r>
+          </a:p>
+          <a:p>
+            <a:r>
+              <a:rPr lang="ru-RU" sz="1800" kern="1200" dirty="0">
+                <a:solidFill>
+                  <a:srgbClr val="000000"/>
+                </a:solidFill>
+                <a:effectLst/>
+                <a:latin typeface="Calibri" panose="020F0502020204030204" pitchFamily="34" charset="0"/>
+                <a:ea typeface="DejaVu Sans" panose="020B0603030804020204" pitchFamily="34" charset="0"/>
+                <a:cs typeface="Calibri" panose="020F0502020204030204" pitchFamily="34" charset="0"/>
+              </a:rPr>
+              <a:t>5.5.4) Просмотр заказ-нарядов;</a:t>
+            </a:r>
+          </a:p>
+          <a:p>
+            <a:r>
+              <a:rPr lang="ru-RU" sz="1800" kern="1200" dirty="0">
+                <a:solidFill>
+                  <a:srgbClr val="000000"/>
+                </a:solidFill>
+                <a:effectLst/>
+                <a:latin typeface="Calibri" panose="020F0502020204030204" pitchFamily="34" charset="0"/>
+                <a:ea typeface="DejaVu Sans" panose="020B0603030804020204" pitchFamily="34" charset="0"/>
+                <a:cs typeface="Calibri" panose="020F0502020204030204" pitchFamily="34" charset="0"/>
+              </a:rPr>
+              <a:t>5.5.5) Просмотр базы клиентов;</a:t>
+            </a:r>
+          </a:p>
+          <a:p>
+            <a:r>
+              <a:rPr lang="ru-RU" sz="1800" kern="1200" dirty="0">
+                <a:solidFill>
+                  <a:srgbClr val="000000"/>
+                </a:solidFill>
+                <a:effectLst/>
+                <a:latin typeface="Calibri" panose="020F0502020204030204" pitchFamily="34" charset="0"/>
+                <a:ea typeface="DejaVu Sans" panose="020B0603030804020204" pitchFamily="34" charset="0"/>
+                <a:cs typeface="Calibri" panose="020F0502020204030204" pitchFamily="34" charset="0"/>
+              </a:rPr>
+              <a:t>5.5.6) Просмотр автомобилей клиентов;</a:t>
+            </a:r>
+          </a:p>
+          <a:p>
+            <a:r>
+              <a:rPr lang="ru-RU" sz="1800" kern="1200" dirty="0">
+                <a:solidFill>
+                  <a:srgbClr val="000000"/>
+                </a:solidFill>
+                <a:effectLst/>
+                <a:latin typeface="Calibri" panose="020F0502020204030204" pitchFamily="34" charset="0"/>
+                <a:ea typeface="DejaVu Sans" panose="020B0603030804020204" pitchFamily="34" charset="0"/>
+                <a:cs typeface="Calibri" panose="020F0502020204030204" pitchFamily="34" charset="0"/>
+              </a:rPr>
+              <a:t>5.5.7) Создание, редактирование и отключение персонала;</a:t>
+            </a:r>
+          </a:p>
+          <a:p>
+            <a:r>
+              <a:rPr lang="ru-RU" sz="1800" kern="1200" dirty="0">
+                <a:solidFill>
+                  <a:srgbClr val="000000"/>
+                </a:solidFill>
+                <a:effectLst/>
+                <a:latin typeface="Calibri" panose="020F0502020204030204" pitchFamily="34" charset="0"/>
+                <a:ea typeface="DejaVu Sans" panose="020B0603030804020204" pitchFamily="34" charset="0"/>
+                <a:cs typeface="Calibri" panose="020F0502020204030204" pitchFamily="34" charset="0"/>
+              </a:rPr>
+              <a:t>5.5.8) Создание новых и редактирование старых филиалов;</a:t>
+            </a:r>
+          </a:p>
+          <a:p>
+            <a:r>
+              <a:rPr lang="ru-RU" sz="1800" kern="1200" dirty="0">
+                <a:solidFill>
+                  <a:srgbClr val="000000"/>
+                </a:solidFill>
+                <a:effectLst/>
+                <a:latin typeface="Calibri" panose="020F0502020204030204" pitchFamily="34" charset="0"/>
+                <a:ea typeface="DejaVu Sans" panose="020B0603030804020204" pitchFamily="34" charset="0"/>
+                <a:cs typeface="Calibri" panose="020F0502020204030204" pitchFamily="34" charset="0"/>
+              </a:rPr>
+              <a:t>5.5.9) Создание новых и редактирование старых услуг;</a:t>
+            </a:r>
+          </a:p>
+          <a:p>
+            <a:r>
+              <a:rPr lang="ru-RU" sz="1800" kern="1200" dirty="0">
+                <a:solidFill>
+                  <a:srgbClr val="000000"/>
+                </a:solidFill>
+                <a:effectLst/>
+                <a:latin typeface="Calibri" panose="020F0502020204030204" pitchFamily="34" charset="0"/>
+                <a:ea typeface="DejaVu Sans" panose="020B0603030804020204" pitchFamily="34" charset="0"/>
+                <a:cs typeface="Calibri" panose="020F0502020204030204" pitchFamily="34" charset="0"/>
+              </a:rPr>
+              <a:t>5.5.10) Внесение новых поставщиков и редактирование старых;</a:t>
+            </a:r>
+          </a:p>
+          <a:p>
+            <a:r>
+              <a:rPr lang="ru-RU" sz="1800" kern="1200" dirty="0">
+                <a:solidFill>
+                  <a:srgbClr val="000000"/>
+                </a:solidFill>
+                <a:effectLst/>
+                <a:latin typeface="Calibri" panose="020F0502020204030204" pitchFamily="34" charset="0"/>
+                <a:ea typeface="DejaVu Sans" panose="020B0603030804020204" pitchFamily="34" charset="0"/>
+                <a:cs typeface="Calibri" panose="020F0502020204030204" pitchFamily="34" charset="0"/>
+              </a:rPr>
+              <a:t>5.5.11) Внесение новых договоров на закупку комплектующих, а также изменение  и удаление старых;</a:t>
+            </a:r>
+          </a:p>
+          <a:p>
+            <a:endParaRPr lang="ru-RU" sz="1800" kern="1200" dirty="0">
+              <a:solidFill>
+                <a:srgbClr val="000000"/>
+              </a:solidFill>
+              <a:effectLst/>
               <a:latin typeface="Calibri" panose="020F0502020204030204" pitchFamily="34" charset="0"/>
+              <a:ea typeface="DejaVu Sans" panose="020B0603030804020204" pitchFamily="34" charset="0"/>
               <a:cs typeface="Calibri" panose="020F0502020204030204" pitchFamily="34" charset="0"/>
             </a:endParaRPr>
           </a:p>
           <a:p>
-            <a:pPr>
-              <a:lnSpc>
-                <a:spcPct val="150000"/>
-              </a:lnSpc>
-            </a:pPr>
-            <a:r>
-              <a:rPr lang="ru-RU" dirty="0">
-                <a:latin typeface="Calibri" panose="020F0502020204030204" pitchFamily="34" charset="0"/>
-                <a:cs typeface="Calibri" panose="020F0502020204030204" pitchFamily="34" charset="0"/>
-              </a:rPr>
-              <a:t>2) безопасность хранения паролей</a:t>
-            </a:r>
-            <a:r>
-              <a:rPr lang="en-US" dirty="0">
-                <a:latin typeface="Calibri" panose="020F0502020204030204" pitchFamily="34" charset="0"/>
-                <a:cs typeface="Calibri" panose="020F0502020204030204" pitchFamily="34" charset="0"/>
-              </a:rPr>
-              <a:t>;</a:t>
-            </a:r>
-            <a:endParaRPr lang="ru-RU" dirty="0">
+            <a:endParaRPr lang="ru-RU" sz="1800" kern="1200" dirty="0">
+              <a:solidFill>
+                <a:srgbClr val="000000"/>
+              </a:solidFill>
+              <a:effectLst/>
               <a:latin typeface="Calibri" panose="020F0502020204030204" pitchFamily="34" charset="0"/>
+              <a:ea typeface="DejaVu Sans" panose="020B0603030804020204" pitchFamily="34" charset="0"/>
               <a:cs typeface="Calibri" panose="020F0502020204030204" pitchFamily="34" charset="0"/>
             </a:endParaRPr>
           </a:p>
           <a:p>
-            <a:pPr>
-              <a:lnSpc>
-                <a:spcPct val="150000"/>
-              </a:lnSpc>
-            </a:pPr>
-            <a:r>
-              <a:rPr lang="ru-RU" dirty="0">
-                <a:latin typeface="Calibri" panose="020F0502020204030204" pitchFamily="34" charset="0"/>
-                <a:cs typeface="Calibri" panose="020F0502020204030204" pitchFamily="34" charset="0"/>
-              </a:rPr>
-              <a:t>3) авторизация с помощью JSON Web Token — открытый стандарт RFC 7519;</a:t>
-            </a:r>
-          </a:p>
-          <a:p>
-            <a:pPr>
-              <a:lnSpc>
-                <a:spcPct val="150000"/>
-              </a:lnSpc>
-            </a:pPr>
-            <a:r>
-              <a:rPr lang="ru-RU" dirty="0">
-                <a:latin typeface="Calibri" panose="020F0502020204030204" pitchFamily="34" charset="0"/>
-                <a:cs typeface="Calibri" panose="020F0502020204030204" pitchFamily="34" charset="0"/>
-              </a:rPr>
-              <a:t>Были сформированы следующие требования к тестированию:</a:t>
-            </a:r>
-          </a:p>
-          <a:p>
-            <a:pPr>
-              <a:lnSpc>
-                <a:spcPct val="150000"/>
-              </a:lnSpc>
-            </a:pPr>
-            <a:r>
-              <a:rPr lang="ru-RU" dirty="0">
-                <a:latin typeface="Calibri" panose="020F0502020204030204" pitchFamily="34" charset="0"/>
-                <a:cs typeface="Calibri" panose="020F0502020204030204" pitchFamily="34" charset="0"/>
-              </a:rPr>
-              <a:t>1) провести модульное тестирование системы;</a:t>
-            </a:r>
-          </a:p>
-          <a:p>
-            <a:pPr>
-              <a:lnSpc>
-                <a:spcPct val="150000"/>
-              </a:lnSpc>
-            </a:pPr>
-            <a:r>
-              <a:rPr lang="ru-RU" dirty="0">
-                <a:latin typeface="Calibri" panose="020F0502020204030204" pitchFamily="34" charset="0"/>
-                <a:cs typeface="Calibri" panose="020F0502020204030204" pitchFamily="34" charset="0"/>
-              </a:rPr>
-              <a:t>2) провести интеграционное тестирование системы;</a:t>
-            </a:r>
-          </a:p>
-          <a:p>
-            <a:pPr>
-              <a:lnSpc>
-                <a:spcPct val="150000"/>
-              </a:lnSpc>
-            </a:pPr>
-            <a:r>
-              <a:rPr lang="ru-RU" dirty="0">
-                <a:latin typeface="Calibri" panose="020F0502020204030204" pitchFamily="34" charset="0"/>
-                <a:cs typeface="Calibri" panose="020F0502020204030204" pitchFamily="34" charset="0"/>
-              </a:rPr>
-              <a:t>3) провести нагрузочное тестирование системы, в котором выполняются 3000 запросов от пользователей в течении 30 секунд.</a:t>
-            </a:r>
-          </a:p>
-          <a:p>
-            <a:pPr>
-              <a:lnSpc>
-                <a:spcPct val="150000"/>
-              </a:lnSpc>
+            <a:pPr marL="342900" indent="-342900">
+              <a:buAutoNum type="arabicParenR"/>
             </a:pPr>
             <a:endParaRPr lang="ru-RU" dirty="0">
               <a:latin typeface="Calibri" panose="020F0502020204030204" pitchFamily="34" charset="0"/>
@@ -6925,7 +8828,7 @@
     </p:spTree>
     <p:extLst>
       <p:ext uri="{BB962C8B-B14F-4D97-AF65-F5344CB8AC3E}">
-        <p14:creationId xmlns:p14="http://schemas.microsoft.com/office/powerpoint/2010/main" val="1131207095"/>
+        <p14:creationId xmlns:p14="http://schemas.microsoft.com/office/powerpoint/2010/main" val="2781834094"/>
       </p:ext>
     </p:extLst>
   </p:cSld>
@@ -7006,26 +8909,16 @@
               </a:lnSpc>
             </a:pPr>
             <a:r>
-              <a:rPr lang="en-US" b="1" spc="-1" dirty="0">
+              <a:rPr lang="ru-RU" sz="1800" strike="noStrike" spc="-1" dirty="0">
                 <a:solidFill>
                   <a:srgbClr val="FFFFFF"/>
                 </a:solidFill>
                 <a:latin typeface="Calibri" panose="020F0502020204030204" pitchFamily="34" charset="0"/>
                 <a:cs typeface="Calibri" panose="020F0502020204030204" pitchFamily="34" charset="0"/>
               </a:rPr>
-              <a:t>ER-</a:t>
-            </a:r>
-            <a:r>
-              <a:rPr lang="ru-RU" b="1" spc="-1" dirty="0">
-                <a:solidFill>
-                  <a:srgbClr val="FFFFFF"/>
-                </a:solidFill>
-                <a:latin typeface="Calibri" panose="020F0502020204030204" pitchFamily="34" charset="0"/>
-                <a:cs typeface="Calibri" panose="020F0502020204030204" pitchFamily="34" charset="0"/>
-              </a:rPr>
-              <a:t>модель</a:t>
-            </a:r>
-            <a:endParaRPr lang="ru-RU" sz="1800" b="0" strike="noStrike" spc="-1" dirty="0">
+              <a:t>Нефункциональные требования</a:t>
+            </a:r>
+            <a:endParaRPr lang="ru-RU" sz="1800" strike="noStrike" spc="-1" dirty="0">
               <a:latin typeface="Calibri" panose="020F0502020204030204" pitchFamily="34" charset="0"/>
               <a:cs typeface="Calibri" panose="020F0502020204030204" pitchFamily="34" charset="0"/>
             </a:endParaRPr>
@@ -7089,49 +8982,193 @@
           </a:p>
         </p:txBody>
       </p:sp>
-      <p:pic>
-        <p:nvPicPr>
-          <p:cNvPr id="22" name="Рисунок 21">
-            <a:extLst>
-              <a:ext uri="{FF2B5EF4-FFF2-40B4-BE49-F238E27FC236}">
-                <a16:creationId xmlns:a16="http://schemas.microsoft.com/office/drawing/2014/main" id="{EAAC88CE-6A95-43E3-9C84-336C42C75D08}"/>
-              </a:ext>
-            </a:extLst>
-          </p:cNvPr>
-          <p:cNvPicPr>
-            <a:picLocks noChangeAspect="1"/>
-          </p:cNvPicPr>
+      <p:sp>
+        <p:nvSpPr>
+          <p:cNvPr id="56" name="CustomShape 3"/>
+          <p:cNvSpPr/>
           <p:nvPr/>
-        </p:nvPicPr>
-        <p:blipFill>
-          <a:blip r:embed="rId3">
-            <a:extLst>
-              <a:ext uri="{28A0092B-C50C-407E-A947-70E740481C1C}">
-                <a14:useLocalDpi xmlns:a14="http://schemas.microsoft.com/office/drawing/2010/main" val="0"/>
-              </a:ext>
-              <a:ext uri="{96DAC541-7B7A-43D3-8B79-37D633B846F1}">
-                <asvg:svgBlip xmlns:asvg="http://schemas.microsoft.com/office/drawing/2016/SVG/main" r:embed="rId4"/>
-              </a:ext>
-            </a:extLst>
-          </a:blip>
-          <a:stretch>
-            <a:fillRect/>
-          </a:stretch>
-        </p:blipFill>
-        <p:spPr>
-          <a:xfrm>
-            <a:off x="2780908" y="829560"/>
-            <a:ext cx="6821036" cy="5542979"/>
-          </a:xfrm>
-          <a:prstGeom prst="rect">
-            <a:avLst/>
-          </a:prstGeom>
-        </p:spPr>
-      </p:pic>
+        </p:nvSpPr>
+        <p:spPr>
+          <a:xfrm>
+            <a:off x="623641" y="828527"/>
+            <a:ext cx="11133253" cy="4202902"/>
+          </a:xfrm>
+          <a:prstGeom prst="rect">
+            <a:avLst/>
+          </a:prstGeom>
+          <a:noFill/>
+          <a:ln>
+            <a:noFill/>
+          </a:ln>
+        </p:spPr>
+        <p:style>
+          <a:lnRef idx="0">
+            <a:scrgbClr r="0" g="0" b="0"/>
+          </a:lnRef>
+          <a:fillRef idx="0">
+            <a:scrgbClr r="0" g="0" b="0"/>
+          </a:fillRef>
+          <a:effectRef idx="0">
+            <a:scrgbClr r="0" g="0" b="0"/>
+          </a:effectRef>
+          <a:fontRef idx="minor"/>
+        </p:style>
+        <p:txBody>
+          <a:bodyPr wrap="square" lIns="90000" tIns="45000" rIns="90000" bIns="45000">
+            <a:spAutoFit/>
+          </a:bodyPr>
+          <a:lstStyle/>
+          <a:p>
+            <a:pPr>
+              <a:lnSpc>
+                <a:spcPct val="150000"/>
+              </a:lnSpc>
+            </a:pPr>
+            <a:r>
+              <a:rPr lang="ru-RU" dirty="0">
+                <a:latin typeface="Calibri" panose="020F0502020204030204" pitchFamily="34" charset="0"/>
+                <a:cs typeface="Calibri" panose="020F0502020204030204" pitchFamily="34" charset="0"/>
+              </a:rPr>
+              <a:t>В ходе анализа предметной области были выявлены следующие нефункциональные требования:</a:t>
+            </a:r>
+          </a:p>
+          <a:p>
+            <a:pPr>
+              <a:lnSpc>
+                <a:spcPct val="150000"/>
+              </a:lnSpc>
+            </a:pPr>
+            <a:r>
+              <a:rPr lang="ru-RU" dirty="0">
+                <a:latin typeface="Calibri" panose="020F0502020204030204" pitchFamily="34" charset="0"/>
+                <a:cs typeface="Calibri" panose="020F0502020204030204" pitchFamily="34" charset="0"/>
+              </a:rPr>
+              <a:t>1) кроссбраузерность</a:t>
+            </a:r>
+            <a:r>
+              <a:rPr lang="en-US" dirty="0">
+                <a:latin typeface="Calibri" panose="020F0502020204030204" pitchFamily="34" charset="0"/>
+                <a:cs typeface="Calibri" panose="020F0502020204030204" pitchFamily="34" charset="0"/>
+              </a:rPr>
+              <a:t>;</a:t>
+            </a:r>
+            <a:endParaRPr lang="ru-RU" dirty="0">
+              <a:latin typeface="Calibri" panose="020F0502020204030204" pitchFamily="34" charset="0"/>
+              <a:cs typeface="Calibri" panose="020F0502020204030204" pitchFamily="34" charset="0"/>
+            </a:endParaRPr>
+          </a:p>
+          <a:p>
+            <a:pPr>
+              <a:lnSpc>
+                <a:spcPct val="150000"/>
+              </a:lnSpc>
+            </a:pPr>
+            <a:r>
+              <a:rPr lang="ru-RU" dirty="0">
+                <a:latin typeface="Calibri" panose="020F0502020204030204" pitchFamily="34" charset="0"/>
+                <a:cs typeface="Calibri" panose="020F0502020204030204" pitchFamily="34" charset="0"/>
+              </a:rPr>
+              <a:t>2) безопасность хранения паролей</a:t>
+            </a:r>
+            <a:r>
+              <a:rPr lang="en-US" dirty="0">
+                <a:latin typeface="Calibri" panose="020F0502020204030204" pitchFamily="34" charset="0"/>
+                <a:cs typeface="Calibri" panose="020F0502020204030204" pitchFamily="34" charset="0"/>
+              </a:rPr>
+              <a:t>;</a:t>
+            </a:r>
+            <a:endParaRPr lang="ru-RU" dirty="0">
+              <a:latin typeface="Calibri" panose="020F0502020204030204" pitchFamily="34" charset="0"/>
+              <a:cs typeface="Calibri" panose="020F0502020204030204" pitchFamily="34" charset="0"/>
+            </a:endParaRPr>
+          </a:p>
+          <a:p>
+            <a:pPr>
+              <a:lnSpc>
+                <a:spcPct val="150000"/>
+              </a:lnSpc>
+            </a:pPr>
+            <a:r>
+              <a:rPr lang="ru-RU" dirty="0">
+                <a:latin typeface="Calibri" panose="020F0502020204030204" pitchFamily="34" charset="0"/>
+                <a:cs typeface="Calibri" panose="020F0502020204030204" pitchFamily="34" charset="0"/>
+              </a:rPr>
+              <a:t>3) авторизация с помощью JSON Web Token — открытый стандарт RFC 7519;</a:t>
+            </a:r>
+          </a:p>
+          <a:p>
+            <a:pPr>
+              <a:lnSpc>
+                <a:spcPct val="150000"/>
+              </a:lnSpc>
+            </a:pPr>
+            <a:r>
+              <a:rPr lang="ru-RU" dirty="0">
+                <a:latin typeface="Calibri" panose="020F0502020204030204" pitchFamily="34" charset="0"/>
+                <a:cs typeface="Calibri" panose="020F0502020204030204" pitchFamily="34" charset="0"/>
+              </a:rPr>
+              <a:t>Были сформированы следующие требования к тестированию:</a:t>
+            </a:r>
+          </a:p>
+          <a:p>
+            <a:pPr>
+              <a:lnSpc>
+                <a:spcPct val="150000"/>
+              </a:lnSpc>
+            </a:pPr>
+            <a:r>
+              <a:rPr lang="ru-RU" dirty="0">
+                <a:latin typeface="Calibri" panose="020F0502020204030204" pitchFamily="34" charset="0"/>
+                <a:cs typeface="Calibri" panose="020F0502020204030204" pitchFamily="34" charset="0"/>
+              </a:rPr>
+              <a:t>1) провести модульное тестирование системы;</a:t>
+            </a:r>
+          </a:p>
+          <a:p>
+            <a:pPr>
+              <a:lnSpc>
+                <a:spcPct val="150000"/>
+              </a:lnSpc>
+            </a:pPr>
+            <a:r>
+              <a:rPr lang="ru-RU" dirty="0">
+                <a:latin typeface="Calibri" panose="020F0502020204030204" pitchFamily="34" charset="0"/>
+                <a:cs typeface="Calibri" panose="020F0502020204030204" pitchFamily="34" charset="0"/>
+              </a:rPr>
+              <a:t>2) провести интеграционное тестирование системы;</a:t>
+            </a:r>
+          </a:p>
+          <a:p>
+            <a:pPr>
+              <a:lnSpc>
+                <a:spcPct val="150000"/>
+              </a:lnSpc>
+            </a:pPr>
+            <a:r>
+              <a:rPr lang="ru-RU" dirty="0">
+                <a:latin typeface="Calibri" panose="020F0502020204030204" pitchFamily="34" charset="0"/>
+                <a:cs typeface="Calibri" panose="020F0502020204030204" pitchFamily="34" charset="0"/>
+              </a:rPr>
+              <a:t>3) провести нагрузочное тестирование системы, в котором выполняются 3000 запросов от пользователей в течении 30 секунд.</a:t>
+            </a:r>
+          </a:p>
+          <a:p>
+            <a:pPr>
+              <a:lnSpc>
+                <a:spcPct val="150000"/>
+              </a:lnSpc>
+            </a:pPr>
+            <a:endParaRPr lang="ru-RU" dirty="0">
+              <a:latin typeface="Calibri" panose="020F0502020204030204" pitchFamily="34" charset="0"/>
+              <a:cs typeface="Calibri" panose="020F0502020204030204" pitchFamily="34" charset="0"/>
+            </a:endParaRPr>
+          </a:p>
+        </p:txBody>
+      </p:sp>
     </p:spTree>
     <p:extLst>
       <p:ext uri="{BB962C8B-B14F-4D97-AF65-F5344CB8AC3E}">
-        <p14:creationId xmlns:p14="http://schemas.microsoft.com/office/powerpoint/2010/main" val="4167966959"/>
+        <p14:creationId xmlns:p14="http://schemas.microsoft.com/office/powerpoint/2010/main" val="1131207095"/>
       </p:ext>
     </p:extLst>
   </p:cSld>
@@ -7206,52 +9243,33 @@
           </a:bodyPr>
           <a:lstStyle/>
           <a:p>
-            <a:pPr marL="0" marR="0" lvl="0" indent="0" algn="ctr" defTabSz="914400" rtl="0" eaLnBrk="1" fontAlgn="auto" latinLnBrk="0" hangingPunct="1">
+            <a:pPr algn="ctr">
               <a:lnSpc>
                 <a:spcPct val="100000"/>
               </a:lnSpc>
-              <a:spcBef>
-                <a:spcPts val="0"/>
-              </a:spcBef>
-              <a:spcAft>
-                <a:spcPts val="0"/>
-              </a:spcAft>
-              <a:buClrTx/>
-              <a:buSzTx/>
-              <a:buFontTx/>
-              <a:buNone/>
-              <a:tabLst/>
-              <a:defRPr/>
             </a:pPr>
             <a:r>
-              <a:rPr kumimoji="0" lang="ru-RU" sz="1800" b="1" i="0" u="none" strike="noStrike" kern="1200" cap="none" spc="-1" normalizeH="0" baseline="0" noProof="0" dirty="0">
-                <a:ln>
-                  <a:noFill/>
-                </a:ln>
+              <a:rPr lang="en-US" spc="-1" dirty="0">
                 <a:solidFill>
                   <a:srgbClr val="FFFFFF"/>
                 </a:solidFill>
-                <a:effectLst/>
-                <a:uLnTx/>
-                <a:uFillTx/>
-                <a:latin typeface="Calibri" panose="020F0502020204030204" pitchFamily="34" charset="0"/>
-                <a:ea typeface="DejaVu Sans"/>
-                <a:cs typeface="Calibri" panose="020F0502020204030204" pitchFamily="34" charset="0"/>
-              </a:rPr>
-              <a:t>Логическая модель</a:t>
-            </a:r>
-            <a:endParaRPr kumimoji="0" lang="ru-RU" sz="1800" b="0" i="0" u="none" strike="noStrike" kern="1200" cap="none" spc="-1" normalizeH="0" baseline="0" noProof="0" dirty="0">
-              <a:ln>
-                <a:noFill/>
-              </a:ln>
-              <a:solidFill>
-                <a:prstClr val="black"/>
-              </a:solidFill>
-              <a:effectLst/>
-              <a:uLnTx/>
-              <a:uFillTx/>
+                <a:latin typeface="Calibri" panose="020F0502020204030204" pitchFamily="34" charset="0"/>
+                <a:cs typeface="Calibri" panose="020F0502020204030204" pitchFamily="34" charset="0"/>
+              </a:rPr>
+              <a:t>ER-</a:t>
+            </a:r>
+            <a:r>
+              <a:rPr lang="ru-RU" spc="-1" dirty="0">
+                <a:solidFill>
+                  <a:srgbClr val="FFFFFF"/>
+                </a:solidFill>
+                <a:latin typeface="Calibri" panose="020F0502020204030204" pitchFamily="34" charset="0"/>
+                <a:cs typeface="Calibri" panose="020F0502020204030204" pitchFamily="34" charset="0"/>
+              </a:rPr>
+              <a:t>модель</a:t>
+            </a:r>
+            <a:endParaRPr lang="ru-RU" sz="1800" strike="noStrike" spc="-1" dirty="0">
               <a:latin typeface="Calibri" panose="020F0502020204030204" pitchFamily="34" charset="0"/>
-              <a:ea typeface="DejaVu Sans"/>
               <a:cs typeface="Calibri" panose="020F0502020204030204" pitchFamily="34" charset="0"/>
             </a:endParaRPr>
           </a:p>
@@ -7294,80 +9312,32 @@
           </a:bodyPr>
           <a:lstStyle/>
           <a:p>
-            <a:pPr marL="0" marR="0" lvl="0" indent="0" algn="ctr" defTabSz="914400" rtl="0" eaLnBrk="1" fontAlgn="auto" latinLnBrk="0" hangingPunct="1">
+            <a:pPr algn="ctr">
               <a:lnSpc>
                 <a:spcPct val="100000"/>
               </a:lnSpc>
-              <a:spcBef>
-                <a:spcPts val="0"/>
-              </a:spcBef>
-              <a:spcAft>
-                <a:spcPts val="0"/>
-              </a:spcAft>
-              <a:buClrTx/>
-              <a:buSzTx/>
-              <a:buFontTx/>
-              <a:buNone/>
-              <a:tabLst/>
-              <a:defRPr/>
             </a:pPr>
             <a:fld id="{89F79450-C151-457E-9813-B313ED05920E}" type="slidenum">
-              <a:rPr kumimoji="0" lang="ru-RU" sz="1800" b="0" i="0" u="none" strike="noStrike" kern="1200" cap="none" spc="-1" normalizeH="0" baseline="0" noProof="0">
-                <a:ln>
-                  <a:noFill/>
-                </a:ln>
+              <a:rPr lang="ru-RU" sz="1800" b="0" strike="noStrike" spc="-1">
                 <a:solidFill>
                   <a:srgbClr val="FFFFFF"/>
                 </a:solidFill>
-                <a:effectLst/>
-                <a:uLnTx/>
-                <a:uFillTx/>
                 <a:latin typeface="Elektra Medium Pro"/>
-                <a:ea typeface="DejaVu Sans"/>
-                <a:cs typeface="DejaVu Sans"/>
-              </a:rPr>
-              <a:pPr marL="0" marR="0" lvl="0" indent="0" algn="ctr" defTabSz="914400" rtl="0" eaLnBrk="1" fontAlgn="auto" latinLnBrk="0" hangingPunct="1">
-                <a:lnSpc>
-                  <a:spcPct val="100000"/>
-                </a:lnSpc>
-                <a:spcBef>
-                  <a:spcPts val="0"/>
-                </a:spcBef>
-                <a:spcAft>
-                  <a:spcPts val="0"/>
-                </a:spcAft>
-                <a:buClrTx/>
-                <a:buSzTx/>
-                <a:buFontTx/>
-                <a:buNone/>
-                <a:tabLst/>
-                <a:defRPr/>
-              </a:pPr>
+              </a:rPr>
               <a:t>9</a:t>
             </a:fld>
-            <a:endParaRPr kumimoji="0" lang="ru-RU" sz="1800" b="0" i="0" u="none" strike="noStrike" kern="1200" cap="none" spc="-1" normalizeH="0" baseline="0" noProof="0">
-              <a:ln>
-                <a:noFill/>
-              </a:ln>
-              <a:solidFill>
-                <a:prstClr val="black"/>
-              </a:solidFill>
-              <a:effectLst/>
-              <a:uLnTx/>
-              <a:uFillTx/>
+            <a:endParaRPr lang="ru-RU" sz="1800" b="0" strike="noStrike" spc="-1">
               <a:latin typeface="Arial"/>
-              <a:ea typeface="DejaVu Sans"/>
-              <a:cs typeface="DejaVu Sans"/>
             </a:endParaRPr>
           </a:p>
         </p:txBody>
       </p:sp>
       <p:pic>
         <p:nvPicPr>
-          <p:cNvPr id="10" name="Рисунок 9">
+          <p:cNvPr id="22" name="Рисунок 21">
             <a:extLst>
               <a:ext uri="{FF2B5EF4-FFF2-40B4-BE49-F238E27FC236}">
-                <a16:creationId xmlns:a16="http://schemas.microsoft.com/office/drawing/2014/main" id="{4B392EEC-1A52-4BE8-B960-DC3892BC865F}"/>
+                <a16:creationId xmlns:a16="http://schemas.microsoft.com/office/drawing/2014/main" id="{EAAC88CE-6A95-43E3-9C84-336C42C75D08}"/>
               </a:ext>
             </a:extLst>
           </p:cNvPr>
@@ -7393,8 +9363,8 @@
         </p:blipFill>
         <p:spPr>
           <a:xfrm>
-            <a:off x="1404595" y="838986"/>
-            <a:ext cx="8870622" cy="5379843"/>
+            <a:off x="2780908" y="829560"/>
+            <a:ext cx="6821036" cy="5542979"/>
           </a:xfrm>
           <a:prstGeom prst="rect">
             <a:avLst/>
@@ -7404,7 +9374,7 @@
     </p:spTree>
     <p:extLst>
       <p:ext uri="{BB962C8B-B14F-4D97-AF65-F5344CB8AC3E}">
-        <p14:creationId xmlns:p14="http://schemas.microsoft.com/office/powerpoint/2010/main" val="2556510997"/>
+        <p14:creationId xmlns:p14="http://schemas.microsoft.com/office/powerpoint/2010/main" val="4167966959"/>
       </p:ext>
     </p:extLst>
   </p:cSld>
